--- a/Presentation_Deck.pptx
+++ b/Presentation_Deck.pptx
@@ -12,9 +12,7 @@
     <p:sldId id="257" r:id="rId3"/>
     <p:sldId id="258" r:id="rId4"/>
     <p:sldId id="259" r:id="rId5"/>
-    <p:sldId id="260" r:id="rId6"/>
     <p:sldId id="261" r:id="rId7"/>
-    <p:sldId id="262" r:id="rId8"/>
     <p:sldId id="263" r:id="rId9"/>
     <p:sldId id="264" r:id="rId10"/>
     <p:sldId id="265" r:id="rId11"/>
@@ -666,90 +664,6 @@
 </p:notes>
 </file>
 
-<file path=ppt/notesSlides/notesSlide5.xml><?xml version="1.0" encoding="utf-8"?>
-<p:notes xmlns:a="http://schemas.openxmlformats.org/drawingml/2006/main" xmlns:r="http://schemas.openxmlformats.org/officeDocument/2006/relationships" xmlns:p="http://schemas.openxmlformats.org/presentationml/2006/main">
-  <p:cSld>
-    <p:spTree>
-      <p:nvGrpSpPr>
-        <p:cNvPr id="1" name=""/>
-        <p:cNvGrpSpPr/>
-        <p:nvPr/>
-      </p:nvGrpSpPr>
-      <p:grpSpPr>
-        <a:xfrm>
-          <a:off x="0" y="0"/>
-          <a:ext cx="0" cy="0"/>
-          <a:chOff x="0" y="0"/>
-          <a:chExt cx="0" cy="0"/>
-        </a:xfrm>
-      </p:grpSpPr>
-      <p:sp>
-        <p:nvSpPr>
-          <p:cNvPr id="2" name="Slide Image Placeholder 1"/>
-          <p:cNvSpPr>
-            <a:spLocks noGrp="1" noRot="1" noChangeAspect="1"/>
-          </p:cNvSpPr>
-          <p:nvPr>
-            <p:ph type="sldImg"/>
-          </p:nvPr>
-        </p:nvSpPr>
-        <p:spPr/>
-      </p:sp>
-      <p:sp>
-        <p:nvSpPr>
-          <p:cNvPr id="3" name="Notes Placeholder 2"/>
-          <p:cNvSpPr>
-            <a:spLocks noGrp="1"/>
-          </p:cNvSpPr>
-          <p:nvPr>
-            <p:ph type="body" idx="1"/>
-          </p:nvPr>
-        </p:nvSpPr>
-        <p:spPr/>
-        <p:txBody>
-          <a:bodyPr/>
-          <a:lstStyle/>
-          <a:p>
-            <a:endParaRPr lang="en-US" dirty="0"/>
-          </a:p>
-        </p:txBody>
-      </p:sp>
-      <p:sp>
-        <p:nvSpPr>
-          <p:cNvPr id="4" name="Slide Number Placeholder 3"/>
-          <p:cNvSpPr>
-            <a:spLocks noGrp="1"/>
-          </p:cNvSpPr>
-          <p:nvPr>
-            <p:ph type="sldNum" sz="quarter" idx="10"/>
-          </p:nvPr>
-        </p:nvSpPr>
-        <p:spPr/>
-        <p:txBody>
-          <a:bodyPr/>
-          <a:lstStyle/>
-          <a:p>
-            <a:fld id="{F7021451-1387-4CA6-816F-3879F97B5CBC}" type="slidenum">
-              <a:rPr lang="en-US"/>
-              <a:t>5</a:t>
-            </a:fld>
-            <a:endParaRPr lang="en-US"/>
-          </a:p>
-        </p:txBody>
-      </p:sp>
-    </p:spTree>
-    <p:extLst>
-      <p:ext uri="{BB962C8B-B14F-4D97-AF65-F5344CB8AC3E}">
-        <p14:creationId xmlns:p14="http://schemas.microsoft.com/office/powerpoint/2010/main" val="1024086991"/>
-      </p:ext>
-    </p:extLst>
-  </p:cSld>
-  <p:clrMapOvr>
-    <a:masterClrMapping/>
-  </p:clrMapOvr>
-</p:notes>
-</file>
-
 <file path=ppt/notesSlides/notesSlide6.xml><?xml version="1.0" encoding="utf-8"?>
 <p:notes xmlns:a="http://schemas.openxmlformats.org/drawingml/2006/main" xmlns:r="http://schemas.openxmlformats.org/officeDocument/2006/relationships" xmlns:p="http://schemas.openxmlformats.org/presentationml/2006/main">
   <p:cSld>
@@ -816,90 +730,6 @@
             <a:fld id="{F7021451-1387-4CA6-816F-3879F97B5CBC}" type="slidenum">
               <a:rPr lang="en-US"/>
               <a:t>6</a:t>
-            </a:fld>
-            <a:endParaRPr lang="en-US"/>
-          </a:p>
-        </p:txBody>
-      </p:sp>
-    </p:spTree>
-    <p:extLst>
-      <p:ext uri="{BB962C8B-B14F-4D97-AF65-F5344CB8AC3E}">
-        <p14:creationId xmlns:p14="http://schemas.microsoft.com/office/powerpoint/2010/main" val="1024086991"/>
-      </p:ext>
-    </p:extLst>
-  </p:cSld>
-  <p:clrMapOvr>
-    <a:masterClrMapping/>
-  </p:clrMapOvr>
-</p:notes>
-</file>
-
-<file path=ppt/notesSlides/notesSlide7.xml><?xml version="1.0" encoding="utf-8"?>
-<p:notes xmlns:a="http://schemas.openxmlformats.org/drawingml/2006/main" xmlns:r="http://schemas.openxmlformats.org/officeDocument/2006/relationships" xmlns:p="http://schemas.openxmlformats.org/presentationml/2006/main">
-  <p:cSld>
-    <p:spTree>
-      <p:nvGrpSpPr>
-        <p:cNvPr id="1" name=""/>
-        <p:cNvGrpSpPr/>
-        <p:nvPr/>
-      </p:nvGrpSpPr>
-      <p:grpSpPr>
-        <a:xfrm>
-          <a:off x="0" y="0"/>
-          <a:ext cx="0" cy="0"/>
-          <a:chOff x="0" y="0"/>
-          <a:chExt cx="0" cy="0"/>
-        </a:xfrm>
-      </p:grpSpPr>
-      <p:sp>
-        <p:nvSpPr>
-          <p:cNvPr id="2" name="Slide Image Placeholder 1"/>
-          <p:cNvSpPr>
-            <a:spLocks noGrp="1" noRot="1" noChangeAspect="1"/>
-          </p:cNvSpPr>
-          <p:nvPr>
-            <p:ph type="sldImg"/>
-          </p:nvPr>
-        </p:nvSpPr>
-        <p:spPr/>
-      </p:sp>
-      <p:sp>
-        <p:nvSpPr>
-          <p:cNvPr id="3" name="Notes Placeholder 2"/>
-          <p:cNvSpPr>
-            <a:spLocks noGrp="1"/>
-          </p:cNvSpPr>
-          <p:nvPr>
-            <p:ph type="body" idx="1"/>
-          </p:nvPr>
-        </p:nvSpPr>
-        <p:spPr/>
-        <p:txBody>
-          <a:bodyPr/>
-          <a:lstStyle/>
-          <a:p>
-            <a:endParaRPr lang="en-US" dirty="0"/>
-          </a:p>
-        </p:txBody>
-      </p:sp>
-      <p:sp>
-        <p:nvSpPr>
-          <p:cNvPr id="4" name="Slide Number Placeholder 3"/>
-          <p:cNvSpPr>
-            <a:spLocks noGrp="1"/>
-          </p:cNvSpPr>
-          <p:nvPr>
-            <p:ph type="sldNum" sz="quarter" idx="10"/>
-          </p:nvPr>
-        </p:nvSpPr>
-        <p:spPr/>
-        <p:txBody>
-          <a:bodyPr/>
-          <a:lstStyle/>
-          <a:p>
-            <a:fld id="{F7021451-1387-4CA6-816F-3879F97B5CBC}" type="slidenum">
-              <a:rPr lang="en-US"/>
-              <a:t>7</a:t>
             </a:fld>
             <a:endParaRPr lang="en-US"/>
           </a:p>
@@ -1545,7 +1375,7 @@
                 <a:ea typeface="Calibri" pitchFamily="34" charset="-122"/>
                 <a:cs typeface="Calibri" pitchFamily="34" charset="-120"/>
               </a:rPr>
-              <a:t>1 / 10</a:t>
+              <a:t>1 / 8</a:t>
             </a:r>
             <a:endParaRPr lang="en-US" sz="800" dirty="0"/>
           </a:p>
@@ -2478,7 +2308,7 @@
                 <a:ea typeface="Calibri" pitchFamily="34" charset="-122"/>
                 <a:cs typeface="Calibri" pitchFamily="34" charset="-120"/>
               </a:rPr>
-              <a:t>10  </a:t>
+              <a:t>08  </a:t>
             </a:r>
             <a:r>
               <a:rPr lang="en-US" sz="2100" b="1" dirty="0">
@@ -2567,7 +2397,7 @@
                 <a:ea typeface="Calibri" pitchFamily="34" charset="-122"/>
                 <a:cs typeface="Calibri" pitchFamily="34" charset="-120"/>
               </a:rPr>
-              <a:t>10 / 10</a:t>
+              <a:t>8 / 8</a:t>
             </a:r>
             <a:endParaRPr lang="en-US" sz="800" dirty="0"/>
           </a:p>
@@ -3301,7 +3131,7 @@
                 <a:ea typeface="Calibri" pitchFamily="34" charset="-122"/>
                 <a:cs typeface="Calibri" pitchFamily="34" charset="-120"/>
               </a:rPr>
-              <a:t>2 / 10</a:t>
+              <a:t>2 / 8</a:t>
             </a:r>
             <a:endParaRPr lang="en-US" sz="800" dirty="0"/>
           </a:p>
@@ -4786,7 +4616,7 @@
                 <a:ea typeface="Calibri" pitchFamily="34" charset="-122"/>
                 <a:cs typeface="Calibri" pitchFamily="34" charset="-120"/>
               </a:rPr>
-              <a:t>3 / 10</a:t>
+              <a:t>3 / 8</a:t>
             </a:r>
             <a:endParaRPr lang="en-US" sz="800" dirty="0"/>
           </a:p>
@@ -5997,7 +5827,7 @@
                 <a:ea typeface="Calibri" pitchFamily="34" charset="-122"/>
                 <a:cs typeface="Calibri" pitchFamily="34" charset="-120"/>
               </a:rPr>
-              <a:t>Database Entities &amp; Core Functional Modules</a:t>
+              <a:t>Database Entities, Modules &amp; Population</a:t>
             </a:r>
             <a:endParaRPr lang="en-US" sz="2100" dirty="0"/>
           </a:p>
@@ -6075,288 +5905,9 @@
                 <a:ea typeface="Calibri" pitchFamily="34" charset="-122"/>
                 <a:cs typeface="Calibri" pitchFamily="34" charset="-120"/>
               </a:rPr>
-              <a:t>4 / 10</a:t>
+              <a:t>4 / 8</a:t>
             </a:r>
             <a:endParaRPr lang="en-US" sz="800" dirty="0"/>
-          </a:p>
-        </p:txBody>
-      </p:sp>
-      <p:sp>
-        <p:nvSpPr>
-          <p:cNvPr id="5" name="Shape 3"/>
-          <p:cNvSpPr/>
-          <p:nvPr/>
-        </p:nvSpPr>
-        <p:spPr>
-          <a:xfrm>
-            <a:off x="1188720" y="3108960"/>
-            <a:ext cx="0" cy="731520"/>
-          </a:xfrm>
-          <a:prstGeom prst="line">
-            <a:avLst/>
-          </a:prstGeom>
-          <a:noFill/>
-          <a:ln w="15875">
-            <a:solidFill>
-              <a:srgbClr val="22D3EE"/>
-            </a:solidFill>
-            <a:prstDash val="solid"/>
-            <a:tailEnd type="triangle"/>
-          </a:ln>
-        </p:spPr>
-        <p:txBody>
-          <a:bodyPr/>
-          <a:lstStyle/>
-          <a:p>
-            <a:endParaRPr lang="en-US"/>
-          </a:p>
-        </p:txBody>
-      </p:sp>
-      <p:sp>
-        <p:nvSpPr>
-          <p:cNvPr id="6" name="Shape 4"/>
-          <p:cNvSpPr/>
-          <p:nvPr/>
-        </p:nvSpPr>
-        <p:spPr>
-          <a:xfrm>
-            <a:off x="1828800" y="2880360"/>
-            <a:ext cx="1371600" cy="0"/>
-          </a:xfrm>
-          <a:prstGeom prst="line">
-            <a:avLst/>
-          </a:prstGeom>
-          <a:noFill/>
-          <a:ln w="15875">
-            <a:solidFill>
-              <a:srgbClr val="22D3EE"/>
-            </a:solidFill>
-            <a:prstDash val="solid"/>
-            <a:tailEnd type="triangle"/>
-          </a:ln>
-        </p:spPr>
-        <p:txBody>
-          <a:bodyPr/>
-          <a:lstStyle/>
-          <a:p>
-            <a:endParaRPr lang="en-US"/>
-          </a:p>
-        </p:txBody>
-      </p:sp>
-      <p:sp>
-        <p:nvSpPr>
-          <p:cNvPr id="7" name="Shape 5"/>
-          <p:cNvSpPr/>
-          <p:nvPr/>
-        </p:nvSpPr>
-        <p:spPr>
-          <a:xfrm flipV="1">
-            <a:off x="4480560" y="1280160"/>
-            <a:ext cx="1280160" cy="1600200"/>
-          </a:xfrm>
-          <a:prstGeom prst="line">
-            <a:avLst/>
-          </a:prstGeom>
-          <a:noFill/>
-          <a:ln w="15875">
-            <a:solidFill>
-              <a:srgbClr val="22D3EE"/>
-            </a:solidFill>
-            <a:prstDash val="solid"/>
-            <a:tailEnd type="triangle"/>
-          </a:ln>
-        </p:spPr>
-        <p:txBody>
-          <a:bodyPr/>
-          <a:lstStyle/>
-          <a:p>
-            <a:endParaRPr lang="en-US"/>
-          </a:p>
-        </p:txBody>
-      </p:sp>
-      <p:sp>
-        <p:nvSpPr>
-          <p:cNvPr id="8" name="Shape 6"/>
-          <p:cNvSpPr/>
-          <p:nvPr/>
-        </p:nvSpPr>
-        <p:spPr>
-          <a:xfrm flipV="1">
-            <a:off x="4480560" y="1920240"/>
-            <a:ext cx="1280160" cy="960120"/>
-          </a:xfrm>
-          <a:prstGeom prst="line">
-            <a:avLst/>
-          </a:prstGeom>
-          <a:noFill/>
-          <a:ln w="15875">
-            <a:solidFill>
-              <a:srgbClr val="22D3EE"/>
-            </a:solidFill>
-            <a:prstDash val="solid"/>
-            <a:tailEnd type="triangle"/>
-          </a:ln>
-        </p:spPr>
-        <p:txBody>
-          <a:bodyPr/>
-          <a:lstStyle/>
-          <a:p>
-            <a:endParaRPr lang="en-US"/>
-          </a:p>
-        </p:txBody>
-      </p:sp>
-      <p:sp>
-        <p:nvSpPr>
-          <p:cNvPr id="9" name="Shape 7"/>
-          <p:cNvSpPr/>
-          <p:nvPr/>
-        </p:nvSpPr>
-        <p:spPr>
-          <a:xfrm>
-            <a:off x="4480560" y="2880360"/>
-            <a:ext cx="1280160" cy="0"/>
-          </a:xfrm>
-          <a:prstGeom prst="line">
-            <a:avLst/>
-          </a:prstGeom>
-          <a:noFill/>
-          <a:ln w="15875">
-            <a:solidFill>
-              <a:srgbClr val="22D3EE"/>
-            </a:solidFill>
-            <a:prstDash val="solid"/>
-            <a:tailEnd type="triangle"/>
-          </a:ln>
-        </p:spPr>
-        <p:txBody>
-          <a:bodyPr/>
-          <a:lstStyle/>
-          <a:p>
-            <a:endParaRPr lang="en-US"/>
-          </a:p>
-        </p:txBody>
-      </p:sp>
-      <p:sp>
-        <p:nvSpPr>
-          <p:cNvPr id="10" name="Shape 8"/>
-          <p:cNvSpPr/>
-          <p:nvPr/>
-        </p:nvSpPr>
-        <p:spPr>
-          <a:xfrm>
-            <a:off x="7040880" y="2880360"/>
-            <a:ext cx="365760" cy="0"/>
-          </a:xfrm>
-          <a:prstGeom prst="line">
-            <a:avLst/>
-          </a:prstGeom>
-          <a:noFill/>
-          <a:ln w="15875">
-            <a:solidFill>
-              <a:srgbClr val="22D3EE"/>
-            </a:solidFill>
-            <a:prstDash val="solid"/>
-            <a:tailEnd type="triangle"/>
-          </a:ln>
-        </p:spPr>
-        <p:txBody>
-          <a:bodyPr/>
-          <a:lstStyle/>
-          <a:p>
-            <a:endParaRPr lang="en-US"/>
-          </a:p>
-        </p:txBody>
-      </p:sp>
-      <p:sp>
-        <p:nvSpPr>
-          <p:cNvPr id="11" name="Shape 9"/>
-          <p:cNvSpPr/>
-          <p:nvPr/>
-        </p:nvSpPr>
-        <p:spPr>
-          <a:xfrm>
-            <a:off x="3840480" y="1828800"/>
-            <a:ext cx="0" cy="822960"/>
-          </a:xfrm>
-          <a:prstGeom prst="line">
-            <a:avLst/>
-          </a:prstGeom>
-          <a:noFill/>
-          <a:ln w="15875">
-            <a:solidFill>
-              <a:srgbClr val="22D3EE"/>
-            </a:solidFill>
-            <a:prstDash val="solid"/>
-            <a:tailEnd type="triangle"/>
-          </a:ln>
-        </p:spPr>
-        <p:txBody>
-          <a:bodyPr/>
-          <a:lstStyle/>
-          <a:p>
-            <a:endParaRPr lang="en-US"/>
-          </a:p>
-        </p:txBody>
-      </p:sp>
-      <p:sp>
-        <p:nvSpPr>
-          <p:cNvPr id="12" name="Shape 10"/>
-          <p:cNvSpPr/>
-          <p:nvPr/>
-        </p:nvSpPr>
-        <p:spPr>
-          <a:xfrm>
-            <a:off x="3840480" y="3108960"/>
-            <a:ext cx="0" cy="731520"/>
-          </a:xfrm>
-          <a:prstGeom prst="line">
-            <a:avLst/>
-          </a:prstGeom>
-          <a:noFill/>
-          <a:ln w="15875">
-            <a:solidFill>
-              <a:srgbClr val="22D3EE"/>
-            </a:solidFill>
-            <a:prstDash val="solid"/>
-            <a:tailEnd type="triangle"/>
-          </a:ln>
-        </p:spPr>
-        <p:txBody>
-          <a:bodyPr/>
-          <a:lstStyle/>
-          <a:p>
-            <a:endParaRPr lang="en-US"/>
-          </a:p>
-        </p:txBody>
-      </p:sp>
-      <p:sp>
-        <p:nvSpPr>
-          <p:cNvPr id="13" name="Shape 11"/>
-          <p:cNvSpPr/>
-          <p:nvPr/>
-        </p:nvSpPr>
-        <p:spPr>
-          <a:xfrm>
-            <a:off x="4480560" y="4069080"/>
-            <a:ext cx="1280160" cy="0"/>
-          </a:xfrm>
-          <a:prstGeom prst="line">
-            <a:avLst/>
-          </a:prstGeom>
-          <a:noFill/>
-          <a:ln w="15875">
-            <a:solidFill>
-              <a:srgbClr val="22D3EE"/>
-            </a:solidFill>
-            <a:prstDash val="solid"/>
-            <a:tailEnd type="triangle"/>
-          </a:ln>
-        </p:spPr>
-        <p:txBody>
-          <a:bodyPr/>
-          <a:lstStyle/>
-          <a:p>
-            <a:endParaRPr lang="en-US"/>
           </a:p>
         </p:txBody>
       </p:sp>
@@ -6368,8 +5919,8 @@
         </p:nvSpPr>
         <p:spPr>
           <a:xfrm>
-            <a:off x="3200400" y="1371600"/>
-            <a:ext cx="1280160" cy="457200"/>
+            <a:off x="2011680" y="1371600"/>
+            <a:ext cx="1188720" cy="457200"/>
           </a:xfrm>
           <a:prstGeom prst="roundRect">
             <a:avLst>
@@ -6402,8 +5953,8 @@
         </p:nvSpPr>
         <p:spPr>
           <a:xfrm>
-            <a:off x="3236976" y="1371600"/>
-            <a:ext cx="1207008" cy="457200"/>
+            <a:off x="2048256" y="1371600"/>
+            <a:ext cx="1115568" cy="457200"/>
           </a:xfrm>
           <a:prstGeom prst="rect">
             <a:avLst/>
@@ -6441,8 +5992,8 @@
         </p:nvSpPr>
         <p:spPr>
           <a:xfrm>
-            <a:off x="3200400" y="2651760"/>
-            <a:ext cx="1280160" cy="457200"/>
+            <a:off x="2011680" y="2514600"/>
+            <a:ext cx="1188720" cy="457200"/>
           </a:xfrm>
           <a:prstGeom prst="roundRect">
             <a:avLst>
@@ -6475,8 +6026,8 @@
         </p:nvSpPr>
         <p:spPr>
           <a:xfrm>
-            <a:off x="3236976" y="2651760"/>
-            <a:ext cx="1207008" cy="457200"/>
+            <a:off x="2048256" y="2514600"/>
+            <a:ext cx="1115568" cy="457200"/>
           </a:xfrm>
           <a:prstGeom prst="rect">
             <a:avLst/>
@@ -6503,6 +6054,22 @@
               <a:t>FIR</a:t>
             </a:r>
             <a:endParaRPr lang="en-US" sz="850" dirty="0"/>
+          </a:p>
+          <a:p>
+            <a:pPr marL="0" indent="0" algn="ctr">
+              <a:buNone/>
+            </a:pPr>
+            <a:r>
+              <a:rPr lang="en-US" sz="750" dirty="0">
+                <a:solidFill>
+                  <a:srgbClr val="9FE8FF"/>
+                </a:solidFill>
+                <a:latin typeface="Calibri"/>
+                <a:ea typeface="Calibri"/>
+                <a:cs typeface="Calibri"/>
+              </a:rPr>
+              <a:t>1,092 records</a:t>
+            </a:r>
           </a:p>
         </p:txBody>
       </p:sp>
@@ -6514,8 +6081,8 @@
         </p:nvSpPr>
         <p:spPr>
           <a:xfrm>
-            <a:off x="3200400" y="3840480"/>
-            <a:ext cx="1280160" cy="457200"/>
+            <a:off x="2011680" y="3657600"/>
+            <a:ext cx="1188720" cy="457200"/>
           </a:xfrm>
           <a:prstGeom prst="roundRect">
             <a:avLst>
@@ -6548,8 +6115,8 @@
         </p:nvSpPr>
         <p:spPr>
           <a:xfrm>
-            <a:off x="3236976" y="3840480"/>
-            <a:ext cx="1207008" cy="457200"/>
+            <a:off x="2048256" y="3657600"/>
+            <a:ext cx="1115568" cy="457200"/>
           </a:xfrm>
           <a:prstGeom prst="rect">
             <a:avLst/>
@@ -6576,6 +6143,22 @@
               <a:t>FIR_CrimeType</a:t>
             </a:r>
             <a:endParaRPr lang="en-US" sz="850" dirty="0"/>
+          </a:p>
+          <a:p>
+            <a:pPr marL="0" indent="0" algn="ctr">
+              <a:buNone/>
+            </a:pPr>
+            <a:r>
+              <a:rPr lang="en-US" sz="750" dirty="0">
+                <a:solidFill>
+                  <a:srgbClr val="9FE8FF"/>
+                </a:solidFill>
+                <a:latin typeface="Calibri"/>
+                <a:ea typeface="Calibri"/>
+                <a:cs typeface="Calibri"/>
+              </a:rPr>
+              <a:t>1,166 records</a:t>
+            </a:r>
           </a:p>
         </p:txBody>
       </p:sp>
@@ -6587,8 +6170,8 @@
         </p:nvSpPr>
         <p:spPr>
           <a:xfrm>
-            <a:off x="548640" y="2651760"/>
-            <a:ext cx="1280160" cy="457200"/>
+            <a:off x="457200" y="2514600"/>
+            <a:ext cx="1188720" cy="457200"/>
           </a:xfrm>
           <a:prstGeom prst="roundRect">
             <a:avLst>
@@ -6621,8 +6204,8 @@
         </p:nvSpPr>
         <p:spPr>
           <a:xfrm>
-            <a:off x="585216" y="2651760"/>
-            <a:ext cx="1207008" cy="457200"/>
+            <a:off x="493776" y="2514600"/>
+            <a:ext cx="1115568" cy="457200"/>
           </a:xfrm>
           <a:prstGeom prst="rect">
             <a:avLst/>
@@ -6649,6 +6232,22 @@
               <a:t>PoliceStation</a:t>
             </a:r>
             <a:endParaRPr lang="en-US" sz="850" dirty="0"/>
+          </a:p>
+          <a:p>
+            <a:pPr marL="0" indent="0" algn="ctr">
+              <a:buNone/>
+            </a:pPr>
+            <a:r>
+              <a:rPr lang="en-US" sz="750" dirty="0">
+                <a:solidFill>
+                  <a:srgbClr val="9FE8FF"/>
+                </a:solidFill>
+                <a:latin typeface="Calibri"/>
+                <a:ea typeface="Calibri"/>
+                <a:cs typeface="Calibri"/>
+              </a:rPr>
+              <a:t>21 records</a:t>
+            </a:r>
           </a:p>
         </p:txBody>
       </p:sp>
@@ -6660,8 +6259,8 @@
         </p:nvSpPr>
         <p:spPr>
           <a:xfrm>
-            <a:off x="548640" y="3840480"/>
-            <a:ext cx="1280160" cy="457200"/>
+            <a:off x="457200" y="3657600"/>
+            <a:ext cx="1188720" cy="457200"/>
           </a:xfrm>
           <a:prstGeom prst="roundRect">
             <a:avLst>
@@ -6694,8 +6293,8 @@
         </p:nvSpPr>
         <p:spPr>
           <a:xfrm>
-            <a:off x="585216" y="3840480"/>
-            <a:ext cx="1207008" cy="457200"/>
+            <a:off x="493776" y="3657600"/>
+            <a:ext cx="1115568" cy="457200"/>
           </a:xfrm>
           <a:prstGeom prst="rect">
             <a:avLst/>
@@ -6722,6 +6321,22 @@
               <a:t>Officer</a:t>
             </a:r>
             <a:endParaRPr lang="en-US" sz="850" dirty="0"/>
+          </a:p>
+          <a:p>
+            <a:pPr marL="0" indent="0" algn="ctr">
+              <a:buNone/>
+            </a:pPr>
+            <a:r>
+              <a:rPr lang="en-US" sz="750" dirty="0">
+                <a:solidFill>
+                  <a:srgbClr val="9FE8FF"/>
+                </a:solidFill>
+                <a:latin typeface="Calibri"/>
+                <a:ea typeface="Calibri"/>
+                <a:cs typeface="Calibri"/>
+              </a:rPr>
+              <a:t>50 records</a:t>
+            </a:r>
           </a:p>
         </p:txBody>
       </p:sp>
@@ -6733,8 +6348,8 @@
         </p:nvSpPr>
         <p:spPr>
           <a:xfrm>
-            <a:off x="5760720" y="1051560"/>
-            <a:ext cx="1280160" cy="457200"/>
+            <a:off x="3566160" y="1325880"/>
+            <a:ext cx="1188720" cy="457200"/>
           </a:xfrm>
           <a:prstGeom prst="roundRect">
             <a:avLst>
@@ -6767,8 +6382,8 @@
         </p:nvSpPr>
         <p:spPr>
           <a:xfrm>
-            <a:off x="5797296" y="1051560"/>
-            <a:ext cx="1207008" cy="457200"/>
+            <a:off x="3602736" y="1325880"/>
+            <a:ext cx="1115568" cy="457200"/>
           </a:xfrm>
           <a:prstGeom prst="rect">
             <a:avLst/>
@@ -6795,6 +6410,22 @@
               <a:t>Victim</a:t>
             </a:r>
             <a:endParaRPr lang="en-US" sz="850" dirty="0"/>
+          </a:p>
+          <a:p>
+            <a:pPr marL="0" indent="0" algn="ctr">
+              <a:buNone/>
+            </a:pPr>
+            <a:r>
+              <a:rPr lang="en-US" sz="750" dirty="0">
+                <a:solidFill>
+                  <a:srgbClr val="9FE8FF"/>
+                </a:solidFill>
+                <a:latin typeface="Calibri"/>
+                <a:ea typeface="Calibri"/>
+                <a:cs typeface="Calibri"/>
+              </a:rPr>
+              <a:t>994 records</a:t>
+            </a:r>
           </a:p>
         </p:txBody>
       </p:sp>
@@ -6806,8 +6437,8 @@
         </p:nvSpPr>
         <p:spPr>
           <a:xfrm>
-            <a:off x="5760720" y="1691640"/>
-            <a:ext cx="1280160" cy="457200"/>
+            <a:off x="3566160" y="1874520"/>
+            <a:ext cx="1188720" cy="457200"/>
           </a:xfrm>
           <a:prstGeom prst="roundRect">
             <a:avLst>
@@ -6840,8 +6471,8 @@
         </p:nvSpPr>
         <p:spPr>
           <a:xfrm>
-            <a:off x="5797296" y="1691640"/>
-            <a:ext cx="1207008" cy="457200"/>
+            <a:off x="3602736" y="1874520"/>
+            <a:ext cx="1115568" cy="457200"/>
           </a:xfrm>
           <a:prstGeom prst="rect">
             <a:avLst/>
@@ -6868,6 +6499,22 @@
               <a:t>Accused</a:t>
             </a:r>
             <a:endParaRPr lang="en-US" sz="850" dirty="0"/>
+          </a:p>
+          <a:p>
+            <a:pPr marL="0" indent="0" algn="ctr">
+              <a:buNone/>
+            </a:pPr>
+            <a:r>
+              <a:rPr lang="en-US" sz="750" dirty="0">
+                <a:solidFill>
+                  <a:srgbClr val="9FE8FF"/>
+                </a:solidFill>
+                <a:latin typeface="Calibri"/>
+                <a:ea typeface="Calibri"/>
+                <a:cs typeface="Calibri"/>
+              </a:rPr>
+              <a:t>142 records</a:t>
+            </a:r>
           </a:p>
         </p:txBody>
       </p:sp>
@@ -6879,8 +6526,8 @@
         </p:nvSpPr>
         <p:spPr>
           <a:xfrm>
-            <a:off x="5760720" y="2651760"/>
-            <a:ext cx="1280160" cy="457200"/>
+            <a:off x="3566160" y="2514600"/>
+            <a:ext cx="1188720" cy="457200"/>
           </a:xfrm>
           <a:prstGeom prst="roundRect">
             <a:avLst>
@@ -6913,8 +6560,8 @@
         </p:nvSpPr>
         <p:spPr>
           <a:xfrm>
-            <a:off x="5797296" y="2651760"/>
-            <a:ext cx="1207008" cy="457200"/>
+            <a:off x="3602736" y="2514600"/>
+            <a:ext cx="1115568" cy="457200"/>
           </a:xfrm>
           <a:prstGeom prst="rect">
             <a:avLst/>
@@ -6941,6 +6588,22 @@
               <a:t>CourtCase</a:t>
             </a:r>
             <a:endParaRPr lang="en-US" sz="850" dirty="0"/>
+          </a:p>
+          <a:p>
+            <a:pPr marL="0" indent="0" algn="ctr">
+              <a:buNone/>
+            </a:pPr>
+            <a:r>
+              <a:rPr lang="en-US" sz="750" dirty="0">
+                <a:solidFill>
+                  <a:srgbClr val="9FE8FF"/>
+                </a:solidFill>
+                <a:latin typeface="Calibri"/>
+                <a:ea typeface="Calibri"/>
+                <a:cs typeface="Calibri"/>
+              </a:rPr>
+              <a:t>115 records</a:t>
+            </a:r>
           </a:p>
         </p:txBody>
       </p:sp>
@@ -6952,8 +6615,8 @@
         </p:nvSpPr>
         <p:spPr>
           <a:xfrm>
-            <a:off x="5760720" y="3840480"/>
-            <a:ext cx="1280160" cy="457200"/>
+            <a:off x="3566160" y="3657600"/>
+            <a:ext cx="1188720" cy="457200"/>
           </a:xfrm>
           <a:prstGeom prst="roundRect">
             <a:avLst>
@@ -6986,8 +6649,8 @@
         </p:nvSpPr>
         <p:spPr>
           <a:xfrm>
-            <a:off x="5797296" y="3840480"/>
-            <a:ext cx="1207008" cy="457200"/>
+            <a:off x="3602736" y="3657600"/>
+            <a:ext cx="1115568" cy="457200"/>
           </a:xfrm>
           <a:prstGeom prst="rect">
             <a:avLst/>
@@ -7014,6 +6677,22 @@
               <a:t>CrimeType</a:t>
             </a:r>
             <a:endParaRPr lang="en-US" sz="850" dirty="0"/>
+          </a:p>
+          <a:p>
+            <a:pPr marL="0" indent="0" algn="ctr">
+              <a:buNone/>
+            </a:pPr>
+            <a:r>
+              <a:rPr lang="en-US" sz="750" dirty="0">
+                <a:solidFill>
+                  <a:srgbClr val="9FE8FF"/>
+                </a:solidFill>
+                <a:latin typeface="Calibri"/>
+                <a:ea typeface="Calibri"/>
+                <a:cs typeface="Calibri"/>
+              </a:rPr>
+              <a:t>134 records</a:t>
+            </a:r>
           </a:p>
         </p:txBody>
       </p:sp>
@@ -7025,8 +6704,8 @@
         </p:nvSpPr>
         <p:spPr>
           <a:xfrm>
-            <a:off x="7406640" y="2651760"/>
-            <a:ext cx="1280160" cy="457200"/>
+            <a:off x="5120640" y="2514600"/>
+            <a:ext cx="1188720" cy="457200"/>
           </a:xfrm>
           <a:prstGeom prst="roundRect">
             <a:avLst>
@@ -7059,8 +6738,8 @@
         </p:nvSpPr>
         <p:spPr>
           <a:xfrm>
-            <a:off x="7443216" y="2651760"/>
-            <a:ext cx="1207008" cy="457200"/>
+            <a:off x="5157216" y="2514600"/>
+            <a:ext cx="1115568" cy="457200"/>
           </a:xfrm>
           <a:prstGeom prst="rect">
             <a:avLst/>
@@ -7088,44 +6767,21 @@
             </a:r>
             <a:endParaRPr lang="en-US" sz="850" dirty="0"/>
           </a:p>
-        </p:txBody>
-      </p:sp>
-      <p:sp>
-        <p:nvSpPr>
-          <p:cNvPr id="34" name="Text 32"/>
-          <p:cNvSpPr txBox="1"/>
-          <p:nvPr/>
-        </p:nvSpPr>
-        <p:spPr>
-          <a:xfrm>
-            <a:off x="4480560" y="4315968"/>
-            <a:ext cx="2743200" cy="182880"/>
-          </a:xfrm>
-          <a:prstGeom prst="rect">
-            <a:avLst/>
-          </a:prstGeom>
-          <a:noFill/>
-          <a:ln/>
-        </p:spPr>
-        <p:txBody>
-          <a:bodyPr wrap="square" lIns="0" tIns="0" rIns="0" bIns="0" rtlCol="0" anchor="ctr"/>
-          <a:lstStyle/>
-          <a:p>
-            <a:pPr marL="0" indent="0">
-              <a:buNone/>
-            </a:pPr>
-            <a:r>
-              <a:rPr lang="en-US" sz="800" dirty="0">
-                <a:solidFill>
-                  <a:srgbClr val="A8B8D8"/>
-                </a:solidFill>
-                <a:latin typeface="Calibri" pitchFamily="34" charset="0"/>
-                <a:ea typeface="Calibri" pitchFamily="34" charset="-122"/>
-                <a:cs typeface="Calibri" pitchFamily="34" charset="-120"/>
-              </a:rPr>
-              <a:t>FIR ↔ CrimeType via FIR_CrimeType</a:t>
-            </a:r>
-            <a:endParaRPr lang="en-US" sz="800" dirty="0"/>
+          <a:p>
+            <a:pPr marL="0" indent="0" algn="ctr">
+              <a:buNone/>
+            </a:pPr>
+            <a:r>
+              <a:rPr lang="en-US" sz="750" dirty="0">
+                <a:solidFill>
+                  <a:srgbClr val="9FE8FF"/>
+                </a:solidFill>
+                <a:latin typeface="Calibri"/>
+                <a:ea typeface="Calibri"/>
+                <a:cs typeface="Calibri"/>
+              </a:rPr>
+              <a:t>10 records</a:t>
+            </a:r>
           </a:p>
         </p:txBody>
       </p:sp>
@@ -7270,14 +6926,293 @@
       </p:sp>
       <p:sp>
         <p:nvSpPr>
-          <p:cNvPr id="36" name="Text 34"/>
+          <p:cNvPr id="1001" name="Shape 1001"/>
+          <p:cNvSpPr/>
+          <p:nvPr/>
+        </p:nvSpPr>
+        <p:spPr>
+          <a:xfrm>
+            <a:off x="1645920" y="2743200"/>
+            <a:ext cx="365760" cy="0"/>
+          </a:xfrm>
+          <a:prstGeom prst="line">
+            <a:avLst/>
+          </a:prstGeom>
+          <a:noFill/>
+          <a:ln w="15875">
+            <a:solidFill>
+              <a:srgbClr val="22D3EE"/>
+            </a:solidFill>
+            <a:prstDash val="solid"/>
+            <a:tailEnd type="triangle"/>
+          </a:ln>
+        </p:spPr>
+        <p:txBody>
+          <a:bodyPr/>
+          <a:lstStyle/>
+          <a:p>
+            <a:endParaRPr lang="en-US"/>
+          </a:p>
+        </p:txBody>
+      </p:sp>
+      <p:sp>
+        <p:nvSpPr>
+          <p:cNvPr id="1002" name="Shape 1002"/>
+          <p:cNvSpPr/>
+          <p:nvPr/>
+        </p:nvSpPr>
+        <p:spPr>
+          <a:xfrm>
+            <a:off x="1051560" y="2971800"/>
+            <a:ext cx="0" cy="685800"/>
+          </a:xfrm>
+          <a:prstGeom prst="line">
+            <a:avLst/>
+          </a:prstGeom>
+          <a:noFill/>
+          <a:ln w="15875">
+            <a:solidFill>
+              <a:srgbClr val="22D3EE"/>
+            </a:solidFill>
+            <a:prstDash val="solid"/>
+            <a:tailEnd type="triangle"/>
+          </a:ln>
+        </p:spPr>
+        <p:txBody>
+          <a:bodyPr/>
+          <a:lstStyle/>
+          <a:p>
+            <a:endParaRPr lang="en-US"/>
+          </a:p>
+        </p:txBody>
+      </p:sp>
+      <p:sp>
+        <p:nvSpPr>
+          <p:cNvPr id="1003" name="Shape 1003"/>
+          <p:cNvSpPr/>
+          <p:nvPr/>
+        </p:nvSpPr>
+        <p:spPr>
+          <a:xfrm>
+            <a:off x="2606040" y="1828800"/>
+            <a:ext cx="0" cy="685800"/>
+          </a:xfrm>
+          <a:prstGeom prst="line">
+            <a:avLst/>
+          </a:prstGeom>
+          <a:noFill/>
+          <a:ln w="15875">
+            <a:solidFill>
+              <a:srgbClr val="22D3EE"/>
+            </a:solidFill>
+            <a:prstDash val="solid"/>
+            <a:tailEnd type="triangle"/>
+          </a:ln>
+        </p:spPr>
+        <p:txBody>
+          <a:bodyPr/>
+          <a:lstStyle/>
+          <a:p>
+            <a:endParaRPr lang="en-US"/>
+          </a:p>
+        </p:txBody>
+      </p:sp>
+      <p:sp>
+        <p:nvSpPr>
+          <p:cNvPr id="1004" name="Shape 1004"/>
+          <p:cNvSpPr/>
+          <p:nvPr/>
+        </p:nvSpPr>
+        <p:spPr>
+          <a:xfrm>
+            <a:off x="2606040" y="2971800"/>
+            <a:ext cx="0" cy="685800"/>
+          </a:xfrm>
+          <a:prstGeom prst="line">
+            <a:avLst/>
+          </a:prstGeom>
+          <a:noFill/>
+          <a:ln w="15875">
+            <a:solidFill>
+              <a:srgbClr val="22D3EE"/>
+            </a:solidFill>
+            <a:prstDash val="solid"/>
+            <a:tailEnd type="triangle"/>
+          </a:ln>
+        </p:spPr>
+        <p:txBody>
+          <a:bodyPr/>
+          <a:lstStyle/>
+          <a:p>
+            <a:endParaRPr lang="en-US"/>
+          </a:p>
+        </p:txBody>
+      </p:sp>
+      <p:sp>
+        <p:nvSpPr>
+          <p:cNvPr id="1005" name="Shape 1005"/>
+          <p:cNvSpPr/>
+          <p:nvPr/>
+        </p:nvSpPr>
+        <p:spPr>
+          <a:xfrm flipV="1">
+            <a:off x="3200400" y="1554480"/>
+            <a:ext cx="365760" cy="1143000"/>
+          </a:xfrm>
+          <a:prstGeom prst="line">
+            <a:avLst/>
+          </a:prstGeom>
+          <a:noFill/>
+          <a:ln w="15875">
+            <a:solidFill>
+              <a:srgbClr val="22D3EE"/>
+            </a:solidFill>
+            <a:prstDash val="solid"/>
+            <a:tailEnd type="triangle"/>
+          </a:ln>
+        </p:spPr>
+        <p:txBody>
+          <a:bodyPr/>
+          <a:lstStyle/>
+          <a:p>
+            <a:endParaRPr lang="en-US"/>
+          </a:p>
+        </p:txBody>
+      </p:sp>
+      <p:sp>
+        <p:nvSpPr>
+          <p:cNvPr id="1006" name="Shape 1006"/>
+          <p:cNvSpPr/>
+          <p:nvPr/>
+        </p:nvSpPr>
+        <p:spPr>
+          <a:xfrm flipV="1">
+            <a:off x="3200400" y="2103120"/>
+            <a:ext cx="365760" cy="594360"/>
+          </a:xfrm>
+          <a:prstGeom prst="line">
+            <a:avLst/>
+          </a:prstGeom>
+          <a:noFill/>
+          <a:ln w="15875">
+            <a:solidFill>
+              <a:srgbClr val="22D3EE"/>
+            </a:solidFill>
+            <a:prstDash val="solid"/>
+            <a:tailEnd type="triangle"/>
+          </a:ln>
+        </p:spPr>
+        <p:txBody>
+          <a:bodyPr/>
+          <a:lstStyle/>
+          <a:p>
+            <a:endParaRPr lang="en-US"/>
+          </a:p>
+        </p:txBody>
+      </p:sp>
+      <p:sp>
+        <p:nvSpPr>
+          <p:cNvPr id="1007" name="Shape 1007"/>
+          <p:cNvSpPr/>
+          <p:nvPr/>
+        </p:nvSpPr>
+        <p:spPr>
+          <a:xfrm>
+            <a:off x="3200400" y="2743200"/>
+            <a:ext cx="365760" cy="0"/>
+          </a:xfrm>
+          <a:prstGeom prst="line">
+            <a:avLst/>
+          </a:prstGeom>
+          <a:noFill/>
+          <a:ln w="15875">
+            <a:solidFill>
+              <a:srgbClr val="22D3EE"/>
+            </a:solidFill>
+            <a:prstDash val="solid"/>
+            <a:tailEnd type="triangle"/>
+          </a:ln>
+        </p:spPr>
+        <p:txBody>
+          <a:bodyPr/>
+          <a:lstStyle/>
+          <a:p>
+            <a:endParaRPr lang="en-US"/>
+          </a:p>
+        </p:txBody>
+      </p:sp>
+      <p:sp>
+        <p:nvSpPr>
+          <p:cNvPr id="1008" name="Shape 1008"/>
+          <p:cNvSpPr/>
+          <p:nvPr/>
+        </p:nvSpPr>
+        <p:spPr>
+          <a:xfrm>
+            <a:off x="4754880" y="2743200"/>
+            <a:ext cx="365760" cy="0"/>
+          </a:xfrm>
+          <a:prstGeom prst="line">
+            <a:avLst/>
+          </a:prstGeom>
+          <a:noFill/>
+          <a:ln w="15875">
+            <a:solidFill>
+              <a:srgbClr val="22D3EE"/>
+            </a:solidFill>
+            <a:prstDash val="solid"/>
+            <a:tailEnd type="triangle"/>
+          </a:ln>
+        </p:spPr>
+        <p:txBody>
+          <a:bodyPr/>
+          <a:lstStyle/>
+          <a:p>
+            <a:endParaRPr lang="en-US"/>
+          </a:p>
+        </p:txBody>
+      </p:sp>
+      <p:sp>
+        <p:nvSpPr>
+          <p:cNvPr id="1009" name="Shape 1009"/>
+          <p:cNvSpPr/>
+          <p:nvPr/>
+        </p:nvSpPr>
+        <p:spPr>
+          <a:xfrm>
+            <a:off x="3200400" y="3886200"/>
+            <a:ext cx="365760" cy="0"/>
+          </a:xfrm>
+          <a:prstGeom prst="line">
+            <a:avLst/>
+          </a:prstGeom>
+          <a:noFill/>
+          <a:ln w="15875">
+            <a:solidFill>
+              <a:srgbClr val="22D3EE"/>
+            </a:solidFill>
+            <a:prstDash val="solid"/>
+            <a:tailEnd type="triangle"/>
+          </a:ln>
+        </p:spPr>
+        <p:txBody>
+          <a:bodyPr/>
+          <a:lstStyle/>
+          <a:p>
+            <a:endParaRPr lang="en-US"/>
+          </a:p>
+        </p:txBody>
+      </p:sp>
+      <p:sp>
+        <p:nvSpPr>
+          <p:cNvPr id="1010" name="Shape 1010"/>
           <p:cNvSpPr txBox="1"/>
           <p:nvPr/>
         </p:nvSpPr>
         <p:spPr>
           <a:xfrm>
-            <a:off x="457200" y="4553712"/>
-            <a:ext cx="8229600" cy="182880"/>
+            <a:off x="2011680" y="4187952"/>
+            <a:ext cx="4297680" cy="182880"/>
           </a:xfrm>
           <a:prstGeom prst="rect">
             <a:avLst/>
@@ -7289,6 +7224,44 @@
           <a:bodyPr wrap="square" lIns="0" tIns="0" rIns="0" bIns="0" rtlCol="0" anchor="ctr"/>
           <a:lstStyle/>
           <a:p>
+            <a:pPr marL="0" indent="0" algn="ctr">
+              <a:buNone/>
+            </a:pPr>
+            <a:r>
+              <a:rPr lang="en-US" sz="800" dirty="0">
+                <a:solidFill>
+                  <a:srgbClr val="FFFFFF"/>
+                </a:solidFill>
+                <a:latin typeface="Calibri"/>
+                <a:ea typeface="Calibri"/>
+                <a:cs typeface="Calibri"/>
+              </a:rPr>
+              <a:t>FIR ↔ CrimeType via FIR_CrimeType</a:t>
+            </a:r>
+          </a:p>
+        </p:txBody>
+      </p:sp>
+      <p:sp>
+        <p:nvSpPr>
+          <p:cNvPr id="1011" name="Shape 1011"/>
+          <p:cNvSpPr txBox="1"/>
+          <p:nvPr/>
+        </p:nvSpPr>
+        <p:spPr>
+          <a:xfrm>
+            <a:off x="457200" y="4434840"/>
+            <a:ext cx="8229600" cy="228600"/>
+          </a:xfrm>
+          <a:prstGeom prst="rect">
+            <a:avLst/>
+          </a:prstGeom>
+          <a:noFill/>
+          <a:ln/>
+        </p:spPr>
+        <p:txBody>
+          <a:bodyPr wrap="square" lIns="0" tIns="0" rIns="0" bIns="0" rtlCol="0" anchor="ctr"/>
+          <a:lstStyle/>
+          <a:p>
             <a:pPr marL="0" indent="0">
               <a:buNone/>
             </a:pPr>
@@ -7297,187 +7270,25 @@
                 <a:solidFill>
                   <a:srgbClr val="A8B8D8"/>
                 </a:solidFill>
-                <a:latin typeface="Calibri" pitchFamily="34" charset="0"/>
-                <a:ea typeface="Calibri" pitchFamily="34" charset="-122"/>
-                <a:cs typeface="Calibri" pitchFamily="34" charset="-120"/>
-              </a:rPr>
-              <a:t>Conceptual ER-style diagram. Premises, Weapon, CaseStatus: relationships not shown.</a:t>
-            </a:r>
-            <a:endParaRPr lang="en-US" sz="800" dirty="0"/>
-          </a:p>
-        </p:txBody>
-      </p:sp>
-    </p:spTree>
-  </p:cSld>
-  <p:clrMapOvr>
-    <a:masterClrMapping/>
-  </p:clrMapOvr>
-</p:sld>
-</file>
-
-<file path=ppt/slides/slide5.xml><?xml version="1.0" encoding="utf-8"?>
-<p:sld xmlns:a="http://schemas.openxmlformats.org/drawingml/2006/main" xmlns:r="http://schemas.openxmlformats.org/officeDocument/2006/relationships" xmlns:p="http://schemas.openxmlformats.org/presentationml/2006/main">
-  <p:cSld name="Slide 5">
-    <p:bg>
-      <p:bgPr>
-        <a:solidFill>
-          <a:srgbClr val="0A1428"/>
-        </a:solidFill>
-        <a:effectLst/>
-      </p:bgPr>
-    </p:bg>
-    <p:spTree>
-      <p:nvGrpSpPr>
-        <p:cNvPr id="1" name=""/>
-        <p:cNvGrpSpPr/>
-        <p:nvPr/>
-      </p:nvGrpSpPr>
-      <p:grpSpPr>
-        <a:xfrm>
-          <a:off x="0" y="0"/>
-          <a:ext cx="0" cy="0"/>
-          <a:chOff x="0" y="0"/>
-          <a:chExt cx="0" cy="0"/>
-        </a:xfrm>
-      </p:grpSpPr>
-      <p:sp>
-        <p:nvSpPr>
-          <p:cNvPr id="2" name="Text 0"/>
-          <p:cNvSpPr txBox="1"/>
-          <p:nvPr/>
-        </p:nvSpPr>
-        <p:spPr>
-          <a:xfrm>
-            <a:off x="457200" y="274320"/>
-            <a:ext cx="8229600" cy="548640"/>
-          </a:xfrm>
-          <a:prstGeom prst="rect">
-            <a:avLst/>
-          </a:prstGeom>
-          <a:noFill/>
-          <a:ln/>
-        </p:spPr>
-        <p:txBody>
-          <a:bodyPr wrap="square" lIns="0" tIns="0" rIns="0" bIns="0" rtlCol="0" anchor="ctr"/>
-          <a:lstStyle/>
-          <a:p>
-            <a:pPr marL="0" indent="0">
-              <a:buNone/>
-            </a:pPr>
-            <a:r>
-              <a:rPr lang="en-US" sz="2100" b="1" dirty="0">
-                <a:solidFill>
-                  <a:srgbClr val="22D3EE"/>
-                </a:solidFill>
-                <a:latin typeface="Calibri" pitchFamily="34" charset="0"/>
-                <a:ea typeface="Calibri" pitchFamily="34" charset="-122"/>
-                <a:cs typeface="Calibri" pitchFamily="34" charset="-120"/>
-              </a:rPr>
-              <a:t>05  </a:t>
-            </a:r>
-            <a:r>
-              <a:rPr lang="en-US" sz="2100" b="1" dirty="0">
-                <a:solidFill>
-                  <a:srgbClr val="FFFFFF"/>
-                </a:solidFill>
-                <a:latin typeface="Calibri" pitchFamily="34" charset="0"/>
-                <a:ea typeface="Calibri" pitchFamily="34" charset="-122"/>
-                <a:cs typeface="Calibri" pitchFamily="34" charset="-120"/>
-              </a:rPr>
-              <a:t>Database Population &amp; Data Quality</a:t>
-            </a:r>
-            <a:endParaRPr lang="en-US" sz="2100" dirty="0"/>
-          </a:p>
-        </p:txBody>
-      </p:sp>
-      <p:sp>
-        <p:nvSpPr>
-          <p:cNvPr id="3" name="Text 1"/>
-          <p:cNvSpPr txBox="1"/>
-          <p:nvPr/>
-        </p:nvSpPr>
-        <p:spPr>
-          <a:xfrm>
-            <a:off x="457200" y="4754880"/>
-            <a:ext cx="5486400" cy="228600"/>
-          </a:xfrm>
-          <a:prstGeom prst="rect">
-            <a:avLst/>
-          </a:prstGeom>
-          <a:noFill/>
-          <a:ln/>
-        </p:spPr>
-        <p:txBody>
-          <a:bodyPr wrap="square" lIns="0" tIns="0" rIns="0" bIns="0" rtlCol="0" anchor="ctr"/>
-          <a:lstStyle/>
-          <a:p>
-            <a:pPr marL="0" indent="0">
-              <a:buNone/>
-            </a:pPr>
-            <a:r>
-              <a:rPr lang="en-US" sz="800" dirty="0">
-                <a:solidFill>
-                  <a:srgbClr val="A8B8D8"/>
-                </a:solidFill>
-                <a:latin typeface="Calibri" pitchFamily="34" charset="0"/>
-                <a:ea typeface="Calibri" pitchFamily="34" charset="-122"/>
-                <a:cs typeface="Calibri" pitchFamily="34" charset="-120"/>
-              </a:rPr>
-              <a:t>Gaurav Singh | P15 | CRPSMS | MySQL 8.0</a:t>
-            </a:r>
-            <a:endParaRPr lang="en-US" sz="800" dirty="0"/>
-          </a:p>
-        </p:txBody>
-      </p:sp>
-      <p:sp>
-        <p:nvSpPr>
-          <p:cNvPr id="4" name="Text 2"/>
-          <p:cNvSpPr txBox="1"/>
-          <p:nvPr/>
-        </p:nvSpPr>
-        <p:spPr>
-          <a:xfrm>
-            <a:off x="7772400" y="4754880"/>
-            <a:ext cx="914400" cy="228600"/>
-          </a:xfrm>
-          <a:prstGeom prst="rect">
-            <a:avLst/>
-          </a:prstGeom>
-          <a:noFill/>
-          <a:ln/>
-        </p:spPr>
-        <p:txBody>
-          <a:bodyPr wrap="square" lIns="0" tIns="0" rIns="0" bIns="0" rtlCol="0" anchor="ctr"/>
-          <a:lstStyle/>
-          <a:p>
-            <a:pPr marL="0" indent="0" algn="r">
-              <a:buNone/>
-            </a:pPr>
-            <a:r>
-              <a:rPr lang="en-US" sz="800" dirty="0">
-                <a:solidFill>
-                  <a:srgbClr val="A8B8D8"/>
-                </a:solidFill>
-                <a:latin typeface="Calibri" pitchFamily="34" charset="0"/>
-                <a:ea typeface="Calibri" pitchFamily="34" charset="-122"/>
-                <a:cs typeface="Calibri" pitchFamily="34" charset="-120"/>
-              </a:rPr>
-              <a:t>5 / 10</a:t>
-            </a:r>
-            <a:endParaRPr lang="en-US" sz="800" dirty="0"/>
-          </a:p>
-        </p:txBody>
-      </p:sp>
-      <p:sp>
-        <p:nvSpPr>
-          <p:cNvPr id="5" name="Shape 3"/>
+                <a:latin typeface="Calibri"/>
+                <a:ea typeface="Calibri"/>
+                <a:cs typeface="Calibri"/>
+              </a:rPr>
+              <a:t>Conceptual ER-style diagram. Not shown (relationships omitted): Premises 228 • Weapon 72 • CaseStatus 5. Master tables (e.g., Court, CaseStatus) are intentionally small.</a:t>
+            </a:r>
+          </a:p>
+        </p:txBody>
+      </p:sp>
+      <p:sp>
+        <p:nvSpPr>
+          <p:cNvPr id="1012" name="Shape 1012"/>
           <p:cNvSpPr/>
           <p:nvPr/>
         </p:nvSpPr>
         <p:spPr>
           <a:xfrm>
-            <a:off x="457200" y="1005840"/>
-            <a:ext cx="4206240" cy="1051560"/>
+            <a:off x="6537960" y="1325880"/>
+            <a:ext cx="2148840" cy="1051560"/>
           </a:xfrm>
           <a:prstGeom prst="roundRect">
             <a:avLst>
@@ -7504,14 +7315,14 @@
       </p:sp>
       <p:sp>
         <p:nvSpPr>
-          <p:cNvPr id="6" name="Text 4"/>
+          <p:cNvPr id="1013" name="Shape 1013"/>
           <p:cNvSpPr txBox="1"/>
           <p:nvPr/>
         </p:nvSpPr>
         <p:spPr>
           <a:xfrm>
-            <a:off x="457200" y="1005840"/>
-            <a:ext cx="4206240" cy="1051560"/>
+            <a:off x="6537960" y="1325880"/>
+            <a:ext cx="2148840" cy="1051560"/>
           </a:xfrm>
           <a:prstGeom prst="rect">
             <a:avLst/>
@@ -7527,51 +7338,65 @@
               <a:buNone/>
             </a:pPr>
             <a:r>
-              <a:rPr lang="en-US" sz="3800" b="1" dirty="0">
-                <a:solidFill>
-                  <a:srgbClr val="FFFFFF"/>
-                </a:solidFill>
-                <a:latin typeface="Calibri" pitchFamily="34" charset="0"/>
-                <a:ea typeface="Calibri" pitchFamily="34" charset="-122"/>
-                <a:cs typeface="Calibri" pitchFamily="34" charset="-120"/>
+              <a:rPr lang="en-US" sz="3000" b="1" dirty="0">
+                <a:solidFill>
+                  <a:srgbClr val="FFFFFF"/>
+                </a:solidFill>
+                <a:latin typeface="Calibri"/>
+                <a:ea typeface="Calibri"/>
+                <a:cs typeface="Calibri"/>
               </a:rPr>
               <a:t>4,029</a:t>
             </a:r>
-            <a:endParaRPr lang="en-US" sz="3800" dirty="0"/>
           </a:p>
           <a:p>
             <a:pPr marL="0" indent="0" algn="ctr">
               <a:buNone/>
             </a:pPr>
             <a:r>
-              <a:rPr lang="en-US" sz="950" b="1" dirty="0">
+              <a:rPr lang="en-US" sz="850" b="1" dirty="0">
                 <a:solidFill>
                   <a:srgbClr val="22D3EE"/>
                 </a:solidFill>
-                <a:latin typeface="Calibri" pitchFamily="34" charset="0"/>
-                <a:ea typeface="Calibri" pitchFamily="34" charset="-122"/>
-                <a:cs typeface="Calibri" pitchFamily="34" charset="-120"/>
-              </a:rPr>
-              <a:t>TOTAL RECORDS • 12 CORE RELATIONAL TABLES</a:t>
-            </a:r>
-            <a:endParaRPr lang="en-US" sz="3800" dirty="0"/>
-          </a:p>
-        </p:txBody>
-      </p:sp>
-      <p:sp>
-        <p:nvSpPr>
-          <p:cNvPr id="7" name="Shape 5"/>
+                <a:latin typeface="Calibri"/>
+                <a:ea typeface="Calibri"/>
+                <a:cs typeface="Calibri"/>
+              </a:rPr>
+              <a:t>TOTAL RECORDS</a:t>
+            </a:r>
+          </a:p>
+          <a:p>
+            <a:pPr marL="0" indent="0" algn="ctr">
+              <a:buNone/>
+            </a:pPr>
+            <a:r>
+              <a:rPr lang="en-US" sz="850" b="1" dirty="0">
+                <a:solidFill>
+                  <a:srgbClr val="22D3EE"/>
+                </a:solidFill>
+                <a:latin typeface="Calibri"/>
+                <a:ea typeface="Calibri"/>
+                <a:cs typeface="Calibri"/>
+              </a:rPr>
+              <a:t>12 CORE RELATIONAL TABLES</a:t>
+            </a:r>
+          </a:p>
+        </p:txBody>
+      </p:sp>
+      <p:sp>
+        <p:nvSpPr>
+          <p:cNvPr id="1014" name="Shape 1014"/>
           <p:cNvSpPr/>
           <p:nvPr/>
         </p:nvSpPr>
         <p:spPr>
           <a:xfrm>
-            <a:off x="457200" y="2194560"/>
-            <a:ext cx="4206240" cy="1600200"/>
+            <a:off x="6537960" y="2487168"/>
+            <a:ext cx="2148840" cy="1371600"/>
           </a:xfrm>
           <a:prstGeom prst="roundRect">
             <a:avLst>
-              <a:gd name="adj" fmla="val 3429"/>
+              <a:gd name="adj" fmla="val 5000"/>
             </a:avLst>
           </a:prstGeom>
           <a:solidFill>
@@ -7594,14 +7419,14 @@
       </p:sp>
       <p:sp>
         <p:nvSpPr>
-          <p:cNvPr id="8" name="Text 6"/>
+          <p:cNvPr id="1015" name="Shape 1015"/>
           <p:cNvSpPr txBox="1"/>
           <p:nvPr/>
         </p:nvSpPr>
         <p:spPr>
           <a:xfrm>
-            <a:off x="566928" y="2258568"/>
-            <a:ext cx="3986784" cy="1472184"/>
+            <a:off x="6647688" y="2551176"/>
+            <a:ext cx="1929384" cy="1261872"/>
           </a:xfrm>
           <a:prstGeom prst="rect">
             <a:avLst/>
@@ -7620,17 +7445,16 @@
               <a:buNone/>
             </a:pPr>
             <a:r>
-              <a:rPr lang="en-US" sz="1100" b="1" dirty="0">
+              <a:rPr lang="en-US" sz="1000" b="1" dirty="0">
                 <a:solidFill>
                   <a:srgbClr val="22D3EE"/>
                 </a:solidFill>
-                <a:latin typeface="Calibri" pitchFamily="34" charset="0"/>
-                <a:ea typeface="Calibri" pitchFamily="34" charset="-122"/>
-                <a:cs typeface="Calibri" pitchFamily="34" charset="-120"/>
+                <a:latin typeface="Calibri"/>
+                <a:ea typeface="Calibri"/>
+                <a:cs typeface="Calibri"/>
               </a:rPr>
               <a:t>Data-Integrity Mechanisms</a:t>
             </a:r>
-            <a:endParaRPr lang="en-US" sz="1100" dirty="0"/>
           </a:p>
           <a:p>
             <a:pPr marL="127000" indent="-127000">
@@ -7641,17 +7465,16 @@
               <a:buChar char="•"/>
             </a:pPr>
             <a:r>
-              <a:rPr lang="en-US" sz="950" dirty="0">
-                <a:solidFill>
-                  <a:srgbClr val="FFFFFF"/>
-                </a:solidFill>
-                <a:latin typeface="Calibri" pitchFamily="34" charset="0"/>
-                <a:ea typeface="Calibri" pitchFamily="34" charset="-122"/>
-                <a:cs typeface="Calibri" pitchFamily="34" charset="-120"/>
+              <a:rPr lang="en-US" sz="900" dirty="0">
+                <a:solidFill>
+                  <a:srgbClr val="FFFFFF"/>
+                </a:solidFill>
+                <a:latin typeface="Calibri"/>
+                <a:ea typeface="Calibri"/>
+                <a:cs typeface="Calibri"/>
               </a:rPr>
               <a:t>Primary Keys • Foreign Keys</a:t>
             </a:r>
-            <a:endParaRPr lang="en-US" sz="1100" dirty="0"/>
           </a:p>
           <a:p>
             <a:pPr marL="127000" indent="-127000">
@@ -7662,17 +7485,16 @@
               <a:buChar char="•"/>
             </a:pPr>
             <a:r>
-              <a:rPr lang="en-US" sz="950" dirty="0">
-                <a:solidFill>
-                  <a:srgbClr val="FFFFFF"/>
-                </a:solidFill>
-                <a:latin typeface="Calibri" pitchFamily="34" charset="0"/>
-                <a:ea typeface="Calibri" pitchFamily="34" charset="-122"/>
-                <a:cs typeface="Calibri" pitchFamily="34" charset="-120"/>
+              <a:rPr lang="en-US" sz="900" dirty="0">
+                <a:solidFill>
+                  <a:srgbClr val="FFFFFF"/>
+                </a:solidFill>
+                <a:latin typeface="Calibri"/>
+                <a:ea typeface="Calibri"/>
+                <a:cs typeface="Calibri"/>
               </a:rPr>
               <a:t>CHECK constraints</a:t>
             </a:r>
-            <a:endParaRPr lang="en-US" sz="1100" dirty="0"/>
           </a:p>
           <a:p>
             <a:pPr marL="127000" indent="-127000">
@@ -7683,17 +7505,16 @@
               <a:buChar char="•"/>
             </a:pPr>
             <a:r>
-              <a:rPr lang="en-US" sz="950" dirty="0">
-                <a:solidFill>
-                  <a:srgbClr val="FFFFFF"/>
-                </a:solidFill>
-                <a:latin typeface="Calibri" pitchFamily="34" charset="0"/>
-                <a:ea typeface="Calibri" pitchFamily="34" charset="-122"/>
-                <a:cs typeface="Calibri" pitchFamily="34" charset="-120"/>
+              <a:rPr lang="en-US" sz="900" dirty="0">
+                <a:solidFill>
+                  <a:srgbClr val="FFFFFF"/>
+                </a:solidFill>
+                <a:latin typeface="Calibri"/>
+                <a:ea typeface="Calibri"/>
+                <a:cs typeface="Calibri"/>
               </a:rPr>
               <a:t>Referential integrity</a:t>
             </a:r>
-            <a:endParaRPr lang="en-US" sz="1100" dirty="0"/>
           </a:p>
           <a:p>
             <a:pPr marL="127000" indent="-127000">
@@ -7704,17 +7525,16 @@
               <a:buChar char="•"/>
             </a:pPr>
             <a:r>
-              <a:rPr lang="en-US" sz="950" dirty="0">
-                <a:solidFill>
-                  <a:srgbClr val="FFFFFF"/>
-                </a:solidFill>
-                <a:latin typeface="Calibri" pitchFamily="34" charset="0"/>
-                <a:ea typeface="Calibri" pitchFamily="34" charset="-122"/>
-                <a:cs typeface="Calibri" pitchFamily="34" charset="-120"/>
+              <a:rPr lang="en-US" sz="900" dirty="0">
+                <a:solidFill>
+                  <a:srgbClr val="FFFFFF"/>
+                </a:solidFill>
+                <a:latin typeface="Calibri"/>
+                <a:ea typeface="Calibri"/>
+                <a:cs typeface="Calibri"/>
               </a:rPr>
               <a:t>Date validation</a:t>
             </a:r>
-            <a:endParaRPr lang="en-US" sz="1100" dirty="0"/>
           </a:p>
           <a:p>
             <a:pPr marL="127000" indent="-127000">
@@ -7725,34 +7545,33 @@
               <a:buChar char="•"/>
             </a:pPr>
             <a:r>
-              <a:rPr lang="en-US" sz="950" dirty="0">
-                <a:solidFill>
-                  <a:srgbClr val="FFFFFF"/>
-                </a:solidFill>
-                <a:latin typeface="Calibri" pitchFamily="34" charset="0"/>
-                <a:ea typeface="Calibri" pitchFamily="34" charset="-122"/>
-                <a:cs typeface="Calibri" pitchFamily="34" charset="-120"/>
+              <a:rPr lang="en-US" sz="900" dirty="0">
+                <a:solidFill>
+                  <a:srgbClr val="FFFFFF"/>
+                </a:solidFill>
+                <a:latin typeface="Calibri"/>
+                <a:ea typeface="Calibri"/>
+                <a:cs typeface="Calibri"/>
               </a:rPr>
               <a:t>Controlled status values</a:t>
             </a:r>
-            <a:endParaRPr lang="en-US" sz="1100" dirty="0"/>
-          </a:p>
-        </p:txBody>
-      </p:sp>
-      <p:sp>
-        <p:nvSpPr>
-          <p:cNvPr id="9" name="Shape 7"/>
+          </a:p>
+        </p:txBody>
+      </p:sp>
+      <p:sp>
+        <p:nvSpPr>
+          <p:cNvPr id="1016" name="Shape 1016"/>
           <p:cNvSpPr/>
           <p:nvPr/>
         </p:nvSpPr>
         <p:spPr>
           <a:xfrm>
-            <a:off x="457200" y="3931920"/>
-            <a:ext cx="4206240" cy="365760"/>
+            <a:off x="6537960" y="3950208"/>
+            <a:ext cx="2148840" cy="292608"/>
           </a:xfrm>
           <a:prstGeom prst="roundRect">
             <a:avLst>
-              <a:gd name="adj" fmla="val 12500"/>
+              <a:gd name="adj" fmla="val 1961"/>
             </a:avLst>
           </a:prstGeom>
           <a:solidFill>
@@ -7775,14 +7594,14 @@
       </p:sp>
       <p:sp>
         <p:nvSpPr>
-          <p:cNvPr id="10" name="Text 8"/>
+          <p:cNvPr id="1017" name="Shape 1017"/>
           <p:cNvSpPr txBox="1"/>
           <p:nvPr/>
         </p:nvSpPr>
         <p:spPr>
           <a:xfrm>
-            <a:off x="548640" y="3977640"/>
-            <a:ext cx="4023360" cy="274320"/>
+            <a:off x="6647688" y="3950208"/>
+            <a:ext cx="1929384" cy="292608"/>
           </a:xfrm>
           <a:prstGeom prst="rect">
             <a:avLst/>
@@ -7791,2110 +7610,26 @@
           <a:ln/>
         </p:spPr>
         <p:txBody>
-          <a:bodyPr wrap="square" lIns="0" tIns="0" rIns="0" bIns="0" rtlCol="0" anchor="t"/>
+          <a:bodyPr wrap="square" lIns="0" tIns="0" rIns="0" bIns="0" rtlCol="0" anchor="ctr"/>
           <a:lstStyle/>
           <a:p>
             <a:pPr marL="0" indent="0">
               <a:buNone/>
             </a:pPr>
             <a:r>
-              <a:rPr lang="en-US" sz="1000" dirty="0">
+              <a:rPr lang="en-US" sz="850" dirty="0">
                 <a:solidFill>
                   <a:srgbClr val="9FE8FF"/>
                 </a:solidFill>
-                <a:latin typeface="Consolas" pitchFamily="34" charset="0"/>
-                <a:ea typeface="Consolas" pitchFamily="34" charset="-122"/>
-                <a:cs typeface="Consolas" pitchFamily="34" charset="-120"/>
+                <a:latin typeface="Consolas"/>
+                <a:ea typeface="Consolas"/>
+                <a:cs typeface="Consolas"/>
               </a:rPr>
               <a:t>CHECK (Date_Rptd &gt;= Date_Occ)</a:t>
             </a:r>
-            <a:endParaRPr lang="en-US" sz="1000" dirty="0"/>
-          </a:p>
-        </p:txBody>
-      </p:sp>
-      <p:sp>
-        <p:nvSpPr>
-          <p:cNvPr id="11" name="Text 9"/>
-          <p:cNvSpPr txBox="1"/>
-          <p:nvPr/>
-        </p:nvSpPr>
-        <p:spPr>
-          <a:xfrm>
-            <a:off x="457200" y="4343400"/>
-            <a:ext cx="4206240" cy="182880"/>
-          </a:xfrm>
-          <a:prstGeom prst="rect">
-            <a:avLst/>
-          </a:prstGeom>
-          <a:noFill/>
-          <a:ln/>
-        </p:spPr>
-        <p:txBody>
-          <a:bodyPr wrap="square" lIns="0" tIns="0" rIns="0" bIns="0" rtlCol="0" anchor="ctr"/>
-          <a:lstStyle/>
-          <a:p>
-            <a:pPr marL="0" indent="0">
-              <a:buNone/>
-            </a:pPr>
-            <a:r>
-              <a:rPr lang="en-US" sz="800" i="1" dirty="0">
-                <a:solidFill>
-                  <a:srgbClr val="A8B8D8"/>
-                </a:solidFill>
-                <a:latin typeface="Calibri" pitchFamily="34" charset="0"/>
-                <a:ea typeface="Calibri" pitchFamily="34" charset="-122"/>
-                <a:cs typeface="Calibri" pitchFamily="34" charset="-120"/>
-              </a:rPr>
-              <a:t>Master tables (e.g., Court, CaseStatus) are intentionally small.</a:t>
-            </a:r>
-            <a:endParaRPr lang="en-US" sz="800" dirty="0"/>
-          </a:p>
-        </p:txBody>
-      </p:sp>
-      <p:graphicFrame>
-        <p:nvGraphicFramePr>
-          <p:cNvPr id="12" name="Table 0"/>
-          <p:cNvGraphicFramePr>
-            <a:graphicFrameLocks noGrp="1"/>
-          </p:cNvGraphicFramePr>
-          <p:nvPr>
-            <p:extLst>
-              <p:ext uri="{D42A27DB-BD31-4B8C-83A1-F6EECF244321}">
-                <p14:modId xmlns:p14="http://schemas.microsoft.com/office/powerpoint/2010/main" val="1579011935"/>
-              </p:ext>
-            </p:extLst>
-          </p:nvPr>
-        </p:nvGraphicFramePr>
-        <p:xfrm>
-          <a:off x="5029200" y="1005840"/>
-          <a:ext cx="3657600" cy="3328416"/>
-        </p:xfrm>
-        <a:graphic>
-          <a:graphicData uri="http://schemas.openxmlformats.org/drawingml/2006/table">
-            <a:tbl>
-              <a:tblPr/>
-              <a:tblGrid>
-                <a:gridCol w="2194560">
-                  <a:extLst>
-                    <a:ext uri="{9D8B030D-6E8A-4147-A177-3AD203B41FA5}">
-                      <a16:colId xmlns:a16="http://schemas.microsoft.com/office/drawing/2014/main" val="20000"/>
-                    </a:ext>
-                  </a:extLst>
-                </a:gridCol>
-                <a:gridCol w="1463040">
-                  <a:extLst>
-                    <a:ext uri="{9D8B030D-6E8A-4147-A177-3AD203B41FA5}">
-                      <a16:colId xmlns:a16="http://schemas.microsoft.com/office/drawing/2014/main" val="20001"/>
-                    </a:ext>
-                  </a:extLst>
-                </a:gridCol>
-              </a:tblGrid>
-              <a:tr h="237744">
-                <a:tc>
-                  <a:txBody>
-                    <a:bodyPr/>
-                    <a:lstStyle/>
-                    <a:p>
-                      <a:pPr marL="0" indent="0">
-                        <a:buNone/>
-                      </a:pPr>
-                      <a:r>
-                        <a:rPr lang="en-US" sz="950" b="1" dirty="0">
-                          <a:solidFill>
-                            <a:srgbClr val="FFFFFF"/>
-                          </a:solidFill>
-                          <a:latin typeface="Calibri" pitchFamily="34" charset="0"/>
-                          <a:ea typeface="Calibri" pitchFamily="34" charset="-122"/>
-                          <a:cs typeface="Calibri" pitchFamily="34" charset="-120"/>
-                        </a:rPr>
-                        <a:t>Entity</a:t>
-                      </a:r>
-                      <a:endParaRPr lang="en-US" sz="950" dirty="0">
-                        <a:latin typeface="Calibri" charset="0"/>
-                        <a:ea typeface="Calibri" charset="0"/>
-                        <a:cs typeface="Calibri" charset="0"/>
-                      </a:endParaRPr>
-                    </a:p>
-                  </a:txBody>
-                  <a:tcPr marT="18288" marB="18288">
-                    <a:lnL w="6350" cap="flat" cmpd="sng" algn="ctr">
-                      <a:solidFill>
-                        <a:srgbClr val="1E3A6B"/>
-                      </a:solidFill>
-                      <a:prstDash val="solid"/>
-                      <a:round/>
-                      <a:headEnd type="none" w="med" len="med"/>
-                      <a:tailEnd type="none" w="med" len="med"/>
-                    </a:lnL>
-                    <a:lnR w="6350" cap="flat" cmpd="sng" algn="ctr">
-                      <a:solidFill>
-                        <a:srgbClr val="1E3A6B"/>
-                      </a:solidFill>
-                      <a:prstDash val="solid"/>
-                      <a:round/>
-                      <a:headEnd type="none" w="med" len="med"/>
-                      <a:tailEnd type="none" w="med" len="med"/>
-                    </a:lnR>
-                    <a:lnT w="6350" cap="flat" cmpd="sng" algn="ctr">
-                      <a:solidFill>
-                        <a:srgbClr val="1E3A6B"/>
-                      </a:solidFill>
-                      <a:prstDash val="solid"/>
-                      <a:round/>
-                      <a:headEnd type="none" w="med" len="med"/>
-                      <a:tailEnd type="none" w="med" len="med"/>
-                    </a:lnT>
-                    <a:lnB w="6350" cap="flat" cmpd="sng" algn="ctr">
-                      <a:solidFill>
-                        <a:srgbClr val="1E3A6B"/>
-                      </a:solidFill>
-                      <a:prstDash val="solid"/>
-                      <a:round/>
-                      <a:headEnd type="none" w="med" len="med"/>
-                      <a:tailEnd type="none" w="med" len="med"/>
-                    </a:lnB>
-                    <a:solidFill>
-                      <a:srgbClr val="2F80FF"/>
-                    </a:solidFill>
-                  </a:tcPr>
-                </a:tc>
-                <a:tc>
-                  <a:txBody>
-                    <a:bodyPr/>
-                    <a:lstStyle/>
-                    <a:p>
-                      <a:pPr marL="0" indent="0" algn="r">
-                        <a:buNone/>
-                      </a:pPr>
-                      <a:r>
-                        <a:rPr lang="en-US" sz="950" b="1" dirty="0">
-                          <a:solidFill>
-                            <a:srgbClr val="FFFFFF"/>
-                          </a:solidFill>
-                          <a:latin typeface="Calibri" pitchFamily="34" charset="0"/>
-                          <a:ea typeface="Calibri" pitchFamily="34" charset="-122"/>
-                          <a:cs typeface="Calibri" pitchFamily="34" charset="-120"/>
-                        </a:rPr>
-                        <a:t>Records</a:t>
-                      </a:r>
-                      <a:endParaRPr lang="en-US" sz="950" dirty="0">
-                        <a:latin typeface="Calibri" charset="0"/>
-                        <a:ea typeface="Calibri" charset="0"/>
-                        <a:cs typeface="Calibri" charset="0"/>
-                      </a:endParaRPr>
-                    </a:p>
-                  </a:txBody>
-                  <a:tcPr marT="18288" marB="18288">
-                    <a:lnL w="6350" cap="flat" cmpd="sng" algn="ctr">
-                      <a:solidFill>
-                        <a:srgbClr val="1E3A6B"/>
-                      </a:solidFill>
-                      <a:prstDash val="solid"/>
-                      <a:round/>
-                      <a:headEnd type="none" w="med" len="med"/>
-                      <a:tailEnd type="none" w="med" len="med"/>
-                    </a:lnL>
-                    <a:lnR w="6350" cap="flat" cmpd="sng" algn="ctr">
-                      <a:solidFill>
-                        <a:srgbClr val="1E3A6B"/>
-                      </a:solidFill>
-                      <a:prstDash val="solid"/>
-                      <a:round/>
-                      <a:headEnd type="none" w="med" len="med"/>
-                      <a:tailEnd type="none" w="med" len="med"/>
-                    </a:lnR>
-                    <a:lnT w="6350" cap="flat" cmpd="sng" algn="ctr">
-                      <a:solidFill>
-                        <a:srgbClr val="1E3A6B"/>
-                      </a:solidFill>
-                      <a:prstDash val="solid"/>
-                      <a:round/>
-                      <a:headEnd type="none" w="med" len="med"/>
-                      <a:tailEnd type="none" w="med" len="med"/>
-                    </a:lnT>
-                    <a:lnB w="6350" cap="flat" cmpd="sng" algn="ctr">
-                      <a:solidFill>
-                        <a:srgbClr val="1E3A6B"/>
-                      </a:solidFill>
-                      <a:prstDash val="solid"/>
-                      <a:round/>
-                      <a:headEnd type="none" w="med" len="med"/>
-                      <a:tailEnd type="none" w="med" len="med"/>
-                    </a:lnB>
-                    <a:solidFill>
-                      <a:srgbClr val="2F80FF"/>
-                    </a:solidFill>
-                  </a:tcPr>
-                </a:tc>
-                <a:extLst>
-                  <a:ext uri="{0D108BD9-81ED-4DB2-BD59-A6C34878D82A}">
-                    <a16:rowId xmlns:a16="http://schemas.microsoft.com/office/drawing/2014/main" val="10000"/>
-                  </a:ext>
-                </a:extLst>
-              </a:tr>
-              <a:tr h="237744">
-                <a:tc>
-                  <a:txBody>
-                    <a:bodyPr/>
-                    <a:lstStyle/>
-                    <a:p>
-                      <a:pPr marL="0" indent="0">
-                        <a:buNone/>
-                      </a:pPr>
-                      <a:r>
-                        <a:rPr lang="en-US" sz="900" dirty="0">
-                          <a:solidFill>
-                            <a:srgbClr val="FFFFFF"/>
-                          </a:solidFill>
-                          <a:latin typeface="Calibri" pitchFamily="34" charset="0"/>
-                          <a:ea typeface="Calibri" pitchFamily="34" charset="-122"/>
-                          <a:cs typeface="Calibri" pitchFamily="34" charset="-120"/>
-                        </a:rPr>
-                        <a:t>FIR</a:t>
-                      </a:r>
-                      <a:endParaRPr lang="en-US" sz="900" dirty="0">
-                        <a:latin typeface="Calibri" charset="0"/>
-                        <a:ea typeface="Calibri" charset="0"/>
-                        <a:cs typeface="Calibri" charset="0"/>
-                      </a:endParaRPr>
-                    </a:p>
-                  </a:txBody>
-                  <a:tcPr marT="18288" marB="18288">
-                    <a:lnL w="6350" cap="flat" cmpd="sng" algn="ctr">
-                      <a:solidFill>
-                        <a:srgbClr val="1E3A6B"/>
-                      </a:solidFill>
-                      <a:prstDash val="solid"/>
-                      <a:round/>
-                      <a:headEnd type="none" w="med" len="med"/>
-                      <a:tailEnd type="none" w="med" len="med"/>
-                    </a:lnL>
-                    <a:lnR w="6350" cap="flat" cmpd="sng" algn="ctr">
-                      <a:solidFill>
-                        <a:srgbClr val="1E3A6B"/>
-                      </a:solidFill>
-                      <a:prstDash val="solid"/>
-                      <a:round/>
-                      <a:headEnd type="none" w="med" len="med"/>
-                      <a:tailEnd type="none" w="med" len="med"/>
-                    </a:lnR>
-                    <a:lnT w="6350" cap="flat" cmpd="sng" algn="ctr">
-                      <a:solidFill>
-                        <a:srgbClr val="1E3A6B"/>
-                      </a:solidFill>
-                      <a:prstDash val="solid"/>
-                      <a:round/>
-                      <a:headEnd type="none" w="med" len="med"/>
-                      <a:tailEnd type="none" w="med" len="med"/>
-                    </a:lnT>
-                    <a:lnB w="6350" cap="flat" cmpd="sng" algn="ctr">
-                      <a:solidFill>
-                        <a:srgbClr val="1E3A6B"/>
-                      </a:solidFill>
-                      <a:prstDash val="solid"/>
-                      <a:round/>
-                      <a:headEnd type="none" w="med" len="med"/>
-                      <a:tailEnd type="none" w="med" len="med"/>
-                    </a:lnB>
-                    <a:solidFill>
-                      <a:srgbClr val="12213F"/>
-                    </a:solidFill>
-                  </a:tcPr>
-                </a:tc>
-                <a:tc>
-                  <a:txBody>
-                    <a:bodyPr/>
-                    <a:lstStyle/>
-                    <a:p>
-                      <a:pPr marL="0" indent="0" algn="r">
-                        <a:buNone/>
-                      </a:pPr>
-                      <a:r>
-                        <a:rPr lang="en-US" sz="900" dirty="0">
-                          <a:solidFill>
-                            <a:srgbClr val="FFFFFF"/>
-                          </a:solidFill>
-                          <a:latin typeface="Calibri" pitchFamily="34" charset="0"/>
-                          <a:ea typeface="Calibri" pitchFamily="34" charset="-122"/>
-                          <a:cs typeface="Calibri" pitchFamily="34" charset="-120"/>
-                        </a:rPr>
-                        <a:t>1,092</a:t>
-                      </a:r>
-                      <a:endParaRPr lang="en-US" sz="900" dirty="0">
-                        <a:latin typeface="Calibri" charset="0"/>
-                        <a:ea typeface="Calibri" charset="0"/>
-                        <a:cs typeface="Calibri" charset="0"/>
-                      </a:endParaRPr>
-                    </a:p>
-                  </a:txBody>
-                  <a:tcPr marT="18288" marB="18288">
-                    <a:lnL w="6350" cap="flat" cmpd="sng" algn="ctr">
-                      <a:solidFill>
-                        <a:srgbClr val="1E3A6B"/>
-                      </a:solidFill>
-                      <a:prstDash val="solid"/>
-                      <a:round/>
-                      <a:headEnd type="none" w="med" len="med"/>
-                      <a:tailEnd type="none" w="med" len="med"/>
-                    </a:lnL>
-                    <a:lnR w="6350" cap="flat" cmpd="sng" algn="ctr">
-                      <a:solidFill>
-                        <a:srgbClr val="1E3A6B"/>
-                      </a:solidFill>
-                      <a:prstDash val="solid"/>
-                      <a:round/>
-                      <a:headEnd type="none" w="med" len="med"/>
-                      <a:tailEnd type="none" w="med" len="med"/>
-                    </a:lnR>
-                    <a:lnT w="6350" cap="flat" cmpd="sng" algn="ctr">
-                      <a:solidFill>
-                        <a:srgbClr val="1E3A6B"/>
-                      </a:solidFill>
-                      <a:prstDash val="solid"/>
-                      <a:round/>
-                      <a:headEnd type="none" w="med" len="med"/>
-                      <a:tailEnd type="none" w="med" len="med"/>
-                    </a:lnT>
-                    <a:lnB w="6350" cap="flat" cmpd="sng" algn="ctr">
-                      <a:solidFill>
-                        <a:srgbClr val="1E3A6B"/>
-                      </a:solidFill>
-                      <a:prstDash val="solid"/>
-                      <a:round/>
-                      <a:headEnd type="none" w="med" len="med"/>
-                      <a:tailEnd type="none" w="med" len="med"/>
-                    </a:lnB>
-                    <a:solidFill>
-                      <a:srgbClr val="12213F"/>
-                    </a:solidFill>
-                  </a:tcPr>
-                </a:tc>
-                <a:extLst>
-                  <a:ext uri="{0D108BD9-81ED-4DB2-BD59-A6C34878D82A}">
-                    <a16:rowId xmlns:a16="http://schemas.microsoft.com/office/drawing/2014/main" val="10001"/>
-                  </a:ext>
-                </a:extLst>
-              </a:tr>
-              <a:tr h="237744">
-                <a:tc>
-                  <a:txBody>
-                    <a:bodyPr/>
-                    <a:lstStyle/>
-                    <a:p>
-                      <a:pPr marL="0" indent="0">
-                        <a:buNone/>
-                      </a:pPr>
-                      <a:r>
-                        <a:rPr lang="en-US" sz="900" dirty="0">
-                          <a:solidFill>
-                            <a:srgbClr val="FFFFFF"/>
-                          </a:solidFill>
-                          <a:latin typeface="Calibri" pitchFamily="34" charset="0"/>
-                          <a:ea typeface="Calibri" pitchFamily="34" charset="-122"/>
-                          <a:cs typeface="Calibri" pitchFamily="34" charset="-120"/>
-                        </a:rPr>
-                        <a:t>Victim</a:t>
-                      </a:r>
-                      <a:endParaRPr lang="en-US" sz="900" dirty="0">
-                        <a:latin typeface="Calibri" charset="0"/>
-                        <a:ea typeface="Calibri" charset="0"/>
-                        <a:cs typeface="Calibri" charset="0"/>
-                      </a:endParaRPr>
-                    </a:p>
-                  </a:txBody>
-                  <a:tcPr marT="18288" marB="18288">
-                    <a:lnL w="6350" cap="flat" cmpd="sng" algn="ctr">
-                      <a:solidFill>
-                        <a:srgbClr val="1E3A6B"/>
-                      </a:solidFill>
-                      <a:prstDash val="solid"/>
-                      <a:round/>
-                      <a:headEnd type="none" w="med" len="med"/>
-                      <a:tailEnd type="none" w="med" len="med"/>
-                    </a:lnL>
-                    <a:lnR w="6350" cap="flat" cmpd="sng" algn="ctr">
-                      <a:solidFill>
-                        <a:srgbClr val="1E3A6B"/>
-                      </a:solidFill>
-                      <a:prstDash val="solid"/>
-                      <a:round/>
-                      <a:headEnd type="none" w="med" len="med"/>
-                      <a:tailEnd type="none" w="med" len="med"/>
-                    </a:lnR>
-                    <a:lnT w="6350" cap="flat" cmpd="sng" algn="ctr">
-                      <a:solidFill>
-                        <a:srgbClr val="1E3A6B"/>
-                      </a:solidFill>
-                      <a:prstDash val="solid"/>
-                      <a:round/>
-                      <a:headEnd type="none" w="med" len="med"/>
-                      <a:tailEnd type="none" w="med" len="med"/>
-                    </a:lnT>
-                    <a:lnB w="6350" cap="flat" cmpd="sng" algn="ctr">
-                      <a:solidFill>
-                        <a:srgbClr val="1E3A6B"/>
-                      </a:solidFill>
-                      <a:prstDash val="solid"/>
-                      <a:round/>
-                      <a:headEnd type="none" w="med" len="med"/>
-                      <a:tailEnd type="none" w="med" len="med"/>
-                    </a:lnB>
-                    <a:solidFill>
-                      <a:srgbClr val="0F1B36"/>
-                    </a:solidFill>
-                  </a:tcPr>
-                </a:tc>
-                <a:tc>
-                  <a:txBody>
-                    <a:bodyPr/>
-                    <a:lstStyle/>
-                    <a:p>
-                      <a:pPr marL="0" indent="0" algn="r">
-                        <a:buNone/>
-                      </a:pPr>
-                      <a:r>
-                        <a:rPr lang="en-US" sz="900" dirty="0">
-                          <a:solidFill>
-                            <a:srgbClr val="FFFFFF"/>
-                          </a:solidFill>
-                          <a:latin typeface="Calibri" pitchFamily="34" charset="0"/>
-                          <a:ea typeface="Calibri" pitchFamily="34" charset="-122"/>
-                          <a:cs typeface="Calibri" pitchFamily="34" charset="-120"/>
-                        </a:rPr>
-                        <a:t>994</a:t>
-                      </a:r>
-                      <a:endParaRPr lang="en-US" sz="900" dirty="0">
-                        <a:latin typeface="Calibri" charset="0"/>
-                        <a:ea typeface="Calibri" charset="0"/>
-                        <a:cs typeface="Calibri" charset="0"/>
-                      </a:endParaRPr>
-                    </a:p>
-                  </a:txBody>
-                  <a:tcPr marT="18288" marB="18288">
-                    <a:lnL w="6350" cap="flat" cmpd="sng" algn="ctr">
-                      <a:solidFill>
-                        <a:srgbClr val="1E3A6B"/>
-                      </a:solidFill>
-                      <a:prstDash val="solid"/>
-                      <a:round/>
-                      <a:headEnd type="none" w="med" len="med"/>
-                      <a:tailEnd type="none" w="med" len="med"/>
-                    </a:lnL>
-                    <a:lnR w="6350" cap="flat" cmpd="sng" algn="ctr">
-                      <a:solidFill>
-                        <a:srgbClr val="1E3A6B"/>
-                      </a:solidFill>
-                      <a:prstDash val="solid"/>
-                      <a:round/>
-                      <a:headEnd type="none" w="med" len="med"/>
-                      <a:tailEnd type="none" w="med" len="med"/>
-                    </a:lnR>
-                    <a:lnT w="6350" cap="flat" cmpd="sng" algn="ctr">
-                      <a:solidFill>
-                        <a:srgbClr val="1E3A6B"/>
-                      </a:solidFill>
-                      <a:prstDash val="solid"/>
-                      <a:round/>
-                      <a:headEnd type="none" w="med" len="med"/>
-                      <a:tailEnd type="none" w="med" len="med"/>
-                    </a:lnT>
-                    <a:lnB w="6350" cap="flat" cmpd="sng" algn="ctr">
-                      <a:solidFill>
-                        <a:srgbClr val="1E3A6B"/>
-                      </a:solidFill>
-                      <a:prstDash val="solid"/>
-                      <a:round/>
-                      <a:headEnd type="none" w="med" len="med"/>
-                      <a:tailEnd type="none" w="med" len="med"/>
-                    </a:lnB>
-                    <a:solidFill>
-                      <a:srgbClr val="0F1B36"/>
-                    </a:solidFill>
-                  </a:tcPr>
-                </a:tc>
-                <a:extLst>
-                  <a:ext uri="{0D108BD9-81ED-4DB2-BD59-A6C34878D82A}">
-                    <a16:rowId xmlns:a16="http://schemas.microsoft.com/office/drawing/2014/main" val="10002"/>
-                  </a:ext>
-                </a:extLst>
-              </a:tr>
-              <a:tr h="237744">
-                <a:tc>
-                  <a:txBody>
-                    <a:bodyPr/>
-                    <a:lstStyle/>
-                    <a:p>
-                      <a:pPr marL="0" indent="0">
-                        <a:buNone/>
-                      </a:pPr>
-                      <a:r>
-                        <a:rPr lang="en-US" sz="900" dirty="0">
-                          <a:solidFill>
-                            <a:srgbClr val="FFFFFF"/>
-                          </a:solidFill>
-                          <a:latin typeface="Calibri" pitchFamily="34" charset="0"/>
-                          <a:ea typeface="Calibri" pitchFamily="34" charset="-122"/>
-                          <a:cs typeface="Calibri" pitchFamily="34" charset="-120"/>
-                        </a:rPr>
-                        <a:t>Accused</a:t>
-                      </a:r>
-                      <a:endParaRPr lang="en-US" sz="900" dirty="0">
-                        <a:latin typeface="Calibri" charset="0"/>
-                        <a:ea typeface="Calibri" charset="0"/>
-                        <a:cs typeface="Calibri" charset="0"/>
-                      </a:endParaRPr>
-                    </a:p>
-                  </a:txBody>
-                  <a:tcPr marT="18288" marB="18288">
-                    <a:lnL w="6350" cap="flat" cmpd="sng" algn="ctr">
-                      <a:solidFill>
-                        <a:srgbClr val="1E3A6B"/>
-                      </a:solidFill>
-                      <a:prstDash val="solid"/>
-                      <a:round/>
-                      <a:headEnd type="none" w="med" len="med"/>
-                      <a:tailEnd type="none" w="med" len="med"/>
-                    </a:lnL>
-                    <a:lnR w="6350" cap="flat" cmpd="sng" algn="ctr">
-                      <a:solidFill>
-                        <a:srgbClr val="1E3A6B"/>
-                      </a:solidFill>
-                      <a:prstDash val="solid"/>
-                      <a:round/>
-                      <a:headEnd type="none" w="med" len="med"/>
-                      <a:tailEnd type="none" w="med" len="med"/>
-                    </a:lnR>
-                    <a:lnT w="6350" cap="flat" cmpd="sng" algn="ctr">
-                      <a:solidFill>
-                        <a:srgbClr val="1E3A6B"/>
-                      </a:solidFill>
-                      <a:prstDash val="solid"/>
-                      <a:round/>
-                      <a:headEnd type="none" w="med" len="med"/>
-                      <a:tailEnd type="none" w="med" len="med"/>
-                    </a:lnT>
-                    <a:lnB w="6350" cap="flat" cmpd="sng" algn="ctr">
-                      <a:solidFill>
-                        <a:srgbClr val="1E3A6B"/>
-                      </a:solidFill>
-                      <a:prstDash val="solid"/>
-                      <a:round/>
-                      <a:headEnd type="none" w="med" len="med"/>
-                      <a:tailEnd type="none" w="med" len="med"/>
-                    </a:lnB>
-                    <a:solidFill>
-                      <a:srgbClr val="12213F"/>
-                    </a:solidFill>
-                  </a:tcPr>
-                </a:tc>
-                <a:tc>
-                  <a:txBody>
-                    <a:bodyPr/>
-                    <a:lstStyle/>
-                    <a:p>
-                      <a:pPr marL="0" indent="0" algn="r">
-                        <a:buNone/>
-                      </a:pPr>
-                      <a:r>
-                        <a:rPr lang="en-US" sz="900" dirty="0">
-                          <a:solidFill>
-                            <a:srgbClr val="FFFFFF"/>
-                          </a:solidFill>
-                          <a:latin typeface="Calibri" pitchFamily="34" charset="0"/>
-                          <a:ea typeface="Calibri" pitchFamily="34" charset="-122"/>
-                          <a:cs typeface="Calibri" pitchFamily="34" charset="-120"/>
-                        </a:rPr>
-                        <a:t>142</a:t>
-                      </a:r>
-                      <a:endParaRPr lang="en-US" sz="900" dirty="0">
-                        <a:latin typeface="Calibri" charset="0"/>
-                        <a:ea typeface="Calibri" charset="0"/>
-                        <a:cs typeface="Calibri" charset="0"/>
-                      </a:endParaRPr>
-                    </a:p>
-                  </a:txBody>
-                  <a:tcPr marT="18288" marB="18288">
-                    <a:lnL w="6350" cap="flat" cmpd="sng" algn="ctr">
-                      <a:solidFill>
-                        <a:srgbClr val="1E3A6B"/>
-                      </a:solidFill>
-                      <a:prstDash val="solid"/>
-                      <a:round/>
-                      <a:headEnd type="none" w="med" len="med"/>
-                      <a:tailEnd type="none" w="med" len="med"/>
-                    </a:lnL>
-                    <a:lnR w="6350" cap="flat" cmpd="sng" algn="ctr">
-                      <a:solidFill>
-                        <a:srgbClr val="1E3A6B"/>
-                      </a:solidFill>
-                      <a:prstDash val="solid"/>
-                      <a:round/>
-                      <a:headEnd type="none" w="med" len="med"/>
-                      <a:tailEnd type="none" w="med" len="med"/>
-                    </a:lnR>
-                    <a:lnT w="6350" cap="flat" cmpd="sng" algn="ctr">
-                      <a:solidFill>
-                        <a:srgbClr val="1E3A6B"/>
-                      </a:solidFill>
-                      <a:prstDash val="solid"/>
-                      <a:round/>
-                      <a:headEnd type="none" w="med" len="med"/>
-                      <a:tailEnd type="none" w="med" len="med"/>
-                    </a:lnT>
-                    <a:lnB w="6350" cap="flat" cmpd="sng" algn="ctr">
-                      <a:solidFill>
-                        <a:srgbClr val="1E3A6B"/>
-                      </a:solidFill>
-                      <a:prstDash val="solid"/>
-                      <a:round/>
-                      <a:headEnd type="none" w="med" len="med"/>
-                      <a:tailEnd type="none" w="med" len="med"/>
-                    </a:lnB>
-                    <a:solidFill>
-                      <a:srgbClr val="12213F"/>
-                    </a:solidFill>
-                  </a:tcPr>
-                </a:tc>
-                <a:extLst>
-                  <a:ext uri="{0D108BD9-81ED-4DB2-BD59-A6C34878D82A}">
-                    <a16:rowId xmlns:a16="http://schemas.microsoft.com/office/drawing/2014/main" val="10003"/>
-                  </a:ext>
-                </a:extLst>
-              </a:tr>
-              <a:tr h="237744">
-                <a:tc>
-                  <a:txBody>
-                    <a:bodyPr/>
-                    <a:lstStyle/>
-                    <a:p>
-                      <a:pPr marL="0" indent="0">
-                        <a:buNone/>
-                      </a:pPr>
-                      <a:r>
-                        <a:rPr lang="en-US" sz="900" dirty="0">
-                          <a:solidFill>
-                            <a:srgbClr val="FFFFFF"/>
-                          </a:solidFill>
-                          <a:latin typeface="Calibri" pitchFamily="34" charset="0"/>
-                          <a:ea typeface="Calibri" pitchFamily="34" charset="-122"/>
-                          <a:cs typeface="Calibri" pitchFamily="34" charset="-120"/>
-                        </a:rPr>
-                        <a:t>CourtCase</a:t>
-                      </a:r>
-                      <a:endParaRPr lang="en-US" sz="900" dirty="0">
-                        <a:latin typeface="Calibri" charset="0"/>
-                        <a:ea typeface="Calibri" charset="0"/>
-                        <a:cs typeface="Calibri" charset="0"/>
-                      </a:endParaRPr>
-                    </a:p>
-                  </a:txBody>
-                  <a:tcPr marT="18288" marB="18288">
-                    <a:lnL w="6350" cap="flat" cmpd="sng" algn="ctr">
-                      <a:solidFill>
-                        <a:srgbClr val="1E3A6B"/>
-                      </a:solidFill>
-                      <a:prstDash val="solid"/>
-                      <a:round/>
-                      <a:headEnd type="none" w="med" len="med"/>
-                      <a:tailEnd type="none" w="med" len="med"/>
-                    </a:lnL>
-                    <a:lnR w="6350" cap="flat" cmpd="sng" algn="ctr">
-                      <a:solidFill>
-                        <a:srgbClr val="1E3A6B"/>
-                      </a:solidFill>
-                      <a:prstDash val="solid"/>
-                      <a:round/>
-                      <a:headEnd type="none" w="med" len="med"/>
-                      <a:tailEnd type="none" w="med" len="med"/>
-                    </a:lnR>
-                    <a:lnT w="6350" cap="flat" cmpd="sng" algn="ctr">
-                      <a:solidFill>
-                        <a:srgbClr val="1E3A6B"/>
-                      </a:solidFill>
-                      <a:prstDash val="solid"/>
-                      <a:round/>
-                      <a:headEnd type="none" w="med" len="med"/>
-                      <a:tailEnd type="none" w="med" len="med"/>
-                    </a:lnT>
-                    <a:lnB w="6350" cap="flat" cmpd="sng" algn="ctr">
-                      <a:solidFill>
-                        <a:srgbClr val="1E3A6B"/>
-                      </a:solidFill>
-                      <a:prstDash val="solid"/>
-                      <a:round/>
-                      <a:headEnd type="none" w="med" len="med"/>
-                      <a:tailEnd type="none" w="med" len="med"/>
-                    </a:lnB>
-                    <a:solidFill>
-                      <a:srgbClr val="0F1B36"/>
-                    </a:solidFill>
-                  </a:tcPr>
-                </a:tc>
-                <a:tc>
-                  <a:txBody>
-                    <a:bodyPr/>
-                    <a:lstStyle/>
-                    <a:p>
-                      <a:pPr marL="0" indent="0" algn="r">
-                        <a:buNone/>
-                      </a:pPr>
-                      <a:r>
-                        <a:rPr lang="en-US" sz="900" dirty="0">
-                          <a:solidFill>
-                            <a:srgbClr val="FFFFFF"/>
-                          </a:solidFill>
-                          <a:latin typeface="Calibri" pitchFamily="34" charset="0"/>
-                          <a:ea typeface="Calibri" pitchFamily="34" charset="-122"/>
-                          <a:cs typeface="Calibri" pitchFamily="34" charset="-120"/>
-                        </a:rPr>
-                        <a:t>115</a:t>
-                      </a:r>
-                      <a:endParaRPr lang="en-US" sz="900" dirty="0">
-                        <a:latin typeface="Calibri" charset="0"/>
-                        <a:ea typeface="Calibri" charset="0"/>
-                        <a:cs typeface="Calibri" charset="0"/>
-                      </a:endParaRPr>
-                    </a:p>
-                  </a:txBody>
-                  <a:tcPr marT="18288" marB="18288">
-                    <a:lnL w="6350" cap="flat" cmpd="sng" algn="ctr">
-                      <a:solidFill>
-                        <a:srgbClr val="1E3A6B"/>
-                      </a:solidFill>
-                      <a:prstDash val="solid"/>
-                      <a:round/>
-                      <a:headEnd type="none" w="med" len="med"/>
-                      <a:tailEnd type="none" w="med" len="med"/>
-                    </a:lnL>
-                    <a:lnR w="6350" cap="flat" cmpd="sng" algn="ctr">
-                      <a:solidFill>
-                        <a:srgbClr val="1E3A6B"/>
-                      </a:solidFill>
-                      <a:prstDash val="solid"/>
-                      <a:round/>
-                      <a:headEnd type="none" w="med" len="med"/>
-                      <a:tailEnd type="none" w="med" len="med"/>
-                    </a:lnR>
-                    <a:lnT w="6350" cap="flat" cmpd="sng" algn="ctr">
-                      <a:solidFill>
-                        <a:srgbClr val="1E3A6B"/>
-                      </a:solidFill>
-                      <a:prstDash val="solid"/>
-                      <a:round/>
-                      <a:headEnd type="none" w="med" len="med"/>
-                      <a:tailEnd type="none" w="med" len="med"/>
-                    </a:lnT>
-                    <a:lnB w="6350" cap="flat" cmpd="sng" algn="ctr">
-                      <a:solidFill>
-                        <a:srgbClr val="1E3A6B"/>
-                      </a:solidFill>
-                      <a:prstDash val="solid"/>
-                      <a:round/>
-                      <a:headEnd type="none" w="med" len="med"/>
-                      <a:tailEnd type="none" w="med" len="med"/>
-                    </a:lnB>
-                    <a:solidFill>
-                      <a:srgbClr val="0F1B36"/>
-                    </a:solidFill>
-                  </a:tcPr>
-                </a:tc>
-                <a:extLst>
-                  <a:ext uri="{0D108BD9-81ED-4DB2-BD59-A6C34878D82A}">
-                    <a16:rowId xmlns:a16="http://schemas.microsoft.com/office/drawing/2014/main" val="10004"/>
-                  </a:ext>
-                </a:extLst>
-              </a:tr>
-              <a:tr h="237744">
-                <a:tc>
-                  <a:txBody>
-                    <a:bodyPr/>
-                    <a:lstStyle/>
-                    <a:p>
-                      <a:pPr marL="0" indent="0">
-                        <a:buNone/>
-                      </a:pPr>
-                      <a:r>
-                        <a:rPr lang="en-US" sz="900" dirty="0">
-                          <a:solidFill>
-                            <a:srgbClr val="FFFFFF"/>
-                          </a:solidFill>
-                          <a:latin typeface="Calibri" pitchFamily="34" charset="0"/>
-                          <a:ea typeface="Calibri" pitchFamily="34" charset="-122"/>
-                          <a:cs typeface="Calibri" pitchFamily="34" charset="-120"/>
-                        </a:rPr>
-                        <a:t>FIR_CrimeType</a:t>
-                      </a:r>
-                      <a:endParaRPr lang="en-US" sz="900" dirty="0">
-                        <a:latin typeface="Calibri" charset="0"/>
-                        <a:ea typeface="Calibri" charset="0"/>
-                        <a:cs typeface="Calibri" charset="0"/>
-                      </a:endParaRPr>
-                    </a:p>
-                  </a:txBody>
-                  <a:tcPr marT="18288" marB="18288">
-                    <a:lnL w="6350" cap="flat" cmpd="sng" algn="ctr">
-                      <a:solidFill>
-                        <a:srgbClr val="1E3A6B"/>
-                      </a:solidFill>
-                      <a:prstDash val="solid"/>
-                      <a:round/>
-                      <a:headEnd type="none" w="med" len="med"/>
-                      <a:tailEnd type="none" w="med" len="med"/>
-                    </a:lnL>
-                    <a:lnR w="6350" cap="flat" cmpd="sng" algn="ctr">
-                      <a:solidFill>
-                        <a:srgbClr val="1E3A6B"/>
-                      </a:solidFill>
-                      <a:prstDash val="solid"/>
-                      <a:round/>
-                      <a:headEnd type="none" w="med" len="med"/>
-                      <a:tailEnd type="none" w="med" len="med"/>
-                    </a:lnR>
-                    <a:lnT w="6350" cap="flat" cmpd="sng" algn="ctr">
-                      <a:solidFill>
-                        <a:srgbClr val="1E3A6B"/>
-                      </a:solidFill>
-                      <a:prstDash val="solid"/>
-                      <a:round/>
-                      <a:headEnd type="none" w="med" len="med"/>
-                      <a:tailEnd type="none" w="med" len="med"/>
-                    </a:lnT>
-                    <a:lnB w="6350" cap="flat" cmpd="sng" algn="ctr">
-                      <a:solidFill>
-                        <a:srgbClr val="1E3A6B"/>
-                      </a:solidFill>
-                      <a:prstDash val="solid"/>
-                      <a:round/>
-                      <a:headEnd type="none" w="med" len="med"/>
-                      <a:tailEnd type="none" w="med" len="med"/>
-                    </a:lnB>
-                    <a:solidFill>
-                      <a:srgbClr val="12213F"/>
-                    </a:solidFill>
-                  </a:tcPr>
-                </a:tc>
-                <a:tc>
-                  <a:txBody>
-                    <a:bodyPr/>
-                    <a:lstStyle/>
-                    <a:p>
-                      <a:pPr marL="0" indent="0" algn="r">
-                        <a:buNone/>
-                      </a:pPr>
-                      <a:r>
-                        <a:rPr lang="en-US" sz="900" dirty="0">
-                          <a:solidFill>
-                            <a:srgbClr val="FFFFFF"/>
-                          </a:solidFill>
-                          <a:latin typeface="Calibri" pitchFamily="34" charset="0"/>
-                          <a:ea typeface="Calibri" pitchFamily="34" charset="-122"/>
-                          <a:cs typeface="Calibri" pitchFamily="34" charset="-120"/>
-                        </a:rPr>
-                        <a:t>1,166</a:t>
-                      </a:r>
-                      <a:endParaRPr lang="en-US" sz="900" dirty="0">
-                        <a:latin typeface="Calibri" charset="0"/>
-                        <a:ea typeface="Calibri" charset="0"/>
-                        <a:cs typeface="Calibri" charset="0"/>
-                      </a:endParaRPr>
-                    </a:p>
-                  </a:txBody>
-                  <a:tcPr marT="18288" marB="18288">
-                    <a:lnL w="6350" cap="flat" cmpd="sng" algn="ctr">
-                      <a:solidFill>
-                        <a:srgbClr val="1E3A6B"/>
-                      </a:solidFill>
-                      <a:prstDash val="solid"/>
-                      <a:round/>
-                      <a:headEnd type="none" w="med" len="med"/>
-                      <a:tailEnd type="none" w="med" len="med"/>
-                    </a:lnL>
-                    <a:lnR w="6350" cap="flat" cmpd="sng" algn="ctr">
-                      <a:solidFill>
-                        <a:srgbClr val="1E3A6B"/>
-                      </a:solidFill>
-                      <a:prstDash val="solid"/>
-                      <a:round/>
-                      <a:headEnd type="none" w="med" len="med"/>
-                      <a:tailEnd type="none" w="med" len="med"/>
-                    </a:lnR>
-                    <a:lnT w="6350" cap="flat" cmpd="sng" algn="ctr">
-                      <a:solidFill>
-                        <a:srgbClr val="1E3A6B"/>
-                      </a:solidFill>
-                      <a:prstDash val="solid"/>
-                      <a:round/>
-                      <a:headEnd type="none" w="med" len="med"/>
-                      <a:tailEnd type="none" w="med" len="med"/>
-                    </a:lnT>
-                    <a:lnB w="6350" cap="flat" cmpd="sng" algn="ctr">
-                      <a:solidFill>
-                        <a:srgbClr val="1E3A6B"/>
-                      </a:solidFill>
-                      <a:prstDash val="solid"/>
-                      <a:round/>
-                      <a:headEnd type="none" w="med" len="med"/>
-                      <a:tailEnd type="none" w="med" len="med"/>
-                    </a:lnB>
-                    <a:solidFill>
-                      <a:srgbClr val="12213F"/>
-                    </a:solidFill>
-                  </a:tcPr>
-                </a:tc>
-                <a:extLst>
-                  <a:ext uri="{0D108BD9-81ED-4DB2-BD59-A6C34878D82A}">
-                    <a16:rowId xmlns:a16="http://schemas.microsoft.com/office/drawing/2014/main" val="10005"/>
-                  </a:ext>
-                </a:extLst>
-              </a:tr>
-              <a:tr h="237744">
-                <a:tc>
-                  <a:txBody>
-                    <a:bodyPr/>
-                    <a:lstStyle/>
-                    <a:p>
-                      <a:pPr marL="0" indent="0">
-                        <a:buNone/>
-                      </a:pPr>
-                      <a:r>
-                        <a:rPr lang="en-US" sz="900" dirty="0">
-                          <a:solidFill>
-                            <a:srgbClr val="FFFFFF"/>
-                          </a:solidFill>
-                          <a:latin typeface="Calibri" pitchFamily="34" charset="0"/>
-                          <a:ea typeface="Calibri" pitchFamily="34" charset="-122"/>
-                          <a:cs typeface="Calibri" pitchFamily="34" charset="-120"/>
-                        </a:rPr>
-                        <a:t>Officer</a:t>
-                      </a:r>
-                      <a:endParaRPr lang="en-US" sz="900" dirty="0">
-                        <a:latin typeface="Calibri" charset="0"/>
-                        <a:ea typeface="Calibri" charset="0"/>
-                        <a:cs typeface="Calibri" charset="0"/>
-                      </a:endParaRPr>
-                    </a:p>
-                  </a:txBody>
-                  <a:tcPr marT="18288" marB="18288">
-                    <a:lnL w="6350" cap="flat" cmpd="sng" algn="ctr">
-                      <a:solidFill>
-                        <a:srgbClr val="1E3A6B"/>
-                      </a:solidFill>
-                      <a:prstDash val="solid"/>
-                      <a:round/>
-                      <a:headEnd type="none" w="med" len="med"/>
-                      <a:tailEnd type="none" w="med" len="med"/>
-                    </a:lnL>
-                    <a:lnR w="6350" cap="flat" cmpd="sng" algn="ctr">
-                      <a:solidFill>
-                        <a:srgbClr val="1E3A6B"/>
-                      </a:solidFill>
-                      <a:prstDash val="solid"/>
-                      <a:round/>
-                      <a:headEnd type="none" w="med" len="med"/>
-                      <a:tailEnd type="none" w="med" len="med"/>
-                    </a:lnR>
-                    <a:lnT w="6350" cap="flat" cmpd="sng" algn="ctr">
-                      <a:solidFill>
-                        <a:srgbClr val="1E3A6B"/>
-                      </a:solidFill>
-                      <a:prstDash val="solid"/>
-                      <a:round/>
-                      <a:headEnd type="none" w="med" len="med"/>
-                      <a:tailEnd type="none" w="med" len="med"/>
-                    </a:lnT>
-                    <a:lnB w="6350" cap="flat" cmpd="sng" algn="ctr">
-                      <a:solidFill>
-                        <a:srgbClr val="1E3A6B"/>
-                      </a:solidFill>
-                      <a:prstDash val="solid"/>
-                      <a:round/>
-                      <a:headEnd type="none" w="med" len="med"/>
-                      <a:tailEnd type="none" w="med" len="med"/>
-                    </a:lnB>
-                    <a:solidFill>
-                      <a:srgbClr val="0F1B36"/>
-                    </a:solidFill>
-                  </a:tcPr>
-                </a:tc>
-                <a:tc>
-                  <a:txBody>
-                    <a:bodyPr/>
-                    <a:lstStyle/>
-                    <a:p>
-                      <a:pPr marL="0" indent="0" algn="r">
-                        <a:buNone/>
-                      </a:pPr>
-                      <a:r>
-                        <a:rPr lang="en-US" sz="900" dirty="0">
-                          <a:solidFill>
-                            <a:srgbClr val="FFFFFF"/>
-                          </a:solidFill>
-                          <a:latin typeface="Calibri" pitchFamily="34" charset="0"/>
-                          <a:ea typeface="Calibri" pitchFamily="34" charset="-122"/>
-                          <a:cs typeface="Calibri" pitchFamily="34" charset="-120"/>
-                        </a:rPr>
-                        <a:t>50</a:t>
-                      </a:r>
-                      <a:endParaRPr lang="en-US" sz="900" dirty="0">
-                        <a:latin typeface="Calibri" charset="0"/>
-                        <a:ea typeface="Calibri" charset="0"/>
-                        <a:cs typeface="Calibri" charset="0"/>
-                      </a:endParaRPr>
-                    </a:p>
-                  </a:txBody>
-                  <a:tcPr marT="18288" marB="18288">
-                    <a:lnL w="6350" cap="flat" cmpd="sng" algn="ctr">
-                      <a:solidFill>
-                        <a:srgbClr val="1E3A6B"/>
-                      </a:solidFill>
-                      <a:prstDash val="solid"/>
-                      <a:round/>
-                      <a:headEnd type="none" w="med" len="med"/>
-                      <a:tailEnd type="none" w="med" len="med"/>
-                    </a:lnL>
-                    <a:lnR w="6350" cap="flat" cmpd="sng" algn="ctr">
-                      <a:solidFill>
-                        <a:srgbClr val="1E3A6B"/>
-                      </a:solidFill>
-                      <a:prstDash val="solid"/>
-                      <a:round/>
-                      <a:headEnd type="none" w="med" len="med"/>
-                      <a:tailEnd type="none" w="med" len="med"/>
-                    </a:lnR>
-                    <a:lnT w="6350" cap="flat" cmpd="sng" algn="ctr">
-                      <a:solidFill>
-                        <a:srgbClr val="1E3A6B"/>
-                      </a:solidFill>
-                      <a:prstDash val="solid"/>
-                      <a:round/>
-                      <a:headEnd type="none" w="med" len="med"/>
-                      <a:tailEnd type="none" w="med" len="med"/>
-                    </a:lnT>
-                    <a:lnB w="6350" cap="flat" cmpd="sng" algn="ctr">
-                      <a:solidFill>
-                        <a:srgbClr val="1E3A6B"/>
-                      </a:solidFill>
-                      <a:prstDash val="solid"/>
-                      <a:round/>
-                      <a:headEnd type="none" w="med" len="med"/>
-                      <a:tailEnd type="none" w="med" len="med"/>
-                    </a:lnB>
-                    <a:solidFill>
-                      <a:srgbClr val="0F1B36"/>
-                    </a:solidFill>
-                  </a:tcPr>
-                </a:tc>
-                <a:extLst>
-                  <a:ext uri="{0D108BD9-81ED-4DB2-BD59-A6C34878D82A}">
-                    <a16:rowId xmlns:a16="http://schemas.microsoft.com/office/drawing/2014/main" val="10006"/>
-                  </a:ext>
-                </a:extLst>
-              </a:tr>
-              <a:tr h="237744">
-                <a:tc>
-                  <a:txBody>
-                    <a:bodyPr/>
-                    <a:lstStyle/>
-                    <a:p>
-                      <a:pPr marL="0" indent="0">
-                        <a:buNone/>
-                      </a:pPr>
-                      <a:r>
-                        <a:rPr lang="en-US" sz="900" dirty="0">
-                          <a:solidFill>
-                            <a:srgbClr val="FFFFFF"/>
-                          </a:solidFill>
-                          <a:latin typeface="Calibri" pitchFamily="34" charset="0"/>
-                          <a:ea typeface="Calibri" pitchFamily="34" charset="-122"/>
-                          <a:cs typeface="Calibri" pitchFamily="34" charset="-120"/>
-                        </a:rPr>
-                        <a:t>PoliceStation</a:t>
-                      </a:r>
-                      <a:endParaRPr lang="en-US" sz="900" dirty="0">
-                        <a:latin typeface="Calibri" charset="0"/>
-                        <a:ea typeface="Calibri" charset="0"/>
-                        <a:cs typeface="Calibri" charset="0"/>
-                      </a:endParaRPr>
-                    </a:p>
-                  </a:txBody>
-                  <a:tcPr marT="18288" marB="18288">
-                    <a:lnL w="6350" cap="flat" cmpd="sng" algn="ctr">
-                      <a:solidFill>
-                        <a:srgbClr val="1E3A6B"/>
-                      </a:solidFill>
-                      <a:prstDash val="solid"/>
-                      <a:round/>
-                      <a:headEnd type="none" w="med" len="med"/>
-                      <a:tailEnd type="none" w="med" len="med"/>
-                    </a:lnL>
-                    <a:lnR w="6350" cap="flat" cmpd="sng" algn="ctr">
-                      <a:solidFill>
-                        <a:srgbClr val="1E3A6B"/>
-                      </a:solidFill>
-                      <a:prstDash val="solid"/>
-                      <a:round/>
-                      <a:headEnd type="none" w="med" len="med"/>
-                      <a:tailEnd type="none" w="med" len="med"/>
-                    </a:lnR>
-                    <a:lnT w="6350" cap="flat" cmpd="sng" algn="ctr">
-                      <a:solidFill>
-                        <a:srgbClr val="1E3A6B"/>
-                      </a:solidFill>
-                      <a:prstDash val="solid"/>
-                      <a:round/>
-                      <a:headEnd type="none" w="med" len="med"/>
-                      <a:tailEnd type="none" w="med" len="med"/>
-                    </a:lnT>
-                    <a:lnB w="6350" cap="flat" cmpd="sng" algn="ctr">
-                      <a:solidFill>
-                        <a:srgbClr val="1E3A6B"/>
-                      </a:solidFill>
-                      <a:prstDash val="solid"/>
-                      <a:round/>
-                      <a:headEnd type="none" w="med" len="med"/>
-                      <a:tailEnd type="none" w="med" len="med"/>
-                    </a:lnB>
-                    <a:solidFill>
-                      <a:srgbClr val="12213F"/>
-                    </a:solidFill>
-                  </a:tcPr>
-                </a:tc>
-                <a:tc>
-                  <a:txBody>
-                    <a:bodyPr/>
-                    <a:lstStyle/>
-                    <a:p>
-                      <a:pPr marL="0" indent="0" algn="r">
-                        <a:buNone/>
-                      </a:pPr>
-                      <a:r>
-                        <a:rPr lang="en-US" sz="900" dirty="0">
-                          <a:solidFill>
-                            <a:srgbClr val="FFFFFF"/>
-                          </a:solidFill>
-                          <a:latin typeface="Calibri" pitchFamily="34" charset="0"/>
-                          <a:ea typeface="Calibri" pitchFamily="34" charset="-122"/>
-                          <a:cs typeface="Calibri" pitchFamily="34" charset="-120"/>
-                        </a:rPr>
-                        <a:t>21</a:t>
-                      </a:r>
-                      <a:endParaRPr lang="en-US" sz="900" dirty="0">
-                        <a:latin typeface="Calibri" charset="0"/>
-                        <a:ea typeface="Calibri" charset="0"/>
-                        <a:cs typeface="Calibri" charset="0"/>
-                      </a:endParaRPr>
-                    </a:p>
-                  </a:txBody>
-                  <a:tcPr marT="18288" marB="18288">
-                    <a:lnL w="6350" cap="flat" cmpd="sng" algn="ctr">
-                      <a:solidFill>
-                        <a:srgbClr val="1E3A6B"/>
-                      </a:solidFill>
-                      <a:prstDash val="solid"/>
-                      <a:round/>
-                      <a:headEnd type="none" w="med" len="med"/>
-                      <a:tailEnd type="none" w="med" len="med"/>
-                    </a:lnL>
-                    <a:lnR w="6350" cap="flat" cmpd="sng" algn="ctr">
-                      <a:solidFill>
-                        <a:srgbClr val="1E3A6B"/>
-                      </a:solidFill>
-                      <a:prstDash val="solid"/>
-                      <a:round/>
-                      <a:headEnd type="none" w="med" len="med"/>
-                      <a:tailEnd type="none" w="med" len="med"/>
-                    </a:lnR>
-                    <a:lnT w="6350" cap="flat" cmpd="sng" algn="ctr">
-                      <a:solidFill>
-                        <a:srgbClr val="1E3A6B"/>
-                      </a:solidFill>
-                      <a:prstDash val="solid"/>
-                      <a:round/>
-                      <a:headEnd type="none" w="med" len="med"/>
-                      <a:tailEnd type="none" w="med" len="med"/>
-                    </a:lnT>
-                    <a:lnB w="6350" cap="flat" cmpd="sng" algn="ctr">
-                      <a:solidFill>
-                        <a:srgbClr val="1E3A6B"/>
-                      </a:solidFill>
-                      <a:prstDash val="solid"/>
-                      <a:round/>
-                      <a:headEnd type="none" w="med" len="med"/>
-                      <a:tailEnd type="none" w="med" len="med"/>
-                    </a:lnB>
-                    <a:solidFill>
-                      <a:srgbClr val="12213F"/>
-                    </a:solidFill>
-                  </a:tcPr>
-                </a:tc>
-                <a:extLst>
-                  <a:ext uri="{0D108BD9-81ED-4DB2-BD59-A6C34878D82A}">
-                    <a16:rowId xmlns:a16="http://schemas.microsoft.com/office/drawing/2014/main" val="10007"/>
-                  </a:ext>
-                </a:extLst>
-              </a:tr>
-              <a:tr h="237744">
-                <a:tc>
-                  <a:txBody>
-                    <a:bodyPr/>
-                    <a:lstStyle/>
-                    <a:p>
-                      <a:pPr marL="0" indent="0">
-                        <a:buNone/>
-                      </a:pPr>
-                      <a:r>
-                        <a:rPr lang="en-US" sz="900" dirty="0">
-                          <a:solidFill>
-                            <a:srgbClr val="FFFFFF"/>
-                          </a:solidFill>
-                          <a:latin typeface="Calibri" pitchFamily="34" charset="0"/>
-                          <a:ea typeface="Calibri" pitchFamily="34" charset="-122"/>
-                          <a:cs typeface="Calibri" pitchFamily="34" charset="-120"/>
-                        </a:rPr>
-                        <a:t>CrimeType</a:t>
-                      </a:r>
-                      <a:endParaRPr lang="en-US" sz="900" dirty="0">
-                        <a:latin typeface="Calibri" charset="0"/>
-                        <a:ea typeface="Calibri" charset="0"/>
-                        <a:cs typeface="Calibri" charset="0"/>
-                      </a:endParaRPr>
-                    </a:p>
-                  </a:txBody>
-                  <a:tcPr marT="18288" marB="18288">
-                    <a:lnL w="6350" cap="flat" cmpd="sng" algn="ctr">
-                      <a:solidFill>
-                        <a:srgbClr val="1E3A6B"/>
-                      </a:solidFill>
-                      <a:prstDash val="solid"/>
-                      <a:round/>
-                      <a:headEnd type="none" w="med" len="med"/>
-                      <a:tailEnd type="none" w="med" len="med"/>
-                    </a:lnL>
-                    <a:lnR w="6350" cap="flat" cmpd="sng" algn="ctr">
-                      <a:solidFill>
-                        <a:srgbClr val="1E3A6B"/>
-                      </a:solidFill>
-                      <a:prstDash val="solid"/>
-                      <a:round/>
-                      <a:headEnd type="none" w="med" len="med"/>
-                      <a:tailEnd type="none" w="med" len="med"/>
-                    </a:lnR>
-                    <a:lnT w="6350" cap="flat" cmpd="sng" algn="ctr">
-                      <a:solidFill>
-                        <a:srgbClr val="1E3A6B"/>
-                      </a:solidFill>
-                      <a:prstDash val="solid"/>
-                      <a:round/>
-                      <a:headEnd type="none" w="med" len="med"/>
-                      <a:tailEnd type="none" w="med" len="med"/>
-                    </a:lnT>
-                    <a:lnB w="6350" cap="flat" cmpd="sng" algn="ctr">
-                      <a:solidFill>
-                        <a:srgbClr val="1E3A6B"/>
-                      </a:solidFill>
-                      <a:prstDash val="solid"/>
-                      <a:round/>
-                      <a:headEnd type="none" w="med" len="med"/>
-                      <a:tailEnd type="none" w="med" len="med"/>
-                    </a:lnB>
-                    <a:solidFill>
-                      <a:srgbClr val="0F1B36"/>
-                    </a:solidFill>
-                  </a:tcPr>
-                </a:tc>
-                <a:tc>
-                  <a:txBody>
-                    <a:bodyPr/>
-                    <a:lstStyle/>
-                    <a:p>
-                      <a:pPr marL="0" indent="0" algn="r">
-                        <a:buNone/>
-                      </a:pPr>
-                      <a:r>
-                        <a:rPr lang="en-US" sz="900" dirty="0">
-                          <a:solidFill>
-                            <a:srgbClr val="FFFFFF"/>
-                          </a:solidFill>
-                          <a:latin typeface="Calibri" pitchFamily="34" charset="0"/>
-                          <a:ea typeface="Calibri" pitchFamily="34" charset="-122"/>
-                          <a:cs typeface="Calibri" pitchFamily="34" charset="-120"/>
-                        </a:rPr>
-                        <a:t>134</a:t>
-                      </a:r>
-                      <a:endParaRPr lang="en-US" sz="900" dirty="0">
-                        <a:latin typeface="Calibri" charset="0"/>
-                        <a:ea typeface="Calibri" charset="0"/>
-                        <a:cs typeface="Calibri" charset="0"/>
-                      </a:endParaRPr>
-                    </a:p>
-                  </a:txBody>
-                  <a:tcPr marT="18288" marB="18288">
-                    <a:lnL w="6350" cap="flat" cmpd="sng" algn="ctr">
-                      <a:solidFill>
-                        <a:srgbClr val="1E3A6B"/>
-                      </a:solidFill>
-                      <a:prstDash val="solid"/>
-                      <a:round/>
-                      <a:headEnd type="none" w="med" len="med"/>
-                      <a:tailEnd type="none" w="med" len="med"/>
-                    </a:lnL>
-                    <a:lnR w="6350" cap="flat" cmpd="sng" algn="ctr">
-                      <a:solidFill>
-                        <a:srgbClr val="1E3A6B"/>
-                      </a:solidFill>
-                      <a:prstDash val="solid"/>
-                      <a:round/>
-                      <a:headEnd type="none" w="med" len="med"/>
-                      <a:tailEnd type="none" w="med" len="med"/>
-                    </a:lnR>
-                    <a:lnT w="6350" cap="flat" cmpd="sng" algn="ctr">
-                      <a:solidFill>
-                        <a:srgbClr val="1E3A6B"/>
-                      </a:solidFill>
-                      <a:prstDash val="solid"/>
-                      <a:round/>
-                      <a:headEnd type="none" w="med" len="med"/>
-                      <a:tailEnd type="none" w="med" len="med"/>
-                    </a:lnT>
-                    <a:lnB w="6350" cap="flat" cmpd="sng" algn="ctr">
-                      <a:solidFill>
-                        <a:srgbClr val="1E3A6B"/>
-                      </a:solidFill>
-                      <a:prstDash val="solid"/>
-                      <a:round/>
-                      <a:headEnd type="none" w="med" len="med"/>
-                      <a:tailEnd type="none" w="med" len="med"/>
-                    </a:lnB>
-                    <a:solidFill>
-                      <a:srgbClr val="0F1B36"/>
-                    </a:solidFill>
-                  </a:tcPr>
-                </a:tc>
-                <a:extLst>
-                  <a:ext uri="{0D108BD9-81ED-4DB2-BD59-A6C34878D82A}">
-                    <a16:rowId xmlns:a16="http://schemas.microsoft.com/office/drawing/2014/main" val="10008"/>
-                  </a:ext>
-                </a:extLst>
-              </a:tr>
-              <a:tr h="237744">
-                <a:tc>
-                  <a:txBody>
-                    <a:bodyPr/>
-                    <a:lstStyle/>
-                    <a:p>
-                      <a:pPr marL="0" indent="0">
-                        <a:buNone/>
-                      </a:pPr>
-                      <a:r>
-                        <a:rPr lang="en-US" sz="900" dirty="0">
-                          <a:solidFill>
-                            <a:srgbClr val="FFFFFF"/>
-                          </a:solidFill>
-                          <a:latin typeface="Calibri" pitchFamily="34" charset="0"/>
-                          <a:ea typeface="Calibri" pitchFamily="34" charset="-122"/>
-                          <a:cs typeface="Calibri" pitchFamily="34" charset="-120"/>
-                        </a:rPr>
-                        <a:t>Premises</a:t>
-                      </a:r>
-                      <a:endParaRPr lang="en-US" sz="900" dirty="0">
-                        <a:latin typeface="Calibri" charset="0"/>
-                        <a:ea typeface="Calibri" charset="0"/>
-                        <a:cs typeface="Calibri" charset="0"/>
-                      </a:endParaRPr>
-                    </a:p>
-                  </a:txBody>
-                  <a:tcPr marT="18288" marB="18288">
-                    <a:lnL w="6350" cap="flat" cmpd="sng" algn="ctr">
-                      <a:solidFill>
-                        <a:srgbClr val="1E3A6B"/>
-                      </a:solidFill>
-                      <a:prstDash val="solid"/>
-                      <a:round/>
-                      <a:headEnd type="none" w="med" len="med"/>
-                      <a:tailEnd type="none" w="med" len="med"/>
-                    </a:lnL>
-                    <a:lnR w="6350" cap="flat" cmpd="sng" algn="ctr">
-                      <a:solidFill>
-                        <a:srgbClr val="1E3A6B"/>
-                      </a:solidFill>
-                      <a:prstDash val="solid"/>
-                      <a:round/>
-                      <a:headEnd type="none" w="med" len="med"/>
-                      <a:tailEnd type="none" w="med" len="med"/>
-                    </a:lnR>
-                    <a:lnT w="6350" cap="flat" cmpd="sng" algn="ctr">
-                      <a:solidFill>
-                        <a:srgbClr val="1E3A6B"/>
-                      </a:solidFill>
-                      <a:prstDash val="solid"/>
-                      <a:round/>
-                      <a:headEnd type="none" w="med" len="med"/>
-                      <a:tailEnd type="none" w="med" len="med"/>
-                    </a:lnT>
-                    <a:lnB w="6350" cap="flat" cmpd="sng" algn="ctr">
-                      <a:solidFill>
-                        <a:srgbClr val="1E3A6B"/>
-                      </a:solidFill>
-                      <a:prstDash val="solid"/>
-                      <a:round/>
-                      <a:headEnd type="none" w="med" len="med"/>
-                      <a:tailEnd type="none" w="med" len="med"/>
-                    </a:lnB>
-                    <a:solidFill>
-                      <a:srgbClr val="12213F"/>
-                    </a:solidFill>
-                  </a:tcPr>
-                </a:tc>
-                <a:tc>
-                  <a:txBody>
-                    <a:bodyPr/>
-                    <a:lstStyle/>
-                    <a:p>
-                      <a:pPr marL="0" indent="0" algn="r">
-                        <a:buNone/>
-                      </a:pPr>
-                      <a:r>
-                        <a:rPr lang="en-US" sz="900" dirty="0">
-                          <a:solidFill>
-                            <a:srgbClr val="FFFFFF"/>
-                          </a:solidFill>
-                          <a:latin typeface="Calibri" pitchFamily="34" charset="0"/>
-                          <a:ea typeface="Calibri" pitchFamily="34" charset="-122"/>
-                          <a:cs typeface="Calibri" pitchFamily="34" charset="-120"/>
-                        </a:rPr>
-                        <a:t>228</a:t>
-                      </a:r>
-                      <a:endParaRPr lang="en-US" sz="900" dirty="0">
-                        <a:latin typeface="Calibri" charset="0"/>
-                        <a:ea typeface="Calibri" charset="0"/>
-                        <a:cs typeface="Calibri" charset="0"/>
-                      </a:endParaRPr>
-                    </a:p>
-                  </a:txBody>
-                  <a:tcPr marT="18288" marB="18288">
-                    <a:lnL w="6350" cap="flat" cmpd="sng" algn="ctr">
-                      <a:solidFill>
-                        <a:srgbClr val="1E3A6B"/>
-                      </a:solidFill>
-                      <a:prstDash val="solid"/>
-                      <a:round/>
-                      <a:headEnd type="none" w="med" len="med"/>
-                      <a:tailEnd type="none" w="med" len="med"/>
-                    </a:lnL>
-                    <a:lnR w="6350" cap="flat" cmpd="sng" algn="ctr">
-                      <a:solidFill>
-                        <a:srgbClr val="1E3A6B"/>
-                      </a:solidFill>
-                      <a:prstDash val="solid"/>
-                      <a:round/>
-                      <a:headEnd type="none" w="med" len="med"/>
-                      <a:tailEnd type="none" w="med" len="med"/>
-                    </a:lnR>
-                    <a:lnT w="6350" cap="flat" cmpd="sng" algn="ctr">
-                      <a:solidFill>
-                        <a:srgbClr val="1E3A6B"/>
-                      </a:solidFill>
-                      <a:prstDash val="solid"/>
-                      <a:round/>
-                      <a:headEnd type="none" w="med" len="med"/>
-                      <a:tailEnd type="none" w="med" len="med"/>
-                    </a:lnT>
-                    <a:lnB w="6350" cap="flat" cmpd="sng" algn="ctr">
-                      <a:solidFill>
-                        <a:srgbClr val="1E3A6B"/>
-                      </a:solidFill>
-                      <a:prstDash val="solid"/>
-                      <a:round/>
-                      <a:headEnd type="none" w="med" len="med"/>
-                      <a:tailEnd type="none" w="med" len="med"/>
-                    </a:lnB>
-                    <a:solidFill>
-                      <a:srgbClr val="12213F"/>
-                    </a:solidFill>
-                  </a:tcPr>
-                </a:tc>
-                <a:extLst>
-                  <a:ext uri="{0D108BD9-81ED-4DB2-BD59-A6C34878D82A}">
-                    <a16:rowId xmlns:a16="http://schemas.microsoft.com/office/drawing/2014/main" val="10009"/>
-                  </a:ext>
-                </a:extLst>
-              </a:tr>
-              <a:tr h="237744">
-                <a:tc>
-                  <a:txBody>
-                    <a:bodyPr/>
-                    <a:lstStyle/>
-                    <a:p>
-                      <a:pPr marL="0" indent="0">
-                        <a:buNone/>
-                      </a:pPr>
-                      <a:r>
-                        <a:rPr lang="en-US" sz="900" dirty="0">
-                          <a:solidFill>
-                            <a:srgbClr val="FFFFFF"/>
-                          </a:solidFill>
-                          <a:latin typeface="Calibri" pitchFamily="34" charset="0"/>
-                          <a:ea typeface="Calibri" pitchFamily="34" charset="-122"/>
-                          <a:cs typeface="Calibri" pitchFamily="34" charset="-120"/>
-                        </a:rPr>
-                        <a:t>Weapon</a:t>
-                      </a:r>
-                      <a:endParaRPr lang="en-US" sz="900" dirty="0">
-                        <a:latin typeface="Calibri" charset="0"/>
-                        <a:ea typeface="Calibri" charset="0"/>
-                        <a:cs typeface="Calibri" charset="0"/>
-                      </a:endParaRPr>
-                    </a:p>
-                  </a:txBody>
-                  <a:tcPr marT="18288" marB="18288">
-                    <a:lnL w="6350" cap="flat" cmpd="sng" algn="ctr">
-                      <a:solidFill>
-                        <a:srgbClr val="1E3A6B"/>
-                      </a:solidFill>
-                      <a:prstDash val="solid"/>
-                      <a:round/>
-                      <a:headEnd type="none" w="med" len="med"/>
-                      <a:tailEnd type="none" w="med" len="med"/>
-                    </a:lnL>
-                    <a:lnR w="6350" cap="flat" cmpd="sng" algn="ctr">
-                      <a:solidFill>
-                        <a:srgbClr val="1E3A6B"/>
-                      </a:solidFill>
-                      <a:prstDash val="solid"/>
-                      <a:round/>
-                      <a:headEnd type="none" w="med" len="med"/>
-                      <a:tailEnd type="none" w="med" len="med"/>
-                    </a:lnR>
-                    <a:lnT w="6350" cap="flat" cmpd="sng" algn="ctr">
-                      <a:solidFill>
-                        <a:srgbClr val="1E3A6B"/>
-                      </a:solidFill>
-                      <a:prstDash val="solid"/>
-                      <a:round/>
-                      <a:headEnd type="none" w="med" len="med"/>
-                      <a:tailEnd type="none" w="med" len="med"/>
-                    </a:lnT>
-                    <a:lnB w="6350" cap="flat" cmpd="sng" algn="ctr">
-                      <a:solidFill>
-                        <a:srgbClr val="1E3A6B"/>
-                      </a:solidFill>
-                      <a:prstDash val="solid"/>
-                      <a:round/>
-                      <a:headEnd type="none" w="med" len="med"/>
-                      <a:tailEnd type="none" w="med" len="med"/>
-                    </a:lnB>
-                    <a:solidFill>
-                      <a:srgbClr val="0F1B36"/>
-                    </a:solidFill>
-                  </a:tcPr>
-                </a:tc>
-                <a:tc>
-                  <a:txBody>
-                    <a:bodyPr/>
-                    <a:lstStyle/>
-                    <a:p>
-                      <a:pPr marL="0" indent="0" algn="r">
-                        <a:buNone/>
-                      </a:pPr>
-                      <a:r>
-                        <a:rPr lang="en-US" sz="900" dirty="0">
-                          <a:solidFill>
-                            <a:srgbClr val="FFFFFF"/>
-                          </a:solidFill>
-                          <a:latin typeface="Calibri" pitchFamily="34" charset="0"/>
-                          <a:ea typeface="Calibri" pitchFamily="34" charset="-122"/>
-                          <a:cs typeface="Calibri" pitchFamily="34" charset="-120"/>
-                        </a:rPr>
-                        <a:t>72</a:t>
-                      </a:r>
-                      <a:endParaRPr lang="en-US" sz="900" dirty="0">
-                        <a:latin typeface="Calibri" charset="0"/>
-                        <a:ea typeface="Calibri" charset="0"/>
-                        <a:cs typeface="Calibri" charset="0"/>
-                      </a:endParaRPr>
-                    </a:p>
-                  </a:txBody>
-                  <a:tcPr marT="18288" marB="18288">
-                    <a:lnL w="6350" cap="flat" cmpd="sng" algn="ctr">
-                      <a:solidFill>
-                        <a:srgbClr val="1E3A6B"/>
-                      </a:solidFill>
-                      <a:prstDash val="solid"/>
-                      <a:round/>
-                      <a:headEnd type="none" w="med" len="med"/>
-                      <a:tailEnd type="none" w="med" len="med"/>
-                    </a:lnL>
-                    <a:lnR w="6350" cap="flat" cmpd="sng" algn="ctr">
-                      <a:solidFill>
-                        <a:srgbClr val="1E3A6B"/>
-                      </a:solidFill>
-                      <a:prstDash val="solid"/>
-                      <a:round/>
-                      <a:headEnd type="none" w="med" len="med"/>
-                      <a:tailEnd type="none" w="med" len="med"/>
-                    </a:lnR>
-                    <a:lnT w="6350" cap="flat" cmpd="sng" algn="ctr">
-                      <a:solidFill>
-                        <a:srgbClr val="1E3A6B"/>
-                      </a:solidFill>
-                      <a:prstDash val="solid"/>
-                      <a:round/>
-                      <a:headEnd type="none" w="med" len="med"/>
-                      <a:tailEnd type="none" w="med" len="med"/>
-                    </a:lnT>
-                    <a:lnB w="6350" cap="flat" cmpd="sng" algn="ctr">
-                      <a:solidFill>
-                        <a:srgbClr val="1E3A6B"/>
-                      </a:solidFill>
-                      <a:prstDash val="solid"/>
-                      <a:round/>
-                      <a:headEnd type="none" w="med" len="med"/>
-                      <a:tailEnd type="none" w="med" len="med"/>
-                    </a:lnB>
-                    <a:solidFill>
-                      <a:srgbClr val="0F1B36"/>
-                    </a:solidFill>
-                  </a:tcPr>
-                </a:tc>
-                <a:extLst>
-                  <a:ext uri="{0D108BD9-81ED-4DB2-BD59-A6C34878D82A}">
-                    <a16:rowId xmlns:a16="http://schemas.microsoft.com/office/drawing/2014/main" val="10010"/>
-                  </a:ext>
-                </a:extLst>
-              </a:tr>
-              <a:tr h="237744">
-                <a:tc>
-                  <a:txBody>
-                    <a:bodyPr/>
-                    <a:lstStyle/>
-                    <a:p>
-                      <a:pPr marL="0" indent="0">
-                        <a:buNone/>
-                      </a:pPr>
-                      <a:r>
-                        <a:rPr lang="en-US" sz="900" dirty="0">
-                          <a:solidFill>
-                            <a:srgbClr val="FFFFFF"/>
-                          </a:solidFill>
-                          <a:latin typeface="Calibri" pitchFamily="34" charset="0"/>
-                          <a:ea typeface="Calibri" pitchFamily="34" charset="-122"/>
-                          <a:cs typeface="Calibri" pitchFamily="34" charset="-120"/>
-                        </a:rPr>
-                        <a:t>Court</a:t>
-                      </a:r>
-                      <a:endParaRPr lang="en-US" sz="900" dirty="0">
-                        <a:latin typeface="Calibri" charset="0"/>
-                        <a:ea typeface="Calibri" charset="0"/>
-                        <a:cs typeface="Calibri" charset="0"/>
-                      </a:endParaRPr>
-                    </a:p>
-                  </a:txBody>
-                  <a:tcPr marT="18288" marB="18288">
-                    <a:lnL w="6350" cap="flat" cmpd="sng" algn="ctr">
-                      <a:solidFill>
-                        <a:srgbClr val="1E3A6B"/>
-                      </a:solidFill>
-                      <a:prstDash val="solid"/>
-                      <a:round/>
-                      <a:headEnd type="none" w="med" len="med"/>
-                      <a:tailEnd type="none" w="med" len="med"/>
-                    </a:lnL>
-                    <a:lnR w="6350" cap="flat" cmpd="sng" algn="ctr">
-                      <a:solidFill>
-                        <a:srgbClr val="1E3A6B"/>
-                      </a:solidFill>
-                      <a:prstDash val="solid"/>
-                      <a:round/>
-                      <a:headEnd type="none" w="med" len="med"/>
-                      <a:tailEnd type="none" w="med" len="med"/>
-                    </a:lnR>
-                    <a:lnT w="6350" cap="flat" cmpd="sng" algn="ctr">
-                      <a:solidFill>
-                        <a:srgbClr val="1E3A6B"/>
-                      </a:solidFill>
-                      <a:prstDash val="solid"/>
-                      <a:round/>
-                      <a:headEnd type="none" w="med" len="med"/>
-                      <a:tailEnd type="none" w="med" len="med"/>
-                    </a:lnT>
-                    <a:lnB w="6350" cap="flat" cmpd="sng" algn="ctr">
-                      <a:solidFill>
-                        <a:srgbClr val="1E3A6B"/>
-                      </a:solidFill>
-                      <a:prstDash val="solid"/>
-                      <a:round/>
-                      <a:headEnd type="none" w="med" len="med"/>
-                      <a:tailEnd type="none" w="med" len="med"/>
-                    </a:lnB>
-                    <a:solidFill>
-                      <a:srgbClr val="12213F"/>
-                    </a:solidFill>
-                  </a:tcPr>
-                </a:tc>
-                <a:tc>
-                  <a:txBody>
-                    <a:bodyPr/>
-                    <a:lstStyle/>
-                    <a:p>
-                      <a:pPr marL="0" indent="0" algn="r">
-                        <a:buNone/>
-                      </a:pPr>
-                      <a:r>
-                        <a:rPr lang="en-US" sz="900" dirty="0">
-                          <a:solidFill>
-                            <a:srgbClr val="FFFFFF"/>
-                          </a:solidFill>
-                          <a:latin typeface="Calibri" pitchFamily="34" charset="0"/>
-                          <a:ea typeface="Calibri" pitchFamily="34" charset="-122"/>
-                          <a:cs typeface="Calibri" pitchFamily="34" charset="-120"/>
-                        </a:rPr>
-                        <a:t>10</a:t>
-                      </a:r>
-                      <a:endParaRPr lang="en-US" sz="900" dirty="0">
-                        <a:latin typeface="Calibri" charset="0"/>
-                        <a:ea typeface="Calibri" charset="0"/>
-                        <a:cs typeface="Calibri" charset="0"/>
-                      </a:endParaRPr>
-                    </a:p>
-                  </a:txBody>
-                  <a:tcPr marT="18288" marB="18288">
-                    <a:lnL w="6350" cap="flat" cmpd="sng" algn="ctr">
-                      <a:solidFill>
-                        <a:srgbClr val="1E3A6B"/>
-                      </a:solidFill>
-                      <a:prstDash val="solid"/>
-                      <a:round/>
-                      <a:headEnd type="none" w="med" len="med"/>
-                      <a:tailEnd type="none" w="med" len="med"/>
-                    </a:lnL>
-                    <a:lnR w="6350" cap="flat" cmpd="sng" algn="ctr">
-                      <a:solidFill>
-                        <a:srgbClr val="1E3A6B"/>
-                      </a:solidFill>
-                      <a:prstDash val="solid"/>
-                      <a:round/>
-                      <a:headEnd type="none" w="med" len="med"/>
-                      <a:tailEnd type="none" w="med" len="med"/>
-                    </a:lnR>
-                    <a:lnT w="6350" cap="flat" cmpd="sng" algn="ctr">
-                      <a:solidFill>
-                        <a:srgbClr val="1E3A6B"/>
-                      </a:solidFill>
-                      <a:prstDash val="solid"/>
-                      <a:round/>
-                      <a:headEnd type="none" w="med" len="med"/>
-                      <a:tailEnd type="none" w="med" len="med"/>
-                    </a:lnT>
-                    <a:lnB w="6350" cap="flat" cmpd="sng" algn="ctr">
-                      <a:solidFill>
-                        <a:srgbClr val="1E3A6B"/>
-                      </a:solidFill>
-                      <a:prstDash val="solid"/>
-                      <a:round/>
-                      <a:headEnd type="none" w="med" len="med"/>
-                      <a:tailEnd type="none" w="med" len="med"/>
-                    </a:lnB>
-                    <a:solidFill>
-                      <a:srgbClr val="12213F"/>
-                    </a:solidFill>
-                  </a:tcPr>
-                </a:tc>
-                <a:extLst>
-                  <a:ext uri="{0D108BD9-81ED-4DB2-BD59-A6C34878D82A}">
-                    <a16:rowId xmlns:a16="http://schemas.microsoft.com/office/drawing/2014/main" val="10011"/>
-                  </a:ext>
-                </a:extLst>
-              </a:tr>
-              <a:tr h="237744">
-                <a:tc>
-                  <a:txBody>
-                    <a:bodyPr/>
-                    <a:lstStyle/>
-                    <a:p>
-                      <a:pPr marL="0" indent="0">
-                        <a:buNone/>
-                      </a:pPr>
-                      <a:r>
-                        <a:rPr lang="en-US" sz="900" dirty="0">
-                          <a:solidFill>
-                            <a:srgbClr val="FFFFFF"/>
-                          </a:solidFill>
-                          <a:latin typeface="Calibri" pitchFamily="34" charset="0"/>
-                          <a:ea typeface="Calibri" pitchFamily="34" charset="-122"/>
-                          <a:cs typeface="Calibri" pitchFamily="34" charset="-120"/>
-                        </a:rPr>
-                        <a:t>CaseStatus</a:t>
-                      </a:r>
-                      <a:endParaRPr lang="en-US" sz="900" dirty="0">
-                        <a:latin typeface="Calibri" charset="0"/>
-                        <a:ea typeface="Calibri" charset="0"/>
-                        <a:cs typeface="Calibri" charset="0"/>
-                      </a:endParaRPr>
-                    </a:p>
-                  </a:txBody>
-                  <a:tcPr marT="18288" marB="18288">
-                    <a:lnL w="6350" cap="flat" cmpd="sng" algn="ctr">
-                      <a:solidFill>
-                        <a:srgbClr val="1E3A6B"/>
-                      </a:solidFill>
-                      <a:prstDash val="solid"/>
-                      <a:round/>
-                      <a:headEnd type="none" w="med" len="med"/>
-                      <a:tailEnd type="none" w="med" len="med"/>
-                    </a:lnL>
-                    <a:lnR w="6350" cap="flat" cmpd="sng" algn="ctr">
-                      <a:solidFill>
-                        <a:srgbClr val="1E3A6B"/>
-                      </a:solidFill>
-                      <a:prstDash val="solid"/>
-                      <a:round/>
-                      <a:headEnd type="none" w="med" len="med"/>
-                      <a:tailEnd type="none" w="med" len="med"/>
-                    </a:lnR>
-                    <a:lnT w="6350" cap="flat" cmpd="sng" algn="ctr">
-                      <a:solidFill>
-                        <a:srgbClr val="1E3A6B"/>
-                      </a:solidFill>
-                      <a:prstDash val="solid"/>
-                      <a:round/>
-                      <a:headEnd type="none" w="med" len="med"/>
-                      <a:tailEnd type="none" w="med" len="med"/>
-                    </a:lnT>
-                    <a:lnB w="6350" cap="flat" cmpd="sng" algn="ctr">
-                      <a:solidFill>
-                        <a:srgbClr val="1E3A6B"/>
-                      </a:solidFill>
-                      <a:prstDash val="solid"/>
-                      <a:round/>
-                      <a:headEnd type="none" w="med" len="med"/>
-                      <a:tailEnd type="none" w="med" len="med"/>
-                    </a:lnB>
-                    <a:solidFill>
-                      <a:srgbClr val="0F1B36"/>
-                    </a:solidFill>
-                  </a:tcPr>
-                </a:tc>
-                <a:tc>
-                  <a:txBody>
-                    <a:bodyPr/>
-                    <a:lstStyle/>
-                    <a:p>
-                      <a:pPr marL="0" indent="0" algn="r">
-                        <a:buNone/>
-                      </a:pPr>
-                      <a:r>
-                        <a:rPr lang="en-US" sz="900" dirty="0">
-                          <a:solidFill>
-                            <a:srgbClr val="FFFFFF"/>
-                          </a:solidFill>
-                          <a:latin typeface="Calibri" pitchFamily="34" charset="0"/>
-                          <a:ea typeface="Calibri" pitchFamily="34" charset="-122"/>
-                          <a:cs typeface="Calibri" pitchFamily="34" charset="-120"/>
-                        </a:rPr>
-                        <a:t>5</a:t>
-                      </a:r>
-                      <a:endParaRPr lang="en-US" sz="900" dirty="0">
-                        <a:latin typeface="Calibri" charset="0"/>
-                        <a:ea typeface="Calibri" charset="0"/>
-                        <a:cs typeface="Calibri" charset="0"/>
-                      </a:endParaRPr>
-                    </a:p>
-                  </a:txBody>
-                  <a:tcPr marT="18288" marB="18288">
-                    <a:lnL w="6350" cap="flat" cmpd="sng" algn="ctr">
-                      <a:solidFill>
-                        <a:srgbClr val="1E3A6B"/>
-                      </a:solidFill>
-                      <a:prstDash val="solid"/>
-                      <a:round/>
-                      <a:headEnd type="none" w="med" len="med"/>
-                      <a:tailEnd type="none" w="med" len="med"/>
-                    </a:lnL>
-                    <a:lnR w="6350" cap="flat" cmpd="sng" algn="ctr">
-                      <a:solidFill>
-                        <a:srgbClr val="1E3A6B"/>
-                      </a:solidFill>
-                      <a:prstDash val="solid"/>
-                      <a:round/>
-                      <a:headEnd type="none" w="med" len="med"/>
-                      <a:tailEnd type="none" w="med" len="med"/>
-                    </a:lnR>
-                    <a:lnT w="6350" cap="flat" cmpd="sng" algn="ctr">
-                      <a:solidFill>
-                        <a:srgbClr val="1E3A6B"/>
-                      </a:solidFill>
-                      <a:prstDash val="solid"/>
-                      <a:round/>
-                      <a:headEnd type="none" w="med" len="med"/>
-                      <a:tailEnd type="none" w="med" len="med"/>
-                    </a:lnT>
-                    <a:lnB w="6350" cap="flat" cmpd="sng" algn="ctr">
-                      <a:solidFill>
-                        <a:srgbClr val="1E3A6B"/>
-                      </a:solidFill>
-                      <a:prstDash val="solid"/>
-                      <a:round/>
-                      <a:headEnd type="none" w="med" len="med"/>
-                      <a:tailEnd type="none" w="med" len="med"/>
-                    </a:lnB>
-                    <a:solidFill>
-                      <a:srgbClr val="0F1B36"/>
-                    </a:solidFill>
-                  </a:tcPr>
-                </a:tc>
-                <a:extLst>
-                  <a:ext uri="{0D108BD9-81ED-4DB2-BD59-A6C34878D82A}">
-                    <a16:rowId xmlns:a16="http://schemas.microsoft.com/office/drawing/2014/main" val="10012"/>
-                  </a:ext>
-                </a:extLst>
-              </a:tr>
-              <a:tr h="237744">
-                <a:tc>
-                  <a:txBody>
-                    <a:bodyPr/>
-                    <a:lstStyle/>
-                    <a:p>
-                      <a:pPr marL="0" indent="0">
-                        <a:buNone/>
-                      </a:pPr>
-                      <a:r>
-                        <a:rPr lang="en-US" sz="900" b="1" dirty="0">
-                          <a:solidFill>
-                            <a:srgbClr val="22D3EE"/>
-                          </a:solidFill>
-                          <a:latin typeface="Calibri" pitchFamily="34" charset="0"/>
-                          <a:ea typeface="Calibri" pitchFamily="34" charset="-122"/>
-                          <a:cs typeface="Calibri" pitchFamily="34" charset="-120"/>
-                        </a:rPr>
-                        <a:t>Total</a:t>
-                      </a:r>
-                      <a:endParaRPr lang="en-US" sz="900" dirty="0">
-                        <a:latin typeface="Calibri" charset="0"/>
-                        <a:ea typeface="Calibri" charset="0"/>
-                        <a:cs typeface="Calibri" charset="0"/>
-                      </a:endParaRPr>
-                    </a:p>
-                  </a:txBody>
-                  <a:tcPr marT="18288" marB="18288">
-                    <a:lnL w="6350" cap="flat" cmpd="sng" algn="ctr">
-                      <a:solidFill>
-                        <a:srgbClr val="1E3A6B"/>
-                      </a:solidFill>
-                      <a:prstDash val="solid"/>
-                      <a:round/>
-                      <a:headEnd type="none" w="med" len="med"/>
-                      <a:tailEnd type="none" w="med" len="med"/>
-                    </a:lnL>
-                    <a:lnR w="6350" cap="flat" cmpd="sng" algn="ctr">
-                      <a:solidFill>
-                        <a:srgbClr val="1E3A6B"/>
-                      </a:solidFill>
-                      <a:prstDash val="solid"/>
-                      <a:round/>
-                      <a:headEnd type="none" w="med" len="med"/>
-                      <a:tailEnd type="none" w="med" len="med"/>
-                    </a:lnR>
-                    <a:lnT w="6350" cap="flat" cmpd="sng" algn="ctr">
-                      <a:solidFill>
-                        <a:srgbClr val="1E3A6B"/>
-                      </a:solidFill>
-                      <a:prstDash val="solid"/>
-                      <a:round/>
-                      <a:headEnd type="none" w="med" len="med"/>
-                      <a:tailEnd type="none" w="med" len="med"/>
-                    </a:lnT>
-                    <a:lnB w="6350" cap="flat" cmpd="sng" algn="ctr">
-                      <a:solidFill>
-                        <a:srgbClr val="1E3A6B"/>
-                      </a:solidFill>
-                      <a:prstDash val="solid"/>
-                      <a:round/>
-                      <a:headEnd type="none" w="med" len="med"/>
-                      <a:tailEnd type="none" w="med" len="med"/>
-                    </a:lnB>
-                    <a:solidFill>
-                      <a:srgbClr val="163A78"/>
-                    </a:solidFill>
-                  </a:tcPr>
-                </a:tc>
-                <a:tc>
-                  <a:txBody>
-                    <a:bodyPr/>
-                    <a:lstStyle/>
-                    <a:p>
-                      <a:pPr marL="0" indent="0" algn="r">
-                        <a:buNone/>
-                      </a:pPr>
-                      <a:r>
-                        <a:rPr lang="en-US" sz="900" b="1" dirty="0">
-                          <a:solidFill>
-                            <a:srgbClr val="22D3EE"/>
-                          </a:solidFill>
-                          <a:latin typeface="Calibri" pitchFamily="34" charset="0"/>
-                          <a:ea typeface="Calibri" pitchFamily="34" charset="-122"/>
-                          <a:cs typeface="Calibri" pitchFamily="34" charset="-120"/>
-                        </a:rPr>
-                        <a:t>4,029</a:t>
-                      </a:r>
-                      <a:endParaRPr lang="en-US" sz="900" dirty="0">
-                        <a:latin typeface="Calibri" charset="0"/>
-                        <a:ea typeface="Calibri" charset="0"/>
-                        <a:cs typeface="Calibri" charset="0"/>
-                      </a:endParaRPr>
-                    </a:p>
-                  </a:txBody>
-                  <a:tcPr marT="18288" marB="18288">
-                    <a:lnL w="6350" cap="flat" cmpd="sng" algn="ctr">
-                      <a:solidFill>
-                        <a:srgbClr val="1E3A6B"/>
-                      </a:solidFill>
-                      <a:prstDash val="solid"/>
-                      <a:round/>
-                      <a:headEnd type="none" w="med" len="med"/>
-                      <a:tailEnd type="none" w="med" len="med"/>
-                    </a:lnL>
-                    <a:lnR w="6350" cap="flat" cmpd="sng" algn="ctr">
-                      <a:solidFill>
-                        <a:srgbClr val="1E3A6B"/>
-                      </a:solidFill>
-                      <a:prstDash val="solid"/>
-                      <a:round/>
-                      <a:headEnd type="none" w="med" len="med"/>
-                      <a:tailEnd type="none" w="med" len="med"/>
-                    </a:lnR>
-                    <a:lnT w="6350" cap="flat" cmpd="sng" algn="ctr">
-                      <a:solidFill>
-                        <a:srgbClr val="1E3A6B"/>
-                      </a:solidFill>
-                      <a:prstDash val="solid"/>
-                      <a:round/>
-                      <a:headEnd type="none" w="med" len="med"/>
-                      <a:tailEnd type="none" w="med" len="med"/>
-                    </a:lnT>
-                    <a:lnB w="6350" cap="flat" cmpd="sng" algn="ctr">
-                      <a:solidFill>
-                        <a:srgbClr val="1E3A6B"/>
-                      </a:solidFill>
-                      <a:prstDash val="solid"/>
-                      <a:round/>
-                      <a:headEnd type="none" w="med" len="med"/>
-                      <a:tailEnd type="none" w="med" len="med"/>
-                    </a:lnB>
-                    <a:solidFill>
-                      <a:srgbClr val="163A78"/>
-                    </a:solidFill>
-                  </a:tcPr>
-                </a:tc>
-                <a:extLst>
-                  <a:ext uri="{0D108BD9-81ED-4DB2-BD59-A6C34878D82A}">
-                    <a16:rowId xmlns:a16="http://schemas.microsoft.com/office/drawing/2014/main" val="10013"/>
-                  </a:ext>
-                </a:extLst>
-              </a:tr>
-            </a:tbl>
-          </a:graphicData>
-        </a:graphic>
-      </p:graphicFrame>
+          </a:p>
+        </p:txBody>
+      </p:sp>
     </p:spTree>
   </p:cSld>
   <p:clrMapOvr>
@@ -9961,7 +7696,7 @@
                 <a:ea typeface="Calibri" pitchFamily="34" charset="-122"/>
                 <a:cs typeface="Calibri" pitchFamily="34" charset="-120"/>
               </a:rPr>
-              <a:t>06  </a:t>
+              <a:t>05  </a:t>
             </a:r>
             <a:r>
               <a:rPr lang="en-US" sz="2100" b="1" dirty="0">
@@ -9972,7 +7707,7 @@
                 <a:ea typeface="Calibri" pitchFamily="34" charset="-122"/>
                 <a:cs typeface="Calibri" pitchFamily="34" charset="-120"/>
               </a:rPr>
-              <a:t>SQL Analytics: From Records to Insights</a:t>
+              <a:t>SQL Analytics &amp; Judicial Case Aging</a:t>
             </a:r>
             <a:endParaRPr lang="en-US" sz="2100" dirty="0"/>
           </a:p>
@@ -10050,7 +7785,7 @@
                 <a:ea typeface="Calibri" pitchFamily="34" charset="-122"/>
                 <a:cs typeface="Calibri" pitchFamily="34" charset="-120"/>
               </a:rPr>
-              <a:t>6 / 10</a:t>
+              <a:t>5 / 8</a:t>
             </a:r>
             <a:endParaRPr lang="en-US" sz="800" dirty="0"/>
           </a:p>
@@ -10058,14 +7793,607 @@
       </p:sp>
       <p:sp>
         <p:nvSpPr>
-          <p:cNvPr id="5" name="Shape 3"/>
+          <p:cNvPr id="1018" name="Shape 3"/>
           <p:cNvSpPr/>
           <p:nvPr/>
         </p:nvSpPr>
         <p:spPr>
           <a:xfrm>
-            <a:off x="457200" y="1005840"/>
-            <a:ext cx="2560320" cy="1097280"/>
+            <a:off x="457200" y="960120"/>
+            <a:ext cx="1188720" cy="329184"/>
+          </a:xfrm>
+          <a:prstGeom prst="roundRect">
+            <a:avLst>
+              <a:gd name="adj" fmla="val 10909"/>
+            </a:avLst>
+          </a:prstGeom>
+          <a:solidFill>
+            <a:srgbClr val="12213F"/>
+          </a:solidFill>
+          <a:ln w="12700">
+            <a:solidFill>
+              <a:srgbClr val="22D3EE"/>
+            </a:solidFill>
+            <a:prstDash val="solid"/>
+          </a:ln>
+        </p:spPr>
+        <p:txBody>
+          <a:bodyPr/>
+          <a:lstStyle/>
+          <a:p>
+            <a:endParaRPr lang="en-US"/>
+          </a:p>
+        </p:txBody>
+      </p:sp>
+      <p:sp>
+        <p:nvSpPr>
+          <p:cNvPr id="1019" name="Text 4"/>
+          <p:cNvSpPr txBox="1"/>
+          <p:nvPr/>
+        </p:nvSpPr>
+        <p:spPr>
+          <a:xfrm>
+            <a:off x="493776" y="960120"/>
+            <a:ext cx="1115568" cy="329184"/>
+          </a:xfrm>
+          <a:prstGeom prst="rect">
+            <a:avLst/>
+          </a:prstGeom>
+          <a:noFill/>
+          <a:ln/>
+        </p:spPr>
+        <p:txBody>
+          <a:bodyPr wrap="square" lIns="0" tIns="0" rIns="0" bIns="0" rtlCol="0" anchor="ctr"/>
+          <a:lstStyle/>
+          <a:p>
+            <a:pPr marL="0" indent="0" algn="ctr">
+              <a:buNone/>
+            </a:pPr>
+            <a:r>
+              <a:rPr lang="en-US" sz="850" b="1" dirty="0">
+                <a:solidFill>
+                  <a:srgbClr val="FFFFFF"/>
+                </a:solidFill>
+                <a:latin typeface="Calibri" pitchFamily="34" charset="0"/>
+                <a:ea typeface="Calibri" pitchFamily="34" charset="-122"/>
+                <a:cs typeface="Calibri" pitchFamily="34" charset="-120"/>
+              </a:rPr>
+              <a:t>FIR</a:t>
+            </a:r>
+            <a:endParaRPr lang="en-US" sz="850" dirty="0"/>
+          </a:p>
+        </p:txBody>
+      </p:sp>
+      <p:sp>
+        <p:nvSpPr>
+          <p:cNvPr id="1020" name="Shape 5"/>
+          <p:cNvSpPr/>
+          <p:nvPr/>
+        </p:nvSpPr>
+        <p:spPr>
+          <a:xfrm>
+            <a:off x="1645920" y="1124712"/>
+            <a:ext cx="219456" cy="0"/>
+          </a:xfrm>
+          <a:prstGeom prst="line">
+            <a:avLst/>
+          </a:prstGeom>
+          <a:noFill/>
+          <a:ln w="15875">
+            <a:solidFill>
+              <a:srgbClr val="22D3EE"/>
+            </a:solidFill>
+            <a:prstDash val="solid"/>
+            <a:tailEnd type="triangle"/>
+          </a:ln>
+        </p:spPr>
+        <p:txBody>
+          <a:bodyPr/>
+          <a:lstStyle/>
+          <a:p>
+            <a:endParaRPr lang="en-US"/>
+          </a:p>
+        </p:txBody>
+      </p:sp>
+      <p:sp>
+        <p:nvSpPr>
+          <p:cNvPr id="1021" name="Shape 6"/>
+          <p:cNvSpPr/>
+          <p:nvPr/>
+        </p:nvSpPr>
+        <p:spPr>
+          <a:xfrm>
+            <a:off x="1865376" y="960120"/>
+            <a:ext cx="1188720" cy="329184"/>
+          </a:xfrm>
+          <a:prstGeom prst="roundRect">
+            <a:avLst>
+              <a:gd name="adj" fmla="val 10909"/>
+            </a:avLst>
+          </a:prstGeom>
+          <a:solidFill>
+            <a:srgbClr val="12213F"/>
+          </a:solidFill>
+          <a:ln w="12700">
+            <a:solidFill>
+              <a:srgbClr val="22D3EE"/>
+            </a:solidFill>
+            <a:prstDash val="solid"/>
+          </a:ln>
+        </p:spPr>
+        <p:txBody>
+          <a:bodyPr/>
+          <a:lstStyle/>
+          <a:p>
+            <a:endParaRPr lang="en-US"/>
+          </a:p>
+        </p:txBody>
+      </p:sp>
+      <p:sp>
+        <p:nvSpPr>
+          <p:cNvPr id="1022" name="Text 7"/>
+          <p:cNvSpPr txBox="1"/>
+          <p:nvPr/>
+        </p:nvSpPr>
+        <p:spPr>
+          <a:xfrm>
+            <a:off x="1901952" y="960120"/>
+            <a:ext cx="1115568" cy="329184"/>
+          </a:xfrm>
+          <a:prstGeom prst="rect">
+            <a:avLst/>
+          </a:prstGeom>
+          <a:noFill/>
+          <a:ln/>
+        </p:spPr>
+        <p:txBody>
+          <a:bodyPr wrap="square" lIns="0" tIns="0" rIns="0" bIns="0" rtlCol="0" anchor="ctr"/>
+          <a:lstStyle/>
+          <a:p>
+            <a:pPr marL="0" indent="0" algn="ctr">
+              <a:buNone/>
+            </a:pPr>
+            <a:r>
+              <a:rPr lang="en-US" sz="850" b="1" dirty="0">
+                <a:solidFill>
+                  <a:srgbClr val="FFFFFF"/>
+                </a:solidFill>
+                <a:latin typeface="Calibri" pitchFamily="34" charset="0"/>
+                <a:ea typeface="Calibri" pitchFamily="34" charset="-122"/>
+                <a:cs typeface="Calibri" pitchFamily="34" charset="-120"/>
+              </a:rPr>
+              <a:t>Investigation</a:t>
+            </a:r>
+            <a:endParaRPr lang="en-US" sz="850" dirty="0"/>
+          </a:p>
+        </p:txBody>
+      </p:sp>
+      <p:sp>
+        <p:nvSpPr>
+          <p:cNvPr id="1023" name="Shape 8"/>
+          <p:cNvSpPr/>
+          <p:nvPr/>
+        </p:nvSpPr>
+        <p:spPr>
+          <a:xfrm>
+            <a:off x="3054096" y="1124712"/>
+            <a:ext cx="219456" cy="0"/>
+          </a:xfrm>
+          <a:prstGeom prst="line">
+            <a:avLst/>
+          </a:prstGeom>
+          <a:noFill/>
+          <a:ln w="15875">
+            <a:solidFill>
+              <a:srgbClr val="22D3EE"/>
+            </a:solidFill>
+            <a:prstDash val="solid"/>
+            <a:tailEnd type="triangle"/>
+          </a:ln>
+        </p:spPr>
+        <p:txBody>
+          <a:bodyPr/>
+          <a:lstStyle/>
+          <a:p>
+            <a:endParaRPr lang="en-US"/>
+          </a:p>
+        </p:txBody>
+      </p:sp>
+      <p:sp>
+        <p:nvSpPr>
+          <p:cNvPr id="1024" name="Shape 9"/>
+          <p:cNvSpPr/>
+          <p:nvPr/>
+        </p:nvSpPr>
+        <p:spPr>
+          <a:xfrm>
+            <a:off x="3273552" y="960120"/>
+            <a:ext cx="1188720" cy="329184"/>
+          </a:xfrm>
+          <a:prstGeom prst="roundRect">
+            <a:avLst>
+              <a:gd name="adj" fmla="val 10909"/>
+            </a:avLst>
+          </a:prstGeom>
+          <a:solidFill>
+            <a:srgbClr val="12213F"/>
+          </a:solidFill>
+          <a:ln w="12700">
+            <a:solidFill>
+              <a:srgbClr val="22D3EE"/>
+            </a:solidFill>
+            <a:prstDash val="solid"/>
+          </a:ln>
+        </p:spPr>
+        <p:txBody>
+          <a:bodyPr/>
+          <a:lstStyle/>
+          <a:p>
+            <a:endParaRPr lang="en-US"/>
+          </a:p>
+        </p:txBody>
+      </p:sp>
+      <p:sp>
+        <p:nvSpPr>
+          <p:cNvPr id="1025" name="Text 10"/>
+          <p:cNvSpPr txBox="1"/>
+          <p:nvPr/>
+        </p:nvSpPr>
+        <p:spPr>
+          <a:xfrm>
+            <a:off x="3310128" y="960120"/>
+            <a:ext cx="1115568" cy="329184"/>
+          </a:xfrm>
+          <a:prstGeom prst="rect">
+            <a:avLst/>
+          </a:prstGeom>
+          <a:noFill/>
+          <a:ln/>
+        </p:spPr>
+        <p:txBody>
+          <a:bodyPr wrap="square" lIns="0" tIns="0" rIns="0" bIns="0" rtlCol="0" anchor="ctr"/>
+          <a:lstStyle/>
+          <a:p>
+            <a:pPr marL="0" indent="0" algn="ctr">
+              <a:buNone/>
+            </a:pPr>
+            <a:r>
+              <a:rPr lang="en-US" sz="850" b="1" dirty="0">
+                <a:solidFill>
+                  <a:srgbClr val="FFFFFF"/>
+                </a:solidFill>
+                <a:latin typeface="Calibri" pitchFamily="34" charset="0"/>
+                <a:ea typeface="Calibri" pitchFamily="34" charset="-122"/>
+                <a:cs typeface="Calibri" pitchFamily="34" charset="-120"/>
+              </a:rPr>
+              <a:t>Arrest</a:t>
+            </a:r>
+            <a:endParaRPr lang="en-US" sz="850" dirty="0"/>
+          </a:p>
+        </p:txBody>
+      </p:sp>
+      <p:sp>
+        <p:nvSpPr>
+          <p:cNvPr id="1026" name="Shape 11"/>
+          <p:cNvSpPr/>
+          <p:nvPr/>
+        </p:nvSpPr>
+        <p:spPr>
+          <a:xfrm>
+            <a:off x="4462272" y="1124712"/>
+            <a:ext cx="219456" cy="0"/>
+          </a:xfrm>
+          <a:prstGeom prst="line">
+            <a:avLst/>
+          </a:prstGeom>
+          <a:noFill/>
+          <a:ln w="15875">
+            <a:solidFill>
+              <a:srgbClr val="22D3EE"/>
+            </a:solidFill>
+            <a:prstDash val="solid"/>
+            <a:tailEnd type="triangle"/>
+          </a:ln>
+        </p:spPr>
+        <p:txBody>
+          <a:bodyPr/>
+          <a:lstStyle/>
+          <a:p>
+            <a:endParaRPr lang="en-US"/>
+          </a:p>
+        </p:txBody>
+      </p:sp>
+      <p:sp>
+        <p:nvSpPr>
+          <p:cNvPr id="1027" name="Shape 12"/>
+          <p:cNvSpPr/>
+          <p:nvPr/>
+        </p:nvSpPr>
+        <p:spPr>
+          <a:xfrm>
+            <a:off x="4681728" y="960120"/>
+            <a:ext cx="1188720" cy="329184"/>
+          </a:xfrm>
+          <a:prstGeom prst="roundRect">
+            <a:avLst>
+              <a:gd name="adj" fmla="val 10909"/>
+            </a:avLst>
+          </a:prstGeom>
+          <a:solidFill>
+            <a:srgbClr val="12213F"/>
+          </a:solidFill>
+          <a:ln w="12700">
+            <a:solidFill>
+              <a:srgbClr val="22D3EE"/>
+            </a:solidFill>
+            <a:prstDash val="solid"/>
+          </a:ln>
+        </p:spPr>
+        <p:txBody>
+          <a:bodyPr/>
+          <a:lstStyle/>
+          <a:p>
+            <a:endParaRPr lang="en-US"/>
+          </a:p>
+        </p:txBody>
+      </p:sp>
+      <p:sp>
+        <p:nvSpPr>
+          <p:cNvPr id="1028" name="Text 13"/>
+          <p:cNvSpPr txBox="1"/>
+          <p:nvPr/>
+        </p:nvSpPr>
+        <p:spPr>
+          <a:xfrm>
+            <a:off x="4718304" y="960120"/>
+            <a:ext cx="1115568" cy="329184"/>
+          </a:xfrm>
+          <a:prstGeom prst="rect">
+            <a:avLst/>
+          </a:prstGeom>
+          <a:noFill/>
+          <a:ln/>
+        </p:spPr>
+        <p:txBody>
+          <a:bodyPr wrap="square" lIns="0" tIns="0" rIns="0" bIns="0" rtlCol="0" anchor="ctr"/>
+          <a:lstStyle/>
+          <a:p>
+            <a:pPr marL="0" indent="0" algn="ctr">
+              <a:buNone/>
+            </a:pPr>
+            <a:r>
+              <a:rPr lang="en-US" sz="850" b="1" dirty="0">
+                <a:solidFill>
+                  <a:srgbClr val="FFFFFF"/>
+                </a:solidFill>
+                <a:latin typeface="Calibri" pitchFamily="34" charset="0"/>
+                <a:ea typeface="Calibri" pitchFamily="34" charset="-122"/>
+                <a:cs typeface="Calibri" pitchFamily="34" charset="-120"/>
+              </a:rPr>
+              <a:t>Court Filing</a:t>
+            </a:r>
+            <a:endParaRPr lang="en-US" sz="850" dirty="0"/>
+          </a:p>
+        </p:txBody>
+      </p:sp>
+      <p:sp>
+        <p:nvSpPr>
+          <p:cNvPr id="1029" name="Shape 14"/>
+          <p:cNvSpPr/>
+          <p:nvPr/>
+        </p:nvSpPr>
+        <p:spPr>
+          <a:xfrm>
+            <a:off x="5870448" y="1124712"/>
+            <a:ext cx="219456" cy="0"/>
+          </a:xfrm>
+          <a:prstGeom prst="line">
+            <a:avLst/>
+          </a:prstGeom>
+          <a:noFill/>
+          <a:ln w="15875">
+            <a:solidFill>
+              <a:srgbClr val="22D3EE"/>
+            </a:solidFill>
+            <a:prstDash val="solid"/>
+            <a:tailEnd type="triangle"/>
+          </a:ln>
+        </p:spPr>
+        <p:txBody>
+          <a:bodyPr/>
+          <a:lstStyle/>
+          <a:p>
+            <a:endParaRPr lang="en-US"/>
+          </a:p>
+        </p:txBody>
+      </p:sp>
+      <p:sp>
+        <p:nvSpPr>
+          <p:cNvPr id="1030" name="Shape 15"/>
+          <p:cNvSpPr/>
+          <p:nvPr/>
+        </p:nvSpPr>
+        <p:spPr>
+          <a:xfrm>
+            <a:off x="6089904" y="960120"/>
+            <a:ext cx="1188720" cy="329184"/>
+          </a:xfrm>
+          <a:prstGeom prst="roundRect">
+            <a:avLst>
+              <a:gd name="adj" fmla="val 10909"/>
+            </a:avLst>
+          </a:prstGeom>
+          <a:solidFill>
+            <a:srgbClr val="12213F"/>
+          </a:solidFill>
+          <a:ln w="12700">
+            <a:solidFill>
+              <a:srgbClr val="22D3EE"/>
+            </a:solidFill>
+            <a:prstDash val="solid"/>
+          </a:ln>
+        </p:spPr>
+        <p:txBody>
+          <a:bodyPr/>
+          <a:lstStyle/>
+          <a:p>
+            <a:endParaRPr lang="en-US"/>
+          </a:p>
+        </p:txBody>
+      </p:sp>
+      <p:sp>
+        <p:nvSpPr>
+          <p:cNvPr id="1031" name="Text 16"/>
+          <p:cNvSpPr txBox="1"/>
+          <p:nvPr/>
+        </p:nvSpPr>
+        <p:spPr>
+          <a:xfrm>
+            <a:off x="6126480" y="960120"/>
+            <a:ext cx="1115568" cy="329184"/>
+          </a:xfrm>
+          <a:prstGeom prst="rect">
+            <a:avLst/>
+          </a:prstGeom>
+          <a:noFill/>
+          <a:ln/>
+        </p:spPr>
+        <p:txBody>
+          <a:bodyPr wrap="square" lIns="0" tIns="0" rIns="0" bIns="0" rtlCol="0" anchor="ctr"/>
+          <a:lstStyle/>
+          <a:p>
+            <a:pPr marL="0" indent="0" algn="ctr">
+              <a:buNone/>
+            </a:pPr>
+            <a:r>
+              <a:rPr lang="en-US" sz="850" b="1" dirty="0">
+                <a:solidFill>
+                  <a:srgbClr val="FFFFFF"/>
+                </a:solidFill>
+                <a:latin typeface="Calibri" pitchFamily="34" charset="0"/>
+                <a:ea typeface="Calibri" pitchFamily="34" charset="-122"/>
+                <a:cs typeface="Calibri" pitchFamily="34" charset="-120"/>
+              </a:rPr>
+              <a:t>Trial</a:t>
+            </a:r>
+            <a:endParaRPr lang="en-US" sz="850" dirty="0"/>
+          </a:p>
+        </p:txBody>
+      </p:sp>
+      <p:sp>
+        <p:nvSpPr>
+          <p:cNvPr id="1032" name="Shape 17"/>
+          <p:cNvSpPr/>
+          <p:nvPr/>
+        </p:nvSpPr>
+        <p:spPr>
+          <a:xfrm>
+            <a:off x="7278624" y="1124712"/>
+            <a:ext cx="219456" cy="0"/>
+          </a:xfrm>
+          <a:prstGeom prst="line">
+            <a:avLst/>
+          </a:prstGeom>
+          <a:noFill/>
+          <a:ln w="15875">
+            <a:solidFill>
+              <a:srgbClr val="22D3EE"/>
+            </a:solidFill>
+            <a:prstDash val="solid"/>
+            <a:tailEnd type="triangle"/>
+          </a:ln>
+        </p:spPr>
+        <p:txBody>
+          <a:bodyPr/>
+          <a:lstStyle/>
+          <a:p>
+            <a:endParaRPr lang="en-US"/>
+          </a:p>
+        </p:txBody>
+      </p:sp>
+      <p:sp>
+        <p:nvSpPr>
+          <p:cNvPr id="1033" name="Shape 18"/>
+          <p:cNvSpPr/>
+          <p:nvPr/>
+        </p:nvSpPr>
+        <p:spPr>
+          <a:xfrm>
+            <a:off x="7498080" y="960120"/>
+            <a:ext cx="1188720" cy="329184"/>
+          </a:xfrm>
+          <a:prstGeom prst="roundRect">
+            <a:avLst>
+              <a:gd name="adj" fmla="val 10909"/>
+            </a:avLst>
+          </a:prstGeom>
+          <a:solidFill>
+            <a:srgbClr val="12213F"/>
+          </a:solidFill>
+          <a:ln w="12700">
+            <a:solidFill>
+              <a:srgbClr val="22D3EE"/>
+            </a:solidFill>
+            <a:prstDash val="solid"/>
+          </a:ln>
+        </p:spPr>
+        <p:txBody>
+          <a:bodyPr/>
+          <a:lstStyle/>
+          <a:p>
+            <a:endParaRPr lang="en-US"/>
+          </a:p>
+        </p:txBody>
+      </p:sp>
+      <p:sp>
+        <p:nvSpPr>
+          <p:cNvPr id="1034" name="Text 19"/>
+          <p:cNvSpPr txBox="1"/>
+          <p:nvPr/>
+        </p:nvSpPr>
+        <p:spPr>
+          <a:xfrm>
+            <a:off x="7534656" y="960120"/>
+            <a:ext cx="1115568" cy="329184"/>
+          </a:xfrm>
+          <a:prstGeom prst="rect">
+            <a:avLst/>
+          </a:prstGeom>
+          <a:noFill/>
+          <a:ln/>
+        </p:spPr>
+        <p:txBody>
+          <a:bodyPr wrap="square" lIns="0" tIns="0" rIns="0" bIns="0" rtlCol="0" anchor="ctr"/>
+          <a:lstStyle/>
+          <a:p>
+            <a:pPr marL="0" indent="0" algn="ctr">
+              <a:buNone/>
+            </a:pPr>
+            <a:r>
+              <a:rPr lang="en-US" sz="850" b="1" dirty="0">
+                <a:solidFill>
+                  <a:srgbClr val="FFFFFF"/>
+                </a:solidFill>
+                <a:latin typeface="Calibri" pitchFamily="34" charset="0"/>
+                <a:ea typeface="Calibri" pitchFamily="34" charset="-122"/>
+                <a:cs typeface="Calibri" pitchFamily="34" charset="-120"/>
+              </a:rPr>
+              <a:t>Verdict</a:t>
+            </a:r>
+            <a:endParaRPr lang="en-US" sz="850" dirty="0"/>
+          </a:p>
+        </p:txBody>
+      </p:sp>
+      <p:sp>
+        <p:nvSpPr>
+          <p:cNvPr id="1035" name="Shape 1035"/>
+          <p:cNvSpPr/>
+          <p:nvPr/>
+        </p:nvSpPr>
+        <p:spPr>
+          <a:xfrm>
+            <a:off x="457200" y="1417320"/>
+            <a:ext cx="2331720" cy="731520"/>
           </a:xfrm>
           <a:prstGeom prst="roundRect">
             <a:avLst>
@@ -10092,14 +8420,14 @@
       </p:sp>
       <p:sp>
         <p:nvSpPr>
-          <p:cNvPr id="6" name="Text 4"/>
+          <p:cNvPr id="1036" name="Shape 1036"/>
           <p:cNvSpPr txBox="1"/>
           <p:nvPr/>
         </p:nvSpPr>
         <p:spPr>
           <a:xfrm>
-            <a:off x="566928" y="1069848"/>
-            <a:ext cx="2340864" cy="969264"/>
+            <a:off x="548640" y="1481328"/>
+            <a:ext cx="2148840" cy="621792"/>
           </a:xfrm>
           <a:prstGeom prst="rect">
             <a:avLst/>
@@ -10112,99 +8440,95 @@
           <a:lstStyle/>
           <a:p>
             <a:pPr marL="0" indent="0">
-              <a:spcAft>
-                <a:spcPts val="300"/>
-              </a:spcAft>
-              <a:buNone/>
-            </a:pPr>
-            <a:r>
-              <a:rPr lang="en-US" sz="1100" b="1" dirty="0">
-                <a:solidFill>
-                  <a:srgbClr val="22D3EE"/>
-                </a:solidFill>
-                <a:latin typeface="Calibri" pitchFamily="34" charset="0"/>
-                <a:ea typeface="Calibri" pitchFamily="34" charset="-122"/>
-                <a:cs typeface="Calibri" pitchFamily="34" charset="-120"/>
-              </a:rPr>
-              <a:t>Station Analytics</a:t>
-            </a:r>
-            <a:endParaRPr lang="en-US" sz="1100" dirty="0"/>
-          </a:p>
-          <a:p>
-            <a:pPr marL="127000" indent="-127000">
               <a:spcAft>
                 <a:spcPts val="200"/>
               </a:spcAft>
-              <a:buSzPct val="100000"/>
-              <a:buChar char="•"/>
-            </a:pPr>
-            <a:r>
-              <a:rPr lang="en-US" sz="950" dirty="0">
-                <a:solidFill>
-                  <a:srgbClr val="FFFFFF"/>
-                </a:solidFill>
-                <a:latin typeface="Calibri" pitchFamily="34" charset="0"/>
-                <a:ea typeface="Calibri" pitchFamily="34" charset="-122"/>
-                <a:cs typeface="Calibri" pitchFamily="34" charset="-120"/>
-              </a:rPr>
-              <a:t>FIR count by police station</a:t>
-            </a:r>
-            <a:endParaRPr lang="en-US" sz="1100" dirty="0"/>
+              <a:buNone/>
+            </a:pPr>
+            <a:r>
+              <a:rPr lang="en-US" sz="950" b="1" dirty="0">
+                <a:solidFill>
+                  <a:srgbClr val="22D3EE"/>
+                </a:solidFill>
+                <a:latin typeface="Calibri"/>
+                <a:ea typeface="Calibri"/>
+                <a:cs typeface="Calibri"/>
+              </a:rPr>
+              <a:t>Station Analytics</a:t>
+            </a:r>
           </a:p>
           <a:p>
             <a:pPr marL="127000" indent="-127000">
               <a:spcAft>
-                <a:spcPts val="200"/>
+                <a:spcPts val="100"/>
               </a:spcAft>
               <a:buSzPct val="100000"/>
               <a:buChar char="•"/>
             </a:pPr>
             <a:r>
-              <a:rPr lang="en-US" sz="950" dirty="0">
-                <a:solidFill>
-                  <a:srgbClr val="FFFFFF"/>
-                </a:solidFill>
-                <a:latin typeface="Calibri" pitchFamily="34" charset="0"/>
-                <a:ea typeface="Calibri" pitchFamily="34" charset="-122"/>
-                <a:cs typeface="Calibri" pitchFamily="34" charset="-120"/>
-              </a:rPr>
-              <a:t>Active cases by division</a:t>
-            </a:r>
-            <a:endParaRPr lang="en-US" sz="1100" dirty="0"/>
+              <a:rPr lang="en-US" sz="800" dirty="0">
+                <a:solidFill>
+                  <a:srgbClr val="FFFFFF"/>
+                </a:solidFill>
+                <a:latin typeface="Calibri"/>
+                <a:ea typeface="Calibri"/>
+                <a:cs typeface="Calibri"/>
+              </a:rPr>
+              <a:t>FIR count by police station</a:t>
+            </a:r>
           </a:p>
           <a:p>
             <a:pPr marL="127000" indent="-127000">
               <a:spcAft>
-                <a:spcPts val="200"/>
+                <a:spcPts val="100"/>
               </a:spcAft>
               <a:buSzPct val="100000"/>
               <a:buChar char="•"/>
             </a:pPr>
             <a:r>
-              <a:rPr lang="en-US" sz="950" dirty="0">
-                <a:solidFill>
-                  <a:srgbClr val="FFFFFF"/>
-                </a:solidFill>
-                <a:latin typeface="Calibri" pitchFamily="34" charset="0"/>
-                <a:ea typeface="Calibri" pitchFamily="34" charset="-122"/>
-                <a:cs typeface="Calibri" pitchFamily="34" charset="-120"/>
+              <a:rPr lang="en-US" sz="800" dirty="0">
+                <a:solidFill>
+                  <a:srgbClr val="FFFFFF"/>
+                </a:solidFill>
+                <a:latin typeface="Calibri"/>
+                <a:ea typeface="Calibri"/>
+                <a:cs typeface="Calibri"/>
+              </a:rPr>
+              <a:t>Active cases by division</a:t>
+            </a:r>
+          </a:p>
+          <a:p>
+            <a:pPr marL="127000" indent="-127000">
+              <a:spcAft>
+                <a:spcPts val="100"/>
+              </a:spcAft>
+              <a:buSzPct val="100000"/>
+              <a:buChar char="•"/>
+            </a:pPr>
+            <a:r>
+              <a:rPr lang="en-US" sz="800" dirty="0">
+                <a:solidFill>
+                  <a:srgbClr val="FFFFFF"/>
+                </a:solidFill>
+                <a:latin typeface="Calibri"/>
+                <a:ea typeface="Calibri"/>
+                <a:cs typeface="Calibri"/>
               </a:rPr>
               <a:t>Officer workload</a:t>
             </a:r>
-            <a:endParaRPr lang="en-US" sz="1100" dirty="0"/>
-          </a:p>
-        </p:txBody>
-      </p:sp>
-      <p:sp>
-        <p:nvSpPr>
-          <p:cNvPr id="7" name="Shape 5"/>
+          </a:p>
+        </p:txBody>
+      </p:sp>
+      <p:sp>
+        <p:nvSpPr>
+          <p:cNvPr id="1037" name="Shape 1037"/>
           <p:cNvSpPr/>
           <p:nvPr/>
         </p:nvSpPr>
         <p:spPr>
           <a:xfrm>
-            <a:off x="457200" y="2194560"/>
-            <a:ext cx="2560320" cy="1097280"/>
+            <a:off x="457200" y="2221992"/>
+            <a:ext cx="2331720" cy="731520"/>
           </a:xfrm>
           <a:prstGeom prst="roundRect">
             <a:avLst>
@@ -10231,14 +8555,14 @@
       </p:sp>
       <p:sp>
         <p:nvSpPr>
-          <p:cNvPr id="8" name="Text 6"/>
+          <p:cNvPr id="1038" name="Shape 1038"/>
           <p:cNvSpPr txBox="1"/>
           <p:nvPr/>
         </p:nvSpPr>
         <p:spPr>
           <a:xfrm>
-            <a:off x="566928" y="2258568"/>
-            <a:ext cx="2340864" cy="969264"/>
+            <a:off x="548640" y="2286000"/>
+            <a:ext cx="2148840" cy="621792"/>
           </a:xfrm>
           <a:prstGeom prst="rect">
             <a:avLst/>
@@ -10251,99 +8575,95 @@
           <a:lstStyle/>
           <a:p>
             <a:pPr marL="0" indent="0">
-              <a:spcAft>
-                <a:spcPts val="300"/>
-              </a:spcAft>
-              <a:buNone/>
-            </a:pPr>
-            <a:r>
-              <a:rPr lang="en-US" sz="1100" b="1" dirty="0">
-                <a:solidFill>
-                  <a:srgbClr val="22D3EE"/>
-                </a:solidFill>
-                <a:latin typeface="Calibri" pitchFamily="34" charset="0"/>
-                <a:ea typeface="Calibri" pitchFamily="34" charset="-122"/>
-                <a:cs typeface="Calibri" pitchFamily="34" charset="-120"/>
-              </a:rPr>
-              <a:t>Crime Analytics</a:t>
-            </a:r>
-            <a:endParaRPr lang="en-US" sz="1100" dirty="0"/>
-          </a:p>
-          <a:p>
-            <a:pPr marL="127000" indent="-127000">
               <a:spcAft>
                 <a:spcPts val="200"/>
               </a:spcAft>
-              <a:buSzPct val="100000"/>
-              <a:buChar char="•"/>
-            </a:pPr>
-            <a:r>
-              <a:rPr lang="en-US" sz="950" dirty="0">
-                <a:solidFill>
-                  <a:srgbClr val="FFFFFF"/>
-                </a:solidFill>
-                <a:latin typeface="Calibri" pitchFamily="34" charset="0"/>
-                <a:ea typeface="Calibri" pitchFamily="34" charset="-122"/>
-                <a:cs typeface="Calibri" pitchFamily="34" charset="-120"/>
-              </a:rPr>
-              <a:t>Crime-type frequency</a:t>
-            </a:r>
-            <a:endParaRPr lang="en-US" sz="1100" dirty="0"/>
+              <a:buNone/>
+            </a:pPr>
+            <a:r>
+              <a:rPr lang="en-US" sz="950" b="1" dirty="0">
+                <a:solidFill>
+                  <a:srgbClr val="22D3EE"/>
+                </a:solidFill>
+                <a:latin typeface="Calibri"/>
+                <a:ea typeface="Calibri"/>
+                <a:cs typeface="Calibri"/>
+              </a:rPr>
+              <a:t>Crime Analytics</a:t>
+            </a:r>
           </a:p>
           <a:p>
             <a:pPr marL="127000" indent="-127000">
               <a:spcAft>
-                <a:spcPts val="200"/>
+                <a:spcPts val="100"/>
               </a:spcAft>
               <a:buSzPct val="100000"/>
               <a:buChar char="•"/>
             </a:pPr>
             <a:r>
-              <a:rPr lang="en-US" sz="950" dirty="0">
-                <a:solidFill>
-                  <a:srgbClr val="FFFFFF"/>
-                </a:solidFill>
-                <a:latin typeface="Calibri" pitchFamily="34" charset="0"/>
-                <a:ea typeface="Calibri" pitchFamily="34" charset="-122"/>
-                <a:cs typeface="Calibri" pitchFamily="34" charset="-120"/>
-              </a:rPr>
-              <a:t>Distribution by division</a:t>
-            </a:r>
-            <a:endParaRPr lang="en-US" sz="1100" dirty="0"/>
+              <a:rPr lang="en-US" sz="800" dirty="0">
+                <a:solidFill>
+                  <a:srgbClr val="FFFFFF"/>
+                </a:solidFill>
+                <a:latin typeface="Calibri"/>
+                <a:ea typeface="Calibri"/>
+                <a:cs typeface="Calibri"/>
+              </a:rPr>
+              <a:t>Crime-type frequency</a:t>
+            </a:r>
           </a:p>
           <a:p>
             <a:pPr marL="127000" indent="-127000">
               <a:spcAft>
-                <a:spcPts val="200"/>
+                <a:spcPts val="100"/>
               </a:spcAft>
               <a:buSzPct val="100000"/>
               <a:buChar char="•"/>
             </a:pPr>
             <a:r>
-              <a:rPr lang="en-US" sz="950" dirty="0">
-                <a:solidFill>
-                  <a:srgbClr val="FFFFFF"/>
-                </a:solidFill>
-                <a:latin typeface="Calibri" pitchFamily="34" charset="0"/>
-                <a:ea typeface="Calibri" pitchFamily="34" charset="-122"/>
-                <a:cs typeface="Calibri" pitchFamily="34" charset="-120"/>
+              <a:rPr lang="en-US" sz="800" dirty="0">
+                <a:solidFill>
+                  <a:srgbClr val="FFFFFF"/>
+                </a:solidFill>
+                <a:latin typeface="Calibri"/>
+                <a:ea typeface="Calibri"/>
+                <a:cs typeface="Calibri"/>
+              </a:rPr>
+              <a:t>Distribution by division</a:t>
+            </a:r>
+          </a:p>
+          <a:p>
+            <a:pPr marL="127000" indent="-127000">
+              <a:spcAft>
+                <a:spcPts val="100"/>
+              </a:spcAft>
+              <a:buSzPct val="100000"/>
+              <a:buChar char="•"/>
+            </a:pPr>
+            <a:r>
+              <a:rPr lang="en-US" sz="800" dirty="0">
+                <a:solidFill>
+                  <a:srgbClr val="FFFFFF"/>
+                </a:solidFill>
+                <a:latin typeface="Calibri"/>
+                <a:ea typeface="Calibri"/>
+                <a:cs typeface="Calibri"/>
               </a:rPr>
               <a:t>Premises &amp; weapon analysis</a:t>
             </a:r>
-            <a:endParaRPr lang="en-US" sz="1100" dirty="0"/>
-          </a:p>
-        </p:txBody>
-      </p:sp>
-      <p:sp>
-        <p:nvSpPr>
-          <p:cNvPr id="9" name="Shape 7"/>
+          </a:p>
+        </p:txBody>
+      </p:sp>
+      <p:sp>
+        <p:nvSpPr>
+          <p:cNvPr id="1039" name="Shape 1039"/>
           <p:cNvSpPr/>
           <p:nvPr/>
         </p:nvSpPr>
         <p:spPr>
           <a:xfrm>
-            <a:off x="457200" y="3383280"/>
-            <a:ext cx="2560320" cy="1097280"/>
+            <a:off x="457200" y="3026664"/>
+            <a:ext cx="2331720" cy="731520"/>
           </a:xfrm>
           <a:prstGeom prst="roundRect">
             <a:avLst>
@@ -10370,14 +8690,14 @@
       </p:sp>
       <p:sp>
         <p:nvSpPr>
-          <p:cNvPr id="10" name="Text 8"/>
+          <p:cNvPr id="1040" name="Shape 1040"/>
           <p:cNvSpPr txBox="1"/>
           <p:nvPr/>
         </p:nvSpPr>
         <p:spPr>
           <a:xfrm>
-            <a:off x="566928" y="3447288"/>
-            <a:ext cx="2340864" cy="969264"/>
+            <a:off x="548640" y="3090672"/>
+            <a:ext cx="2148840" cy="621792"/>
           </a:xfrm>
           <a:prstGeom prst="rect">
             <a:avLst/>
@@ -10390,99 +8710,230 @@
           <a:lstStyle/>
           <a:p>
             <a:pPr marL="0" indent="0">
-              <a:spcAft>
-                <a:spcPts val="300"/>
-              </a:spcAft>
-              <a:buNone/>
-            </a:pPr>
-            <a:r>
-              <a:rPr lang="en-US" sz="1100" b="1" dirty="0">
-                <a:solidFill>
-                  <a:srgbClr val="22D3EE"/>
-                </a:solidFill>
-                <a:latin typeface="Calibri" pitchFamily="34" charset="0"/>
-                <a:ea typeface="Calibri" pitchFamily="34" charset="-122"/>
-                <a:cs typeface="Calibri" pitchFamily="34" charset="-120"/>
-              </a:rPr>
-              <a:t>Victim Analytics</a:t>
-            </a:r>
-            <a:endParaRPr lang="en-US" sz="1100" dirty="0"/>
-          </a:p>
-          <a:p>
-            <a:pPr marL="127000" indent="-127000">
               <a:spcAft>
                 <a:spcPts val="200"/>
               </a:spcAft>
+              <a:buNone/>
+            </a:pPr>
+            <a:r>
+              <a:rPr lang="en-US" sz="950" b="1" dirty="0">
+                <a:solidFill>
+                  <a:srgbClr val="22D3EE"/>
+                </a:solidFill>
+                <a:latin typeface="Calibri"/>
+                <a:ea typeface="Calibri"/>
+                <a:cs typeface="Calibri"/>
+              </a:rPr>
+              <a:t>Victim Analytics</a:t>
+            </a:r>
+          </a:p>
+          <a:p>
+            <a:pPr marL="127000" indent="-127000">
+              <a:spcAft>
+                <a:spcPts val="100"/>
+              </a:spcAft>
               <a:buSzPct val="100000"/>
               <a:buChar char="•"/>
             </a:pPr>
             <a:r>
-              <a:rPr lang="en-US" sz="950" dirty="0">
-                <a:solidFill>
-                  <a:srgbClr val="FFFFFF"/>
-                </a:solidFill>
-                <a:latin typeface="Calibri" pitchFamily="34" charset="0"/>
-                <a:ea typeface="Calibri" pitchFamily="34" charset="-122"/>
-                <a:cs typeface="Calibri" pitchFamily="34" charset="-120"/>
+              <a:rPr lang="en-US" sz="800" dirty="0">
+                <a:solidFill>
+                  <a:srgbClr val="FFFFFF"/>
+                </a:solidFill>
+                <a:latin typeface="Calibri"/>
+                <a:ea typeface="Calibri"/>
+                <a:cs typeface="Calibri"/>
               </a:rPr>
               <a:t>Demographic distributions</a:t>
             </a:r>
-            <a:endParaRPr lang="en-US" sz="1100" dirty="0"/>
           </a:p>
           <a:p>
             <a:pPr marL="127000" indent="-127000">
+              <a:spcAft>
+                <a:spcPts val="100"/>
+              </a:spcAft>
+              <a:buSzPct val="100000"/>
+              <a:buChar char="•"/>
+            </a:pPr>
+            <a:r>
+              <a:rPr lang="en-US" sz="800" dirty="0">
+                <a:solidFill>
+                  <a:srgbClr val="FFFFFF"/>
+                </a:solidFill>
+                <a:latin typeface="Calibri"/>
+                <a:ea typeface="Calibri"/>
+                <a:cs typeface="Calibri"/>
+              </a:rPr>
+              <a:t>Age-group analysis</a:t>
+            </a:r>
+          </a:p>
+          <a:p>
+            <a:pPr marL="127000" indent="-127000">
+              <a:spcAft>
+                <a:spcPts val="100"/>
+              </a:spcAft>
+              <a:buSzPct val="100000"/>
+              <a:buChar char="•"/>
+            </a:pPr>
+            <a:r>
+              <a:rPr lang="en-US" sz="800" dirty="0">
+                <a:solidFill>
+                  <a:srgbClr val="FFFFFF"/>
+                </a:solidFill>
+                <a:latin typeface="Calibri"/>
+                <a:ea typeface="Calibri"/>
+                <a:cs typeface="Calibri"/>
+              </a:rPr>
+              <a:t>Division-level comparisons</a:t>
+            </a:r>
+          </a:p>
+        </p:txBody>
+      </p:sp>
+      <p:sp>
+        <p:nvSpPr>
+          <p:cNvPr id="1041" name="Shape 1041"/>
+          <p:cNvSpPr/>
+          <p:nvPr/>
+        </p:nvSpPr>
+        <p:spPr>
+          <a:xfrm>
+            <a:off x="457200" y="3831336"/>
+            <a:ext cx="2331720" cy="731520"/>
+          </a:xfrm>
+          <a:prstGeom prst="roundRect">
+            <a:avLst>
+              <a:gd name="adj" fmla="val 5000"/>
+            </a:avLst>
+          </a:prstGeom>
+          <a:solidFill>
+            <a:srgbClr val="12213F"/>
+          </a:solidFill>
+          <a:ln w="9525">
+            <a:solidFill>
+              <a:srgbClr val="1E3A6B"/>
+            </a:solidFill>
+            <a:prstDash val="solid"/>
+          </a:ln>
+        </p:spPr>
+        <p:txBody>
+          <a:bodyPr/>
+          <a:lstStyle/>
+          <a:p>
+            <a:endParaRPr lang="en-US"/>
+          </a:p>
+        </p:txBody>
+      </p:sp>
+      <p:sp>
+        <p:nvSpPr>
+          <p:cNvPr id="1042" name="Shape 1042"/>
+          <p:cNvSpPr txBox="1"/>
+          <p:nvPr/>
+        </p:nvSpPr>
+        <p:spPr>
+          <a:xfrm>
+            <a:off x="548640" y="3895344"/>
+            <a:ext cx="2148840" cy="621792"/>
+          </a:xfrm>
+          <a:prstGeom prst="rect">
+            <a:avLst/>
+          </a:prstGeom>
+          <a:noFill/>
+          <a:ln/>
+        </p:spPr>
+        <p:txBody>
+          <a:bodyPr wrap="square" lIns="0" tIns="0" rIns="0" bIns="0" rtlCol="0" anchor="t"/>
+          <a:lstStyle/>
+          <a:p>
+            <a:pPr marL="0" indent="0">
               <a:spcAft>
                 <a:spcPts val="200"/>
               </a:spcAft>
-              <a:buSzPct val="100000"/>
-              <a:buChar char="•"/>
-            </a:pPr>
-            <a:r>
-              <a:rPr lang="en-US" sz="950" dirty="0">
-                <a:solidFill>
-                  <a:srgbClr val="FFFFFF"/>
-                </a:solidFill>
-                <a:latin typeface="Calibri" pitchFamily="34" charset="0"/>
-                <a:ea typeface="Calibri" pitchFamily="34" charset="-122"/>
-                <a:cs typeface="Calibri" pitchFamily="34" charset="-120"/>
-              </a:rPr>
-              <a:t>Age-group analysis</a:t>
-            </a:r>
-            <a:endParaRPr lang="en-US" sz="1100" dirty="0"/>
+              <a:buNone/>
+            </a:pPr>
+            <a:r>
+              <a:rPr lang="en-US" sz="950" b="1" dirty="0">
+                <a:solidFill>
+                  <a:srgbClr val="22D3EE"/>
+                </a:solidFill>
+                <a:latin typeface="Calibri"/>
+                <a:ea typeface="Calibri"/>
+                <a:cs typeface="Calibri"/>
+              </a:rPr>
+              <a:t>Case Metrics</a:t>
+            </a:r>
           </a:p>
           <a:p>
             <a:pPr marL="127000" indent="-127000">
               <a:spcAft>
-                <a:spcPts val="200"/>
+                <a:spcPts val="100"/>
               </a:spcAft>
               <a:buSzPct val="100000"/>
               <a:buChar char="•"/>
             </a:pPr>
             <a:r>
-              <a:rPr lang="en-US" sz="950" dirty="0">
-                <a:solidFill>
-                  <a:srgbClr val="FFFFFF"/>
-                </a:solidFill>
-                <a:latin typeface="Calibri" pitchFamily="34" charset="0"/>
-                <a:ea typeface="Calibri" pitchFamily="34" charset="-122"/>
-                <a:cs typeface="Calibri" pitchFamily="34" charset="-120"/>
-              </a:rPr>
-              <a:t>Division-level comparisons</a:t>
-            </a:r>
-            <a:endParaRPr lang="en-US" sz="1100" dirty="0"/>
-          </a:p>
-        </p:txBody>
-      </p:sp>
-      <p:sp>
-        <p:nvSpPr>
-          <p:cNvPr id="11" name="Shape 9"/>
+              <a:rPr lang="en-US" sz="800" dirty="0">
+                <a:solidFill>
+                  <a:srgbClr val="FFFFFF"/>
+                </a:solidFill>
+                <a:latin typeface="Calibri"/>
+                <a:ea typeface="Calibri"/>
+                <a:cs typeface="Calibri"/>
+              </a:rPr>
+              <a:t>Pending • completed court cases</a:t>
+            </a:r>
+          </a:p>
+          <a:p>
+            <a:pPr marL="127000" indent="-127000">
+              <a:spcAft>
+                <a:spcPts val="100"/>
+              </a:spcAft>
+              <a:buSzPct val="100000"/>
+              <a:buChar char="•"/>
+            </a:pPr>
+            <a:r>
+              <a:rPr lang="en-US" sz="800" dirty="0">
+                <a:solidFill>
+                  <a:srgbClr val="FFFFFF"/>
+                </a:solidFill>
+                <a:latin typeface="Calibri"/>
+                <a:ea typeface="Calibri"/>
+                <a:cs typeface="Calibri"/>
+              </a:rPr>
+              <a:t>Litigation • arrest-to-filing duration</a:t>
+            </a:r>
+          </a:p>
+          <a:p>
+            <a:pPr marL="127000" indent="-127000">
+              <a:spcAft>
+                <a:spcPts val="100"/>
+              </a:spcAft>
+              <a:buSzPct val="100000"/>
+              <a:buChar char="•"/>
+            </a:pPr>
+            <a:r>
+              <a:rPr lang="en-US" sz="800" dirty="0">
+                <a:solidFill>
+                  <a:srgbClr val="FFFFFF"/>
+                </a:solidFill>
+                <a:latin typeface="Calibri"/>
+                <a:ea typeface="Calibri"/>
+                <a:cs typeface="Calibri"/>
+              </a:rPr>
+              <a:t>Case aging</a:t>
+            </a:r>
+          </a:p>
+        </p:txBody>
+      </p:sp>
+      <p:sp>
+        <p:nvSpPr>
+          <p:cNvPr id="1043" name="Shape 1043"/>
           <p:cNvSpPr/>
           <p:nvPr/>
         </p:nvSpPr>
         <p:spPr>
           <a:xfrm>
-            <a:off x="3200400" y="1005840"/>
-            <a:ext cx="3108960" cy="2331720"/>
+            <a:off x="2971800" y="1417320"/>
+            <a:ext cx="3017520" cy="1481328"/>
           </a:xfrm>
           <a:prstGeom prst="roundRect">
             <a:avLst>
@@ -10509,14 +8960,14 @@
       </p:sp>
       <p:sp>
         <p:nvSpPr>
-          <p:cNvPr id="12" name="Text 10"/>
+          <p:cNvPr id="1044" name="Shape 1044"/>
           <p:cNvSpPr txBox="1"/>
           <p:nvPr/>
         </p:nvSpPr>
         <p:spPr>
           <a:xfrm>
-            <a:off x="3291840" y="1051560"/>
-            <a:ext cx="2926080" cy="2240280"/>
+            <a:off x="3081528" y="1481328"/>
+            <a:ext cx="2798064" cy="1371600"/>
           </a:xfrm>
           <a:prstGeom prst="rect">
             <a:avLst/>
@@ -10532,200 +8983,503 @@
               <a:buNone/>
             </a:pPr>
             <a:r>
-              <a:rPr lang="en-US" sz="850" dirty="0">
+              <a:rPr lang="en-US" sz="750" dirty="0">
                 <a:solidFill>
                   <a:srgbClr val="9FE8FF"/>
                 </a:solidFill>
-                <a:latin typeface="Consolas" pitchFamily="34" charset="0"/>
-                <a:ea typeface="Consolas" pitchFamily="34" charset="-122"/>
-                <a:cs typeface="Consolas" pitchFamily="34" charset="-120"/>
+                <a:latin typeface="Consolas"/>
+                <a:ea typeface="Consolas"/>
+                <a:cs typeface="Consolas"/>
               </a:rPr>
               <a:t>SELECT</a:t>
             </a:r>
-            <a:endParaRPr lang="en-US" sz="850" dirty="0"/>
           </a:p>
           <a:p>
             <a:pPr marL="0" indent="0">
               <a:buNone/>
             </a:pPr>
             <a:r>
-              <a:rPr lang="en-US" sz="850" dirty="0">
+              <a:rPr lang="en-US" sz="750" dirty="0">
                 <a:solidFill>
                   <a:srgbClr val="9FE8FF"/>
                 </a:solidFill>
-                <a:latin typeface="Consolas" pitchFamily="34" charset="0"/>
-                <a:ea typeface="Consolas" pitchFamily="34" charset="-122"/>
-                <a:cs typeface="Consolas" pitchFamily="34" charset="-120"/>
+                <a:latin typeface="Consolas"/>
+                <a:ea typeface="Consolas"/>
+                <a:cs typeface="Consolas"/>
               </a:rPr>
               <a:t>    ps.AREA_NAME,</a:t>
             </a:r>
-            <a:endParaRPr lang="en-US" sz="850" dirty="0"/>
           </a:p>
           <a:p>
             <a:pPr marL="0" indent="0">
               <a:buNone/>
             </a:pPr>
             <a:r>
-              <a:rPr lang="en-US" sz="850" dirty="0">
+              <a:rPr lang="en-US" sz="750" dirty="0">
                 <a:solidFill>
                   <a:srgbClr val="9FE8FF"/>
                 </a:solidFill>
-                <a:latin typeface="Consolas" pitchFamily="34" charset="0"/>
-                <a:ea typeface="Consolas" pitchFamily="34" charset="-122"/>
-                <a:cs typeface="Consolas" pitchFamily="34" charset="-120"/>
+                <a:latin typeface="Consolas"/>
+                <a:ea typeface="Consolas"/>
+                <a:cs typeface="Consolas"/>
               </a:rPr>
               <a:t>    COUNT(f.DR_NO) AS Total_FIRs,</a:t>
             </a:r>
-            <a:endParaRPr lang="en-US" sz="850" dirty="0"/>
           </a:p>
           <a:p>
             <a:pPr marL="0" indent="0">
               <a:buNone/>
             </a:pPr>
             <a:r>
-              <a:rPr lang="en-US" sz="850" dirty="0">
+              <a:rPr lang="en-US" sz="750" dirty="0">
                 <a:solidFill>
                   <a:srgbClr val="9FE8FF"/>
                 </a:solidFill>
-                <a:latin typeface="Consolas" pitchFamily="34" charset="0"/>
-                <a:ea typeface="Consolas" pitchFamily="34" charset="-122"/>
-                <a:cs typeface="Consolas" pitchFamily="34" charset="-120"/>
+                <a:latin typeface="Consolas"/>
+                <a:ea typeface="Consolas"/>
+                <a:cs typeface="Consolas"/>
               </a:rPr>
               <a:t>    SUM(CASE</a:t>
             </a:r>
-            <a:endParaRPr lang="en-US" sz="850" dirty="0"/>
           </a:p>
           <a:p>
             <a:pPr marL="0" indent="0">
               <a:buNone/>
             </a:pPr>
             <a:r>
-              <a:rPr lang="en-US" sz="850" dirty="0">
+              <a:rPr lang="en-US" sz="750" dirty="0">
                 <a:solidFill>
                   <a:srgbClr val="9FE8FF"/>
                 </a:solidFill>
-                <a:latin typeface="Consolas" pitchFamily="34" charset="0"/>
-                <a:ea typeface="Consolas" pitchFamily="34" charset="-122"/>
-                <a:cs typeface="Consolas" pitchFamily="34" charset="-120"/>
+                <a:latin typeface="Consolas"/>
+                <a:ea typeface="Consolas"/>
+                <a:cs typeface="Consolas"/>
               </a:rPr>
               <a:t>        WHEN f.Status = 'AA' THEN 1</a:t>
             </a:r>
-            <a:endParaRPr lang="en-US" sz="850" dirty="0"/>
           </a:p>
           <a:p>
             <a:pPr marL="0" indent="0">
               <a:buNone/>
             </a:pPr>
             <a:r>
-              <a:rPr lang="en-US" sz="850" dirty="0">
+              <a:rPr lang="en-US" sz="750" dirty="0">
                 <a:solidFill>
                   <a:srgbClr val="9FE8FF"/>
                 </a:solidFill>
-                <a:latin typeface="Consolas" pitchFamily="34" charset="0"/>
-                <a:ea typeface="Consolas" pitchFamily="34" charset="-122"/>
-                <a:cs typeface="Consolas" pitchFamily="34" charset="-120"/>
+                <a:latin typeface="Consolas"/>
+                <a:ea typeface="Consolas"/>
+                <a:cs typeface="Consolas"/>
               </a:rPr>
               <a:t>        ELSE 0</a:t>
             </a:r>
-            <a:endParaRPr lang="en-US" sz="850" dirty="0"/>
           </a:p>
           <a:p>
             <a:pPr marL="0" indent="0">
               <a:buNone/>
             </a:pPr>
             <a:r>
-              <a:rPr lang="en-US" sz="850" dirty="0">
+              <a:rPr lang="en-US" sz="750" dirty="0">
                 <a:solidFill>
                   <a:srgbClr val="9FE8FF"/>
                 </a:solidFill>
-                <a:latin typeface="Consolas" pitchFamily="34" charset="0"/>
-                <a:ea typeface="Consolas" pitchFamily="34" charset="-122"/>
-                <a:cs typeface="Consolas" pitchFamily="34" charset="-120"/>
+                <a:latin typeface="Consolas"/>
+                <a:ea typeface="Consolas"/>
+                <a:cs typeface="Consolas"/>
               </a:rPr>
               <a:t>    END) AS Cleared_Cases</a:t>
             </a:r>
-            <a:endParaRPr lang="en-US" sz="850" dirty="0"/>
           </a:p>
           <a:p>
             <a:pPr marL="0" indent="0">
               <a:buNone/>
             </a:pPr>
             <a:r>
-              <a:rPr lang="en-US" sz="850" dirty="0">
+              <a:rPr lang="en-US" sz="750" dirty="0">
                 <a:solidFill>
                   <a:srgbClr val="9FE8FF"/>
                 </a:solidFill>
-                <a:latin typeface="Consolas" pitchFamily="34" charset="0"/>
-                <a:ea typeface="Consolas" pitchFamily="34" charset="-122"/>
-                <a:cs typeface="Consolas" pitchFamily="34" charset="-120"/>
+                <a:latin typeface="Consolas"/>
+                <a:ea typeface="Consolas"/>
+                <a:cs typeface="Consolas"/>
               </a:rPr>
               <a:t>FROM FIR f</a:t>
             </a:r>
-            <a:endParaRPr lang="en-US" sz="850" dirty="0"/>
           </a:p>
           <a:p>
             <a:pPr marL="0" indent="0">
               <a:buNone/>
             </a:pPr>
             <a:r>
-              <a:rPr lang="en-US" sz="850" dirty="0">
+              <a:rPr lang="en-US" sz="750" dirty="0">
                 <a:solidFill>
                   <a:srgbClr val="9FE8FF"/>
                 </a:solidFill>
-                <a:latin typeface="Consolas" pitchFamily="34" charset="0"/>
-                <a:ea typeface="Consolas" pitchFamily="34" charset="-122"/>
-                <a:cs typeface="Consolas" pitchFamily="34" charset="-120"/>
+                <a:latin typeface="Consolas"/>
+                <a:ea typeface="Consolas"/>
+                <a:cs typeface="Consolas"/>
               </a:rPr>
               <a:t>JOIN PoliceStation ps</a:t>
             </a:r>
-            <a:endParaRPr lang="en-US" sz="850" dirty="0"/>
           </a:p>
           <a:p>
             <a:pPr marL="0" indent="0">
               <a:buNone/>
             </a:pPr>
             <a:r>
-              <a:rPr lang="en-US" sz="850" dirty="0">
+              <a:rPr lang="en-US" sz="750" dirty="0">
                 <a:solidFill>
                   <a:srgbClr val="9FE8FF"/>
                 </a:solidFill>
-                <a:latin typeface="Consolas" pitchFamily="34" charset="0"/>
-                <a:ea typeface="Consolas" pitchFamily="34" charset="-122"/>
-                <a:cs typeface="Consolas" pitchFamily="34" charset="-120"/>
+                <a:latin typeface="Consolas"/>
+                <a:ea typeface="Consolas"/>
+                <a:cs typeface="Consolas"/>
               </a:rPr>
               <a:t>    ON f.AREA = ps.AREA</a:t>
             </a:r>
-            <a:endParaRPr lang="en-US" sz="850" dirty="0"/>
           </a:p>
           <a:p>
             <a:pPr marL="0" indent="0">
               <a:buNone/>
             </a:pPr>
             <a:r>
-              <a:rPr lang="en-US" sz="850" dirty="0">
+              <a:rPr lang="en-US" sz="750" dirty="0">
                 <a:solidFill>
                   <a:srgbClr val="9FE8FF"/>
                 </a:solidFill>
-                <a:latin typeface="Consolas" pitchFamily="34" charset="0"/>
-                <a:ea typeface="Consolas" pitchFamily="34" charset="-122"/>
-                <a:cs typeface="Consolas" pitchFamily="34" charset="-120"/>
+                <a:latin typeface="Consolas"/>
+                <a:ea typeface="Consolas"/>
+                <a:cs typeface="Consolas"/>
               </a:rPr>
               <a:t>GROUP BY ps.AREA_NAME;</a:t>
             </a:r>
-            <a:endParaRPr lang="en-US" sz="850" dirty="0"/>
-          </a:p>
-        </p:txBody>
-      </p:sp>
-      <p:sp>
-        <p:nvSpPr>
-          <p:cNvPr id="13" name="Shape 11"/>
+          </a:p>
+        </p:txBody>
+      </p:sp>
+      <p:sp>
+        <p:nvSpPr>
+          <p:cNvPr id="1045" name="Shape 1045"/>
           <p:cNvSpPr/>
           <p:nvPr/>
         </p:nvSpPr>
         <p:spPr>
           <a:xfrm>
-            <a:off x="3200400" y="3474720"/>
-            <a:ext cx="3108960" cy="1097280"/>
+            <a:off x="2971800" y="2990088"/>
+            <a:ext cx="3017520" cy="1143000"/>
+          </a:xfrm>
+          <a:prstGeom prst="roundRect">
+            <a:avLst>
+              <a:gd name="adj" fmla="val 1961"/>
+            </a:avLst>
+          </a:prstGeom>
+          <a:solidFill>
+            <a:srgbClr val="050B18"/>
+          </a:solidFill>
+          <a:ln w="9525">
+            <a:solidFill>
+              <a:srgbClr val="22D3EE"/>
+            </a:solidFill>
+            <a:prstDash val="solid"/>
+          </a:ln>
+        </p:spPr>
+        <p:txBody>
+          <a:bodyPr/>
+          <a:lstStyle/>
+          <a:p>
+            <a:endParaRPr lang="en-US"/>
+          </a:p>
+        </p:txBody>
+      </p:sp>
+      <p:sp>
+        <p:nvSpPr>
+          <p:cNvPr id="1046" name="Shape 1046"/>
+          <p:cNvSpPr txBox="1"/>
+          <p:nvPr/>
+        </p:nvSpPr>
+        <p:spPr>
+          <a:xfrm>
+            <a:off x="3081528" y="3054096"/>
+            <a:ext cx="2798064" cy="1033272"/>
+          </a:xfrm>
+          <a:prstGeom prst="rect">
+            <a:avLst/>
+          </a:prstGeom>
+          <a:noFill/>
+          <a:ln/>
+        </p:spPr>
+        <p:txBody>
+          <a:bodyPr wrap="square" lIns="0" tIns="0" rIns="0" bIns="0" rtlCol="0" anchor="t"/>
+          <a:lstStyle/>
+          <a:p>
+            <a:pPr marL="0" indent="0">
+              <a:buNone/>
+            </a:pPr>
+            <a:r>
+              <a:rPr lang="en-US" sz="750" dirty="0">
+                <a:solidFill>
+                  <a:srgbClr val="9FE8FF"/>
+                </a:solidFill>
+                <a:latin typeface="Consolas"/>
+                <a:ea typeface="Consolas"/>
+                <a:cs typeface="Consolas"/>
+              </a:rPr>
+              <a:t>SELECT</a:t>
+            </a:r>
+          </a:p>
+          <a:p>
+            <a:pPr marL="0" indent="0">
+              <a:buNone/>
+            </a:pPr>
+            <a:r>
+              <a:rPr lang="en-US" sz="750" dirty="0">
+                <a:solidFill>
+                  <a:srgbClr val="9FE8FF"/>
+                </a:solidFill>
+                <a:latin typeface="Consolas"/>
+                <a:ea typeface="Consolas"/>
+                <a:cs typeface="Consolas"/>
+              </a:rPr>
+              <a:t>    CaseID,</a:t>
+            </a:r>
+          </a:p>
+          <a:p>
+            <a:pPr marL="0" indent="0">
+              <a:buNone/>
+            </a:pPr>
+            <a:r>
+              <a:rPr lang="en-US" sz="750" dirty="0">
+                <a:solidFill>
+                  <a:srgbClr val="9FE8FF"/>
+                </a:solidFill>
+                <a:latin typeface="Consolas"/>
+                <a:ea typeface="Consolas"/>
+                <a:cs typeface="Consolas"/>
+              </a:rPr>
+              <a:t>    FilingDate,</a:t>
+            </a:r>
+          </a:p>
+          <a:p>
+            <a:pPr marL="0" indent="0">
+              <a:buNone/>
+            </a:pPr>
+            <a:r>
+              <a:rPr lang="en-US" sz="750" dirty="0">
+                <a:solidFill>
+                  <a:srgbClr val="9FE8FF"/>
+                </a:solidFill>
+                <a:latin typeface="Consolas"/>
+                <a:ea typeface="Consolas"/>
+                <a:cs typeface="Consolas"/>
+              </a:rPr>
+              <a:t>    VerdictDate,</a:t>
+            </a:r>
+          </a:p>
+          <a:p>
+            <a:pPr marL="0" indent="0">
+              <a:buNone/>
+            </a:pPr>
+            <a:r>
+              <a:rPr lang="en-US" sz="750" dirty="0">
+                <a:solidFill>
+                  <a:srgbClr val="9FE8FF"/>
+                </a:solidFill>
+                <a:latin typeface="Consolas"/>
+                <a:ea typeface="Consolas"/>
+                <a:cs typeface="Consolas"/>
+              </a:rPr>
+              <a:t>    DATEDIFF(</a:t>
+            </a:r>
+          </a:p>
+          <a:p>
+            <a:pPr marL="0" indent="0">
+              <a:buNone/>
+            </a:pPr>
+            <a:r>
+              <a:rPr lang="en-US" sz="750" dirty="0">
+                <a:solidFill>
+                  <a:srgbClr val="9FE8FF"/>
+                </a:solidFill>
+                <a:latin typeface="Consolas"/>
+                <a:ea typeface="Consolas"/>
+                <a:cs typeface="Consolas"/>
+              </a:rPr>
+              <a:t>        COALESCE(VerdictDate, CURDATE()),</a:t>
+            </a:r>
+          </a:p>
+          <a:p>
+            <a:pPr marL="0" indent="0">
+              <a:buNone/>
+            </a:pPr>
+            <a:r>
+              <a:rPr lang="en-US" sz="750" dirty="0">
+                <a:solidFill>
+                  <a:srgbClr val="9FE8FF"/>
+                </a:solidFill>
+                <a:latin typeface="Consolas"/>
+                <a:ea typeface="Consolas"/>
+                <a:cs typeface="Consolas"/>
+              </a:rPr>
+              <a:t>        FilingDate</a:t>
+            </a:r>
+          </a:p>
+          <a:p>
+            <a:pPr marL="0" indent="0">
+              <a:buNone/>
+            </a:pPr>
+            <a:r>
+              <a:rPr lang="en-US" sz="750" dirty="0">
+                <a:solidFill>
+                  <a:srgbClr val="9FE8FF"/>
+                </a:solidFill>
+                <a:latin typeface="Consolas"/>
+                <a:ea typeface="Consolas"/>
+                <a:cs typeface="Consolas"/>
+              </a:rPr>
+              <a:t>    ) AS Litigation_Days</a:t>
+            </a:r>
+          </a:p>
+          <a:p>
+            <a:pPr marL="0" indent="0">
+              <a:buNone/>
+            </a:pPr>
+            <a:r>
+              <a:rPr lang="en-US" sz="750" dirty="0">
+                <a:solidFill>
+                  <a:srgbClr val="9FE8FF"/>
+                </a:solidFill>
+                <a:latin typeface="Consolas"/>
+                <a:ea typeface="Consolas"/>
+                <a:cs typeface="Consolas"/>
+              </a:rPr>
+              <a:t>FROM CourtCase;</a:t>
+            </a:r>
+          </a:p>
+        </p:txBody>
+      </p:sp>
+      <p:sp>
+        <p:nvSpPr>
+          <p:cNvPr id="1047" name="Shape 1047"/>
+          <p:cNvSpPr txBox="1"/>
+          <p:nvPr/>
+        </p:nvSpPr>
+        <p:spPr>
+          <a:xfrm>
+            <a:off x="2971800" y="4187952"/>
+            <a:ext cx="3017520" cy="365760"/>
+          </a:xfrm>
+          <a:prstGeom prst="rect">
+            <a:avLst/>
+          </a:prstGeom>
+          <a:noFill/>
+          <a:ln/>
+        </p:spPr>
+        <p:txBody>
+          <a:bodyPr wrap="square" lIns="0" tIns="0" rIns="0" bIns="0" rtlCol="0" anchor="t"/>
+          <a:lstStyle/>
+          <a:p>
+            <a:pPr marL="0" indent="0">
+              <a:buNone/>
+            </a:pPr>
+            <a:r>
+              <a:rPr lang="en-US" sz="800" b="1" dirty="0">
+                <a:solidFill>
+                  <a:srgbClr val="22D3EE"/>
+                </a:solidFill>
+                <a:latin typeface="Calibri"/>
+                <a:ea typeface="Calibri"/>
+                <a:cs typeface="Calibri"/>
+              </a:rPr>
+              <a:t>Completed case: </a:t>
+            </a:r>
+            <a:r>
+              <a:rPr lang="en-US" sz="800" dirty="0">
+                <a:solidFill>
+                  <a:srgbClr val="FFFFFF"/>
+                </a:solidFill>
+                <a:latin typeface="Calibri"/>
+                <a:ea typeface="Calibri"/>
+                <a:cs typeface="Calibri"/>
+              </a:rPr>
+              <a:t>Filing date → Hearings → Verdict</a:t>
+            </a:r>
+          </a:p>
+          <a:p>
+            <a:pPr marL="0" indent="0">
+              <a:buNone/>
+            </a:pPr>
+            <a:r>
+              <a:rPr lang="en-US" sz="800" b="1" dirty="0">
+                <a:solidFill>
+                  <a:srgbClr val="22D3EE"/>
+                </a:solidFill>
+                <a:latin typeface="Calibri"/>
+                <a:ea typeface="Calibri"/>
+                <a:cs typeface="Calibri"/>
+              </a:rPr>
+              <a:t>Pending case: </a:t>
+            </a:r>
+            <a:r>
+              <a:rPr lang="en-US" sz="800" dirty="0">
+                <a:solidFill>
+                  <a:srgbClr val="FFFFFF"/>
+                </a:solidFill>
+                <a:latin typeface="Calibri"/>
+                <a:ea typeface="Calibri"/>
+                <a:cs typeface="Calibri"/>
+              </a:rPr>
+              <a:t>Filing date → Current date</a:t>
+            </a:r>
+          </a:p>
+        </p:txBody>
+      </p:sp>
+      <p:sp>
+        <p:nvSpPr>
+          <p:cNvPr id="1048" name="Shape 1048"/>
+          <p:cNvSpPr txBox="1"/>
+          <p:nvPr/>
+        </p:nvSpPr>
+        <p:spPr>
+          <a:xfrm>
+            <a:off x="6172200" y="1417320"/>
+            <a:ext cx="2514600" cy="182880"/>
+          </a:xfrm>
+          <a:prstGeom prst="rect">
+            <a:avLst/>
+          </a:prstGeom>
+          <a:noFill/>
+          <a:ln/>
+        </p:spPr>
+        <p:txBody>
+          <a:bodyPr wrap="square" lIns="0" tIns="0" rIns="0" bIns="0" rtlCol="0" anchor="ctr"/>
+          <a:lstStyle/>
+          <a:p>
+            <a:pPr marL="0" indent="0">
+              <a:buNone/>
+            </a:pPr>
+            <a:r>
+              <a:rPr lang="en-US" sz="800" b="1" dirty="0">
+                <a:solidFill>
+                  <a:srgbClr val="22D3EE"/>
+                </a:solidFill>
+                <a:latin typeface="Calibri"/>
+                <a:ea typeface="Calibri"/>
+                <a:cs typeface="Calibri"/>
+              </a:rPr>
+              <a:t>DASHBOARD KPIs (conceptual – no results shown)</a:t>
+            </a:r>
+          </a:p>
+        </p:txBody>
+      </p:sp>
+      <p:sp>
+        <p:nvSpPr>
+          <p:cNvPr id="1049" name="Shape 1049"/>
+          <p:cNvSpPr/>
+          <p:nvPr/>
+        </p:nvSpPr>
+        <p:spPr>
+          <a:xfrm>
+            <a:off x="6172200" y="1645920"/>
+            <a:ext cx="1188720" cy="548640"/>
           </a:xfrm>
           <a:prstGeom prst="roundRect">
             <a:avLst>
@@ -10752,14 +9506,14 @@
       </p:sp>
       <p:sp>
         <p:nvSpPr>
-          <p:cNvPr id="14" name="Text 12"/>
+          <p:cNvPr id="1050" name="Shape 1050"/>
           <p:cNvSpPr txBox="1"/>
           <p:nvPr/>
         </p:nvSpPr>
         <p:spPr>
           <a:xfrm>
-            <a:off x="3310128" y="3538728"/>
-            <a:ext cx="2889504" cy="969264"/>
+            <a:off x="6245352" y="1709928"/>
+            <a:ext cx="1042416" cy="438912"/>
           </a:xfrm>
           <a:prstGeom prst="rect">
             <a:avLst/>
@@ -10772,142 +9526,52 @@
           <a:lstStyle/>
           <a:p>
             <a:pPr marL="0" indent="0">
-              <a:spcAft>
-                <a:spcPts val="300"/>
-              </a:spcAft>
-              <a:buNone/>
-            </a:pPr>
-            <a:r>
-              <a:rPr lang="en-US" sz="1100" b="1" dirty="0">
+              <a:buNone/>
+            </a:pPr>
+            <a:r>
+              <a:rPr lang="en-US" sz="900" b="1" dirty="0">
                 <a:solidFill>
                   <a:srgbClr val="22D3EE"/>
                 </a:solidFill>
-                <a:latin typeface="Calibri" pitchFamily="34" charset="0"/>
-                <a:ea typeface="Calibri" pitchFamily="34" charset="-122"/>
-                <a:cs typeface="Calibri" pitchFamily="34" charset="-120"/>
-              </a:rPr>
-              <a:t>Concepts</a:t>
-            </a:r>
-            <a:endParaRPr lang="en-US" sz="1100" dirty="0"/>
-          </a:p>
-          <a:p>
-            <a:pPr marL="127000" indent="-127000">
-              <a:spcAft>
-                <a:spcPts val="200"/>
-              </a:spcAft>
-              <a:buSzPct val="100000"/>
-              <a:buChar char="•"/>
-            </a:pPr>
-            <a:r>
-              <a:rPr lang="en-US" sz="900" dirty="0">
-                <a:solidFill>
-                  <a:srgbClr val="FFFFFF"/>
-                </a:solidFill>
-                <a:latin typeface="Calibri" pitchFamily="34" charset="0"/>
-                <a:ea typeface="Calibri" pitchFamily="34" charset="-122"/>
-                <a:cs typeface="Calibri" pitchFamily="34" charset="-120"/>
-              </a:rPr>
-              <a:t>JOIN • GROUP BY • COUNT</a:t>
-            </a:r>
-            <a:endParaRPr lang="en-US" sz="1100" dirty="0"/>
-          </a:p>
-          <a:p>
-            <a:pPr marL="127000" indent="-127000">
-              <a:spcAft>
-                <a:spcPts val="200"/>
-              </a:spcAft>
-              <a:buSzPct val="100000"/>
-              <a:buChar char="•"/>
-            </a:pPr>
-            <a:r>
-              <a:rPr lang="en-US" sz="900" dirty="0">
-                <a:solidFill>
-                  <a:srgbClr val="FFFFFF"/>
-                </a:solidFill>
-                <a:latin typeface="Calibri" pitchFamily="34" charset="0"/>
-                <a:ea typeface="Calibri" pitchFamily="34" charset="-122"/>
-                <a:cs typeface="Calibri" pitchFamily="34" charset="-120"/>
-              </a:rPr>
-              <a:t>Conditional aggregation (CASE)</a:t>
-            </a:r>
-            <a:endParaRPr lang="en-US" sz="1100" dirty="0"/>
-          </a:p>
-          <a:p>
-            <a:pPr marL="127000" indent="-127000">
-              <a:spcAft>
-                <a:spcPts val="200"/>
-              </a:spcAft>
-              <a:buSzPct val="100000"/>
-              <a:buChar char="•"/>
-            </a:pPr>
-            <a:r>
-              <a:rPr lang="en-US" sz="900" dirty="0">
-                <a:solidFill>
-                  <a:srgbClr val="FFFFFF"/>
-                </a:solidFill>
-                <a:latin typeface="Calibri" pitchFamily="34" charset="0"/>
-                <a:ea typeface="Calibri" pitchFamily="34" charset="-122"/>
-                <a:cs typeface="Calibri" pitchFamily="34" charset="-120"/>
-              </a:rPr>
-              <a:t>KPI generation</a:t>
-            </a:r>
-            <a:endParaRPr lang="en-US" sz="1100" dirty="0"/>
-          </a:p>
-        </p:txBody>
-      </p:sp>
-      <p:sp>
-        <p:nvSpPr>
-          <p:cNvPr id="15" name="Text 13"/>
-          <p:cNvSpPr txBox="1"/>
-          <p:nvPr/>
-        </p:nvSpPr>
-        <p:spPr>
-          <a:xfrm>
-            <a:off x="6492240" y="1005840"/>
-            <a:ext cx="2194560" cy="228600"/>
-          </a:xfrm>
-          <a:prstGeom prst="rect">
-            <a:avLst/>
-          </a:prstGeom>
-          <a:noFill/>
-          <a:ln/>
-        </p:spPr>
-        <p:txBody>
-          <a:bodyPr wrap="square" lIns="0" tIns="0" rIns="0" bIns="0" rtlCol="0" anchor="ctr"/>
-          <a:lstStyle/>
+                <a:latin typeface="Calibri"/>
+                <a:ea typeface="Calibri"/>
+                <a:cs typeface="Calibri"/>
+              </a:rPr>
+              <a:t>Total FIRs</a:t>
+            </a:r>
+          </a:p>
           <a:p>
             <a:pPr marL="0" indent="0">
               <a:buNone/>
             </a:pPr>
             <a:r>
-              <a:rPr lang="en-US" sz="850" b="1" dirty="0">
-                <a:solidFill>
-                  <a:srgbClr val="22D3EE"/>
-                </a:solidFill>
-                <a:latin typeface="Calibri" pitchFamily="34" charset="0"/>
-                <a:ea typeface="Calibri" pitchFamily="34" charset="-122"/>
-                <a:cs typeface="Calibri" pitchFamily="34" charset="-120"/>
-              </a:rPr>
-              <a:t>DASHBOARD (conceptual – no results shown)</a:t>
-            </a:r>
-            <a:endParaRPr lang="en-US" sz="850" dirty="0"/>
-          </a:p>
-        </p:txBody>
-      </p:sp>
-      <p:sp>
-        <p:nvSpPr>
-          <p:cNvPr id="16" name="Shape 14"/>
+              <a:rPr lang="en-US" sz="750" dirty="0">
+                <a:solidFill>
+                  <a:srgbClr val="FFFFFF"/>
+                </a:solidFill>
+                <a:latin typeface="Calibri"/>
+                <a:ea typeface="Calibri"/>
+                <a:cs typeface="Calibri"/>
+              </a:rPr>
+              <a:t>COUNT(f.DR_NO)</a:t>
+            </a:r>
+          </a:p>
+        </p:txBody>
+      </p:sp>
+      <p:sp>
+        <p:nvSpPr>
+          <p:cNvPr id="1051" name="Shape 1051"/>
           <p:cNvSpPr/>
           <p:nvPr/>
         </p:nvSpPr>
         <p:spPr>
           <a:xfrm>
-            <a:off x="6492240" y="1280160"/>
-            <a:ext cx="1051560" cy="914400"/>
+            <a:off x="7498080" y="1645920"/>
+            <a:ext cx="1188720" cy="548640"/>
           </a:xfrm>
           <a:prstGeom prst="roundRect">
             <a:avLst>
-              <a:gd name="adj" fmla="val 6000"/>
+              <a:gd name="adj" fmla="val 5000"/>
             </a:avLst>
           </a:prstGeom>
           <a:solidFill>
@@ -10930,14 +9594,14 @@
       </p:sp>
       <p:sp>
         <p:nvSpPr>
-          <p:cNvPr id="17" name="Text 15"/>
+          <p:cNvPr id="1052" name="Shape 1052"/>
           <p:cNvSpPr txBox="1"/>
           <p:nvPr/>
         </p:nvSpPr>
         <p:spPr>
           <a:xfrm>
-            <a:off x="6601968" y="1344168"/>
-            <a:ext cx="832104" cy="786384"/>
+            <a:off x="7571232" y="1709928"/>
+            <a:ext cx="1042416" cy="438912"/>
           </a:xfrm>
           <a:prstGeom prst="rect">
             <a:avLst/>
@@ -10950,9 +9614,6 @@
           <a:lstStyle/>
           <a:p>
             <a:pPr marL="0" indent="0">
-              <a:spcAft>
-                <a:spcPts val="300"/>
-              </a:spcAft>
               <a:buNone/>
             </a:pPr>
             <a:r>
@@ -10960,50 +9621,45 @@
                 <a:solidFill>
                   <a:srgbClr val="22D3EE"/>
                 </a:solidFill>
-                <a:latin typeface="Calibri" pitchFamily="34" charset="0"/>
-                <a:ea typeface="Calibri" pitchFamily="34" charset="-122"/>
-                <a:cs typeface="Calibri" pitchFamily="34" charset="-120"/>
-              </a:rPr>
-              <a:t>Total FIRs</a:t>
-            </a:r>
-            <a:endParaRPr lang="en-US" sz="900" dirty="0"/>
+                <a:latin typeface="Calibri"/>
+                <a:ea typeface="Calibri"/>
+                <a:cs typeface="Calibri"/>
+              </a:rPr>
+              <a:t>Cleared Cases</a:t>
+            </a:r>
           </a:p>
           <a:p>
             <a:pPr marL="0" indent="0">
-              <a:spcAft>
-                <a:spcPts val="200"/>
-              </a:spcAft>
-              <a:buNone/>
-            </a:pPr>
-            <a:r>
-              <a:rPr lang="en-US" sz="850" dirty="0">
-                <a:solidFill>
-                  <a:srgbClr val="FFFFFF"/>
-                </a:solidFill>
-                <a:latin typeface="Calibri" pitchFamily="34" charset="0"/>
-                <a:ea typeface="Calibri" pitchFamily="34" charset="-122"/>
-                <a:cs typeface="Calibri" pitchFamily="34" charset="-120"/>
-              </a:rPr>
-              <a:t>COUNT(f.DR_NO)</a:t>
-            </a:r>
-            <a:endParaRPr lang="en-US" sz="900" dirty="0"/>
-          </a:p>
-        </p:txBody>
-      </p:sp>
-      <p:sp>
-        <p:nvSpPr>
-          <p:cNvPr id="18" name="Shape 16"/>
+              <a:buNone/>
+            </a:pPr>
+            <a:r>
+              <a:rPr lang="en-US" sz="750" dirty="0">
+                <a:solidFill>
+                  <a:srgbClr val="FFFFFF"/>
+                </a:solidFill>
+                <a:latin typeface="Calibri"/>
+                <a:ea typeface="Calibri"/>
+                <a:cs typeface="Calibri"/>
+              </a:rPr>
+              <a:t>SUM(CASE … )</a:t>
+            </a:r>
+          </a:p>
+        </p:txBody>
+      </p:sp>
+      <p:sp>
+        <p:nvSpPr>
+          <p:cNvPr id="1053" name="Shape 1053"/>
           <p:cNvSpPr/>
           <p:nvPr/>
         </p:nvSpPr>
         <p:spPr>
           <a:xfrm>
-            <a:off x="7635240" y="1280160"/>
-            <a:ext cx="1051560" cy="914400"/>
+            <a:off x="6172200" y="2258568"/>
+            <a:ext cx="1188720" cy="548640"/>
           </a:xfrm>
           <a:prstGeom prst="roundRect">
             <a:avLst>
-              <a:gd name="adj" fmla="val 6000"/>
+              <a:gd name="adj" fmla="val 5000"/>
             </a:avLst>
           </a:prstGeom>
           <a:solidFill>
@@ -11026,14 +9682,14 @@
       </p:sp>
       <p:sp>
         <p:nvSpPr>
-          <p:cNvPr id="19" name="Text 17"/>
+          <p:cNvPr id="1054" name="Shape 1054"/>
           <p:cNvSpPr txBox="1"/>
           <p:nvPr/>
         </p:nvSpPr>
         <p:spPr>
           <a:xfrm>
-            <a:off x="7744968" y="1344168"/>
-            <a:ext cx="832104" cy="786384"/>
+            <a:off x="6245352" y="2322576"/>
+            <a:ext cx="1042416" cy="438912"/>
           </a:xfrm>
           <a:prstGeom prst="rect">
             <a:avLst/>
@@ -11046,9 +9702,6 @@
           <a:lstStyle/>
           <a:p>
             <a:pPr marL="0" indent="0">
-              <a:spcAft>
-                <a:spcPts val="300"/>
-              </a:spcAft>
               <a:buNone/>
             </a:pPr>
             <a:r>
@@ -11056,50 +9709,45 @@
                 <a:solidFill>
                   <a:srgbClr val="22D3EE"/>
                 </a:solidFill>
-                <a:latin typeface="Calibri" pitchFamily="34" charset="0"/>
-                <a:ea typeface="Calibri" pitchFamily="34" charset="-122"/>
-                <a:cs typeface="Calibri" pitchFamily="34" charset="-120"/>
-              </a:rPr>
-              <a:t>Cleared Cases</a:t>
-            </a:r>
-            <a:endParaRPr lang="en-US" sz="900" dirty="0"/>
+                <a:latin typeface="Calibri"/>
+                <a:ea typeface="Calibri"/>
+                <a:cs typeface="Calibri"/>
+              </a:rPr>
+              <a:t>Active Cases</a:t>
+            </a:r>
           </a:p>
           <a:p>
             <a:pPr marL="0" indent="0">
-              <a:spcAft>
-                <a:spcPts val="200"/>
-              </a:spcAft>
-              <a:buNone/>
-            </a:pPr>
-            <a:r>
-              <a:rPr lang="en-US" sz="850" dirty="0">
-                <a:solidFill>
-                  <a:srgbClr val="FFFFFF"/>
-                </a:solidFill>
-                <a:latin typeface="Calibri" pitchFamily="34" charset="0"/>
-                <a:ea typeface="Calibri" pitchFamily="34" charset="-122"/>
-                <a:cs typeface="Calibri" pitchFamily="34" charset="-120"/>
-              </a:rPr>
-              <a:t>SUM(CASE … )</a:t>
-            </a:r>
-            <a:endParaRPr lang="en-US" sz="900" dirty="0"/>
-          </a:p>
-        </p:txBody>
-      </p:sp>
-      <p:sp>
-        <p:nvSpPr>
-          <p:cNvPr id="20" name="Shape 18"/>
+              <a:buNone/>
+            </a:pPr>
+            <a:r>
+              <a:rPr lang="en-US" sz="750" dirty="0">
+                <a:solidFill>
+                  <a:srgbClr val="FFFFFF"/>
+                </a:solidFill>
+                <a:latin typeface="Calibri"/>
+                <a:ea typeface="Calibri"/>
+                <a:cs typeface="Calibri"/>
+              </a:rPr>
+              <a:t>from Status</a:t>
+            </a:r>
+          </a:p>
+        </p:txBody>
+      </p:sp>
+      <p:sp>
+        <p:nvSpPr>
+          <p:cNvPr id="1055" name="Shape 1055"/>
           <p:cNvSpPr/>
           <p:nvPr/>
         </p:nvSpPr>
         <p:spPr>
           <a:xfrm>
-            <a:off x="6492240" y="2286000"/>
-            <a:ext cx="1051560" cy="914400"/>
+            <a:off x="7498080" y="2258568"/>
+            <a:ext cx="1188720" cy="548640"/>
           </a:xfrm>
           <a:prstGeom prst="roundRect">
             <a:avLst>
-              <a:gd name="adj" fmla="val 6000"/>
+              <a:gd name="adj" fmla="val 5000"/>
             </a:avLst>
           </a:prstGeom>
           <a:solidFill>
@@ -11122,14 +9770,14 @@
       </p:sp>
       <p:sp>
         <p:nvSpPr>
-          <p:cNvPr id="21" name="Text 19"/>
+          <p:cNvPr id="1056" name="Shape 1056"/>
           <p:cNvSpPr txBox="1"/>
           <p:nvPr/>
         </p:nvSpPr>
         <p:spPr>
           <a:xfrm>
-            <a:off x="6601968" y="2350008"/>
-            <a:ext cx="832104" cy="786384"/>
+            <a:off x="7571232" y="2322576"/>
+            <a:ext cx="1042416" cy="438912"/>
           </a:xfrm>
           <a:prstGeom prst="rect">
             <a:avLst/>
@@ -11142,9 +9790,6 @@
           <a:lstStyle/>
           <a:p>
             <a:pPr marL="0" indent="0">
-              <a:spcAft>
-                <a:spcPts val="300"/>
-              </a:spcAft>
               <a:buNone/>
             </a:pPr>
             <a:r>
@@ -11152,50 +9797,94 @@
                 <a:solidFill>
                   <a:srgbClr val="22D3EE"/>
                 </a:solidFill>
-                <a:latin typeface="Calibri" pitchFamily="34" charset="0"/>
-                <a:ea typeface="Calibri" pitchFamily="34" charset="-122"/>
-                <a:cs typeface="Calibri" pitchFamily="34" charset="-120"/>
-              </a:rPr>
-              <a:t>Active Cases</a:t>
-            </a:r>
-            <a:endParaRPr lang="en-US" sz="900" dirty="0"/>
+                <a:latin typeface="Calibri"/>
+                <a:ea typeface="Calibri"/>
+                <a:cs typeface="Calibri"/>
+              </a:rPr>
+              <a:t>Station-wise</a:t>
+            </a:r>
           </a:p>
           <a:p>
             <a:pPr marL="0" indent="0">
-              <a:spcAft>
-                <a:spcPts val="200"/>
-              </a:spcAft>
-              <a:buNone/>
-            </a:pPr>
-            <a:r>
-              <a:rPr lang="en-US" sz="850" dirty="0">
-                <a:solidFill>
-                  <a:srgbClr val="FFFFFF"/>
-                </a:solidFill>
-                <a:latin typeface="Calibri" pitchFamily="34" charset="0"/>
-                <a:ea typeface="Calibri" pitchFamily="34" charset="-122"/>
-                <a:cs typeface="Calibri" pitchFamily="34" charset="-120"/>
-              </a:rPr>
-              <a:t>from Status</a:t>
-            </a:r>
-            <a:endParaRPr lang="en-US" sz="900" dirty="0"/>
-          </a:p>
-        </p:txBody>
-      </p:sp>
-      <p:sp>
-        <p:nvSpPr>
-          <p:cNvPr id="22" name="Shape 20"/>
+              <a:buNone/>
+            </a:pPr>
+            <a:r>
+              <a:rPr lang="en-US" sz="750" dirty="0">
+                <a:solidFill>
+                  <a:srgbClr val="FFFFFF"/>
+                </a:solidFill>
+                <a:latin typeface="Calibri"/>
+                <a:ea typeface="Calibri"/>
+                <a:cs typeface="Calibri"/>
+              </a:rPr>
+              <a:t>GROUP BY AREA_NAME</a:t>
+            </a:r>
+          </a:p>
+        </p:txBody>
+      </p:sp>
+      <p:sp>
+        <p:nvSpPr>
+          <p:cNvPr id="1057" name="Shape 1057"/>
+          <p:cNvSpPr txBox="1"/>
+          <p:nvPr/>
+        </p:nvSpPr>
+        <p:spPr>
+          <a:xfrm>
+            <a:off x="6172200" y="2834640"/>
+            <a:ext cx="2514600" cy="384048"/>
+          </a:xfrm>
+          <a:prstGeom prst="rect">
+            <a:avLst/>
+          </a:prstGeom>
+          <a:noFill/>
+          <a:ln/>
+        </p:spPr>
+        <p:txBody>
+          <a:bodyPr wrap="square" lIns="0" tIns="0" rIns="0" bIns="0" rtlCol="0" anchor="t"/>
+          <a:lstStyle/>
+          <a:p>
+            <a:pPr marL="0" indent="0">
+              <a:buNone/>
+            </a:pPr>
+            <a:r>
+              <a:rPr lang="en-US" sz="800" b="1" dirty="0">
+                <a:solidFill>
+                  <a:srgbClr val="22D3EE"/>
+                </a:solidFill>
+                <a:latin typeface="Calibri"/>
+                <a:ea typeface="Calibri"/>
+                <a:cs typeface="Calibri"/>
+              </a:rPr>
+              <a:t>Query → KPI: </a:t>
+            </a:r>
+            <a:r>
+              <a:rPr lang="en-US" sz="800" i="1" dirty="0">
+                <a:solidFill>
+                  <a:srgbClr val="A8B8D8"/>
+                </a:solidFill>
+                <a:latin typeface="Calibri"/>
+                <a:ea typeface="Calibri"/>
+                <a:cs typeface="Calibri"/>
+              </a:rPr>
+              <a:t>aggregates from JOINed tables feed each tile. SQL for operational monitoring &amp; case-management analytics.</a:t>
+            </a:r>
+          </a:p>
+        </p:txBody>
+      </p:sp>
+      <p:sp>
+        <p:nvSpPr>
+          <p:cNvPr id="1058" name="Shape 1058"/>
           <p:cNvSpPr/>
           <p:nvPr/>
         </p:nvSpPr>
         <p:spPr>
           <a:xfrm>
-            <a:off x="7635240" y="2286000"/>
-            <a:ext cx="1051560" cy="914400"/>
+            <a:off x="6172200" y="3310128"/>
+            <a:ext cx="2514600" cy="1252728"/>
           </a:xfrm>
           <a:prstGeom prst="roundRect">
             <a:avLst>
-              <a:gd name="adj" fmla="val 6000"/>
+              <a:gd name="adj" fmla="val 5000"/>
             </a:avLst>
           </a:prstGeom>
           <a:solidFill>
@@ -11218,14 +9907,14 @@
       </p:sp>
       <p:sp>
         <p:nvSpPr>
-          <p:cNvPr id="23" name="Text 21"/>
+          <p:cNvPr id="1059" name="Shape 1059"/>
           <p:cNvSpPr txBox="1"/>
           <p:nvPr/>
         </p:nvSpPr>
         <p:spPr>
           <a:xfrm>
-            <a:off x="7744968" y="2350008"/>
-            <a:ext cx="832104" cy="786384"/>
+            <a:off x="6263640" y="3374136"/>
+            <a:ext cx="2331720" cy="1143000"/>
           </a:xfrm>
           <a:prstGeom prst="rect">
             <a:avLst/>
@@ -11236,26 +9925,6 @@
         <p:txBody>
           <a:bodyPr wrap="square" lIns="0" tIns="0" rIns="0" bIns="0" rtlCol="0" anchor="t"/>
           <a:lstStyle/>
-          <a:p>
-            <a:pPr marL="0" indent="0">
-              <a:spcAft>
-                <a:spcPts val="300"/>
-              </a:spcAft>
-              <a:buNone/>
-            </a:pPr>
-            <a:r>
-              <a:rPr lang="en-US" sz="900" b="1" dirty="0">
-                <a:solidFill>
-                  <a:srgbClr val="22D3EE"/>
-                </a:solidFill>
-                <a:latin typeface="Calibri" pitchFamily="34" charset="0"/>
-                <a:ea typeface="Calibri" pitchFamily="34" charset="-122"/>
-                <a:cs typeface="Calibri" pitchFamily="34" charset="-120"/>
-              </a:rPr>
-              <a:t>Station-wise</a:t>
-            </a:r>
-            <a:endParaRPr lang="en-US" sz="900" dirty="0"/>
-          </a:p>
           <a:p>
             <a:pPr marL="0" indent="0">
               <a:spcAft>
@@ -11264,1971 +9933,116 @@
               <a:buNone/>
             </a:pPr>
             <a:r>
-              <a:rPr lang="en-US" sz="800" dirty="0">
-                <a:solidFill>
-                  <a:srgbClr val="FFFFFF"/>
-                </a:solidFill>
-                <a:latin typeface="Calibri" pitchFamily="34" charset="0"/>
-                <a:ea typeface="Calibri" pitchFamily="34" charset="-122"/>
-                <a:cs typeface="Calibri" pitchFamily="34" charset="-120"/>
-              </a:rPr>
-              <a:t>GROUP BY AREA_NAME</a:t>
-            </a:r>
-            <a:endParaRPr lang="en-US" sz="900" dirty="0"/>
-          </a:p>
-        </p:txBody>
-      </p:sp>
-      <p:sp>
-        <p:nvSpPr>
-          <p:cNvPr id="24" name="Shape 22"/>
-          <p:cNvSpPr/>
-          <p:nvPr/>
-        </p:nvSpPr>
-        <p:spPr>
-          <a:xfrm>
-            <a:off x="6492240" y="3291840"/>
-            <a:ext cx="2194560" cy="1280160"/>
-          </a:xfrm>
-          <a:prstGeom prst="roundRect">
-            <a:avLst>
-              <a:gd name="adj" fmla="val 4286"/>
-            </a:avLst>
-          </a:prstGeom>
-          <a:solidFill>
-            <a:srgbClr val="12213F"/>
-          </a:solidFill>
-          <a:ln w="9525">
-            <a:solidFill>
-              <a:srgbClr val="1E3A6B"/>
-            </a:solidFill>
-            <a:prstDash val="solid"/>
-          </a:ln>
-        </p:spPr>
-        <p:txBody>
-          <a:bodyPr/>
-          <a:lstStyle/>
-          <a:p>
-            <a:endParaRPr lang="en-US"/>
-          </a:p>
-        </p:txBody>
-      </p:sp>
-      <p:sp>
-        <p:nvSpPr>
-          <p:cNvPr id="25" name="Text 23"/>
-          <p:cNvSpPr txBox="1"/>
-          <p:nvPr/>
-        </p:nvSpPr>
-        <p:spPr>
-          <a:xfrm>
-            <a:off x="6601968" y="3355848"/>
-            <a:ext cx="1975104" cy="1152144"/>
-          </a:xfrm>
-          <a:prstGeom prst="rect">
-            <a:avLst/>
-          </a:prstGeom>
-          <a:noFill/>
-          <a:ln/>
-        </p:spPr>
-        <p:txBody>
-          <a:bodyPr wrap="square" lIns="0" tIns="0" rIns="0" bIns="0" rtlCol="0" anchor="t"/>
-          <a:lstStyle/>
-          <a:p>
-            <a:pPr marL="0" indent="0">
-              <a:spcAft>
-                <a:spcPts val="300"/>
-              </a:spcAft>
-              <a:buNone/>
-            </a:pPr>
-            <a:r>
-              <a:rPr lang="en-US" sz="1100" b="1" dirty="0">
+              <a:rPr lang="en-US" sz="950" b="1" dirty="0">
                 <a:solidFill>
                   <a:srgbClr val="22D3EE"/>
                 </a:solidFill>
-                <a:latin typeface="Calibri" pitchFamily="34" charset="0"/>
-                <a:ea typeface="Calibri" pitchFamily="34" charset="-122"/>
-                <a:cs typeface="Calibri" pitchFamily="34" charset="-120"/>
-              </a:rPr>
-              <a:t>Query → KPI</a:t>
-            </a:r>
-            <a:endParaRPr lang="en-US" sz="1100" dirty="0"/>
-          </a:p>
-          <a:p>
-            <a:pPr marL="0" indent="0">
-              <a:spcAft>
-                <a:spcPts val="200"/>
-              </a:spcAft>
-              <a:buNone/>
-            </a:pPr>
-            <a:r>
-              <a:rPr lang="en-US" sz="900" dirty="0">
-                <a:solidFill>
-                  <a:srgbClr val="FFFFFF"/>
-                </a:solidFill>
-                <a:latin typeface="Calibri" pitchFamily="34" charset="0"/>
-                <a:ea typeface="Calibri" pitchFamily="34" charset="-122"/>
-                <a:cs typeface="Calibri" pitchFamily="34" charset="-120"/>
-              </a:rPr>
-              <a:t>Aggregates from JOINed tables feed each tile</a:t>
-            </a:r>
-            <a:endParaRPr lang="en-US" sz="1100" dirty="0"/>
-          </a:p>
-        </p:txBody>
-      </p:sp>
-    </p:spTree>
-  </p:cSld>
-  <p:clrMapOvr>
-    <a:masterClrMapping/>
-  </p:clrMapOvr>
-</p:sld>
-</file>
-
-<file path=ppt/slides/slide7.xml><?xml version="1.0" encoding="utf-8"?>
-<p:sld xmlns:a="http://schemas.openxmlformats.org/drawingml/2006/main" xmlns:r="http://schemas.openxmlformats.org/officeDocument/2006/relationships" xmlns:p="http://schemas.openxmlformats.org/presentationml/2006/main">
-  <p:cSld name="Slide 7">
-    <p:bg>
-      <p:bgPr>
-        <a:solidFill>
-          <a:srgbClr val="0A1428"/>
-        </a:solidFill>
-        <a:effectLst/>
-      </p:bgPr>
-    </p:bg>
-    <p:spTree>
-      <p:nvGrpSpPr>
-        <p:cNvPr id="1" name=""/>
-        <p:cNvGrpSpPr/>
-        <p:nvPr/>
-      </p:nvGrpSpPr>
-      <p:grpSpPr>
-        <a:xfrm>
-          <a:off x="0" y="0"/>
-          <a:ext cx="0" cy="0"/>
-          <a:chOff x="0" y="0"/>
-          <a:chExt cx="0" cy="0"/>
-        </a:xfrm>
-      </p:grpSpPr>
-      <p:sp>
-        <p:nvSpPr>
-          <p:cNvPr id="2" name="Text 0"/>
-          <p:cNvSpPr txBox="1"/>
-          <p:nvPr/>
-        </p:nvSpPr>
-        <p:spPr>
-          <a:xfrm>
-            <a:off x="457200" y="274320"/>
-            <a:ext cx="8229600" cy="548640"/>
-          </a:xfrm>
-          <a:prstGeom prst="rect">
-            <a:avLst/>
-          </a:prstGeom>
-          <a:noFill/>
-          <a:ln/>
-        </p:spPr>
-        <p:txBody>
-          <a:bodyPr wrap="square" lIns="0" tIns="0" rIns="0" bIns="0" rtlCol="0" anchor="ctr"/>
-          <a:lstStyle/>
-          <a:p>
-            <a:pPr marL="0" indent="0">
-              <a:buNone/>
-            </a:pPr>
-            <a:r>
-              <a:rPr lang="en-US" sz="2100" b="1" dirty="0">
-                <a:solidFill>
-                  <a:srgbClr val="22D3EE"/>
-                </a:solidFill>
-                <a:latin typeface="Calibri" pitchFamily="34" charset="0"/>
-                <a:ea typeface="Calibri" pitchFamily="34" charset="-122"/>
-                <a:cs typeface="Calibri" pitchFamily="34" charset="-120"/>
-              </a:rPr>
-              <a:t>07  </a:t>
-            </a:r>
-            <a:r>
-              <a:rPr lang="en-US" sz="2100" b="1" dirty="0">
-                <a:solidFill>
-                  <a:srgbClr val="FFFFFF"/>
-                </a:solidFill>
-                <a:latin typeface="Calibri" pitchFamily="34" charset="0"/>
-                <a:ea typeface="Calibri" pitchFamily="34" charset="-122"/>
-                <a:cs typeface="Calibri" pitchFamily="34" charset="-120"/>
-              </a:rPr>
-              <a:t>Judicial Case Lifecycle &amp; SQL-Based Case Aging</a:t>
-            </a:r>
-            <a:endParaRPr lang="en-US" sz="2100" dirty="0"/>
-          </a:p>
-        </p:txBody>
-      </p:sp>
-      <p:sp>
-        <p:nvSpPr>
-          <p:cNvPr id="3" name="Text 1"/>
-          <p:cNvSpPr txBox="1"/>
-          <p:nvPr/>
-        </p:nvSpPr>
-        <p:spPr>
-          <a:xfrm>
-            <a:off x="457200" y="4754880"/>
-            <a:ext cx="5486400" cy="228600"/>
-          </a:xfrm>
-          <a:prstGeom prst="rect">
-            <a:avLst/>
-          </a:prstGeom>
-          <a:noFill/>
-          <a:ln/>
-        </p:spPr>
-        <p:txBody>
-          <a:bodyPr wrap="square" lIns="0" tIns="0" rIns="0" bIns="0" rtlCol="0" anchor="ctr"/>
-          <a:lstStyle/>
-          <a:p>
-            <a:pPr marL="0" indent="0">
-              <a:buNone/>
-            </a:pPr>
-            <a:r>
-              <a:rPr lang="en-US" sz="800" dirty="0">
-                <a:solidFill>
-                  <a:srgbClr val="A8B8D8"/>
-                </a:solidFill>
-                <a:latin typeface="Calibri" pitchFamily="34" charset="0"/>
-                <a:ea typeface="Calibri" pitchFamily="34" charset="-122"/>
-                <a:cs typeface="Calibri" pitchFamily="34" charset="-120"/>
-              </a:rPr>
-              <a:t>Gaurav Singh | P15 | CRPSMS | MySQL 8.0</a:t>
-            </a:r>
-            <a:endParaRPr lang="en-US" sz="800" dirty="0"/>
-          </a:p>
-        </p:txBody>
-      </p:sp>
-      <p:sp>
-        <p:nvSpPr>
-          <p:cNvPr id="4" name="Text 2"/>
-          <p:cNvSpPr txBox="1"/>
-          <p:nvPr/>
-        </p:nvSpPr>
-        <p:spPr>
-          <a:xfrm>
-            <a:off x="7772400" y="4754880"/>
-            <a:ext cx="914400" cy="228600"/>
-          </a:xfrm>
-          <a:prstGeom prst="rect">
-            <a:avLst/>
-          </a:prstGeom>
-          <a:noFill/>
-          <a:ln/>
-        </p:spPr>
-        <p:txBody>
-          <a:bodyPr wrap="square" lIns="0" tIns="0" rIns="0" bIns="0" rtlCol="0" anchor="ctr"/>
-          <a:lstStyle/>
-          <a:p>
-            <a:pPr marL="0" indent="0" algn="r">
-              <a:buNone/>
-            </a:pPr>
-            <a:r>
-              <a:rPr lang="en-US" sz="800" dirty="0">
-                <a:solidFill>
-                  <a:srgbClr val="A8B8D8"/>
-                </a:solidFill>
-                <a:latin typeface="Calibri" pitchFamily="34" charset="0"/>
-                <a:ea typeface="Calibri" pitchFamily="34" charset="-122"/>
-                <a:cs typeface="Calibri" pitchFamily="34" charset="-120"/>
-              </a:rPr>
-              <a:t>7 / 10</a:t>
-            </a:r>
-            <a:endParaRPr lang="en-US" sz="800" dirty="0"/>
-          </a:p>
-        </p:txBody>
-      </p:sp>
-      <p:sp>
-        <p:nvSpPr>
-          <p:cNvPr id="5" name="Shape 3"/>
-          <p:cNvSpPr/>
-          <p:nvPr/>
-        </p:nvSpPr>
-        <p:spPr>
-          <a:xfrm>
-            <a:off x="457200" y="1005840"/>
-            <a:ext cx="1188720" cy="502920"/>
-          </a:xfrm>
-          <a:prstGeom prst="roundRect">
-            <a:avLst>
-              <a:gd name="adj" fmla="val 10909"/>
-            </a:avLst>
-          </a:prstGeom>
-          <a:solidFill>
-            <a:srgbClr val="12213F"/>
-          </a:solidFill>
-          <a:ln w="12700">
-            <a:solidFill>
-              <a:srgbClr val="22D3EE"/>
-            </a:solidFill>
-            <a:prstDash val="solid"/>
-          </a:ln>
-        </p:spPr>
-        <p:txBody>
-          <a:bodyPr/>
-          <a:lstStyle/>
-          <a:p>
-            <a:endParaRPr lang="en-US"/>
-          </a:p>
-        </p:txBody>
-      </p:sp>
-      <p:sp>
-        <p:nvSpPr>
-          <p:cNvPr id="6" name="Text 4"/>
-          <p:cNvSpPr txBox="1"/>
-          <p:nvPr/>
-        </p:nvSpPr>
-        <p:spPr>
-          <a:xfrm>
-            <a:off x="493776" y="1005840"/>
-            <a:ext cx="1115568" cy="502920"/>
-          </a:xfrm>
-          <a:prstGeom prst="rect">
-            <a:avLst/>
-          </a:prstGeom>
-          <a:noFill/>
-          <a:ln/>
-        </p:spPr>
-        <p:txBody>
-          <a:bodyPr wrap="square" lIns="0" tIns="0" rIns="0" bIns="0" rtlCol="0" anchor="ctr"/>
-          <a:lstStyle/>
-          <a:p>
-            <a:pPr marL="0" indent="0" algn="ctr">
-              <a:buNone/>
-            </a:pPr>
-            <a:r>
-              <a:rPr lang="en-US" sz="850" b="1" dirty="0">
-                <a:solidFill>
-                  <a:srgbClr val="FFFFFF"/>
-                </a:solidFill>
-                <a:latin typeface="Calibri" pitchFamily="34" charset="0"/>
-                <a:ea typeface="Calibri" pitchFamily="34" charset="-122"/>
-                <a:cs typeface="Calibri" pitchFamily="34" charset="-120"/>
-              </a:rPr>
-              <a:t>FIR</a:t>
-            </a:r>
-            <a:endParaRPr lang="en-US" sz="850" dirty="0"/>
-          </a:p>
-        </p:txBody>
-      </p:sp>
-      <p:sp>
-        <p:nvSpPr>
-          <p:cNvPr id="7" name="Shape 5"/>
-          <p:cNvSpPr/>
-          <p:nvPr/>
-        </p:nvSpPr>
-        <p:spPr>
-          <a:xfrm>
-            <a:off x="1645920" y="1257300"/>
-            <a:ext cx="219456" cy="0"/>
-          </a:xfrm>
-          <a:prstGeom prst="line">
-            <a:avLst/>
-          </a:prstGeom>
-          <a:noFill/>
-          <a:ln w="15875">
-            <a:solidFill>
-              <a:srgbClr val="22D3EE"/>
-            </a:solidFill>
-            <a:prstDash val="solid"/>
-            <a:tailEnd type="triangle"/>
-          </a:ln>
-        </p:spPr>
-        <p:txBody>
-          <a:bodyPr/>
-          <a:lstStyle/>
-          <a:p>
-            <a:endParaRPr lang="en-US"/>
-          </a:p>
-        </p:txBody>
-      </p:sp>
-      <p:sp>
-        <p:nvSpPr>
-          <p:cNvPr id="8" name="Shape 6"/>
-          <p:cNvSpPr/>
-          <p:nvPr/>
-        </p:nvSpPr>
-        <p:spPr>
-          <a:xfrm>
-            <a:off x="1865376" y="1005840"/>
-            <a:ext cx="1188720" cy="502920"/>
-          </a:xfrm>
-          <a:prstGeom prst="roundRect">
-            <a:avLst>
-              <a:gd name="adj" fmla="val 10909"/>
-            </a:avLst>
-          </a:prstGeom>
-          <a:solidFill>
-            <a:srgbClr val="12213F"/>
-          </a:solidFill>
-          <a:ln w="12700">
-            <a:solidFill>
-              <a:srgbClr val="22D3EE"/>
-            </a:solidFill>
-            <a:prstDash val="solid"/>
-          </a:ln>
-        </p:spPr>
-        <p:txBody>
-          <a:bodyPr/>
-          <a:lstStyle/>
-          <a:p>
-            <a:endParaRPr lang="en-US"/>
-          </a:p>
-        </p:txBody>
-      </p:sp>
-      <p:sp>
-        <p:nvSpPr>
-          <p:cNvPr id="9" name="Text 7"/>
-          <p:cNvSpPr txBox="1"/>
-          <p:nvPr/>
-        </p:nvSpPr>
-        <p:spPr>
-          <a:xfrm>
-            <a:off x="1901952" y="1005840"/>
-            <a:ext cx="1115568" cy="502920"/>
-          </a:xfrm>
-          <a:prstGeom prst="rect">
-            <a:avLst/>
-          </a:prstGeom>
-          <a:noFill/>
-          <a:ln/>
-        </p:spPr>
-        <p:txBody>
-          <a:bodyPr wrap="square" lIns="0" tIns="0" rIns="0" bIns="0" rtlCol="0" anchor="ctr"/>
-          <a:lstStyle/>
-          <a:p>
-            <a:pPr marL="0" indent="0" algn="ctr">
-              <a:buNone/>
-            </a:pPr>
-            <a:r>
-              <a:rPr lang="en-US" sz="850" b="1" dirty="0">
-                <a:solidFill>
-                  <a:srgbClr val="FFFFFF"/>
-                </a:solidFill>
-                <a:latin typeface="Calibri" pitchFamily="34" charset="0"/>
-                <a:ea typeface="Calibri" pitchFamily="34" charset="-122"/>
-                <a:cs typeface="Calibri" pitchFamily="34" charset="-120"/>
-              </a:rPr>
-              <a:t>Investigation</a:t>
-            </a:r>
-            <a:endParaRPr lang="en-US" sz="850" dirty="0"/>
-          </a:p>
-        </p:txBody>
-      </p:sp>
-      <p:sp>
-        <p:nvSpPr>
-          <p:cNvPr id="10" name="Shape 8"/>
-          <p:cNvSpPr/>
-          <p:nvPr/>
-        </p:nvSpPr>
-        <p:spPr>
-          <a:xfrm>
-            <a:off x="3054096" y="1257300"/>
-            <a:ext cx="219456" cy="0"/>
-          </a:xfrm>
-          <a:prstGeom prst="line">
-            <a:avLst/>
-          </a:prstGeom>
-          <a:noFill/>
-          <a:ln w="15875">
-            <a:solidFill>
-              <a:srgbClr val="22D3EE"/>
-            </a:solidFill>
-            <a:prstDash val="solid"/>
-            <a:tailEnd type="triangle"/>
-          </a:ln>
-        </p:spPr>
-        <p:txBody>
-          <a:bodyPr/>
-          <a:lstStyle/>
-          <a:p>
-            <a:endParaRPr lang="en-US"/>
-          </a:p>
-        </p:txBody>
-      </p:sp>
-      <p:sp>
-        <p:nvSpPr>
-          <p:cNvPr id="11" name="Shape 9"/>
-          <p:cNvSpPr/>
-          <p:nvPr/>
-        </p:nvSpPr>
-        <p:spPr>
-          <a:xfrm>
-            <a:off x="3273552" y="1005840"/>
-            <a:ext cx="1188720" cy="502920"/>
-          </a:xfrm>
-          <a:prstGeom prst="roundRect">
-            <a:avLst>
-              <a:gd name="adj" fmla="val 10909"/>
-            </a:avLst>
-          </a:prstGeom>
-          <a:solidFill>
-            <a:srgbClr val="12213F"/>
-          </a:solidFill>
-          <a:ln w="12700">
-            <a:solidFill>
-              <a:srgbClr val="22D3EE"/>
-            </a:solidFill>
-            <a:prstDash val="solid"/>
-          </a:ln>
-        </p:spPr>
-        <p:txBody>
-          <a:bodyPr/>
-          <a:lstStyle/>
-          <a:p>
-            <a:endParaRPr lang="en-US"/>
-          </a:p>
-        </p:txBody>
-      </p:sp>
-      <p:sp>
-        <p:nvSpPr>
-          <p:cNvPr id="12" name="Text 10"/>
-          <p:cNvSpPr txBox="1"/>
-          <p:nvPr/>
-        </p:nvSpPr>
-        <p:spPr>
-          <a:xfrm>
-            <a:off x="3310128" y="1005840"/>
-            <a:ext cx="1115568" cy="502920"/>
-          </a:xfrm>
-          <a:prstGeom prst="rect">
-            <a:avLst/>
-          </a:prstGeom>
-          <a:noFill/>
-          <a:ln/>
-        </p:spPr>
-        <p:txBody>
-          <a:bodyPr wrap="square" lIns="0" tIns="0" rIns="0" bIns="0" rtlCol="0" anchor="ctr"/>
-          <a:lstStyle/>
-          <a:p>
-            <a:pPr marL="0" indent="0" algn="ctr">
-              <a:buNone/>
-            </a:pPr>
-            <a:r>
-              <a:rPr lang="en-US" sz="850" b="1" dirty="0">
-                <a:solidFill>
-                  <a:srgbClr val="FFFFFF"/>
-                </a:solidFill>
-                <a:latin typeface="Calibri" pitchFamily="34" charset="0"/>
-                <a:ea typeface="Calibri" pitchFamily="34" charset="-122"/>
-                <a:cs typeface="Calibri" pitchFamily="34" charset="-120"/>
-              </a:rPr>
-              <a:t>Arrest</a:t>
-            </a:r>
-            <a:endParaRPr lang="en-US" sz="850" dirty="0"/>
-          </a:p>
-        </p:txBody>
-      </p:sp>
-      <p:sp>
-        <p:nvSpPr>
-          <p:cNvPr id="13" name="Shape 11"/>
-          <p:cNvSpPr/>
-          <p:nvPr/>
-        </p:nvSpPr>
-        <p:spPr>
-          <a:xfrm>
-            <a:off x="4462272" y="1257300"/>
-            <a:ext cx="219456" cy="0"/>
-          </a:xfrm>
-          <a:prstGeom prst="line">
-            <a:avLst/>
-          </a:prstGeom>
-          <a:noFill/>
-          <a:ln w="15875">
-            <a:solidFill>
-              <a:srgbClr val="22D3EE"/>
-            </a:solidFill>
-            <a:prstDash val="solid"/>
-            <a:tailEnd type="triangle"/>
-          </a:ln>
-        </p:spPr>
-        <p:txBody>
-          <a:bodyPr/>
-          <a:lstStyle/>
-          <a:p>
-            <a:endParaRPr lang="en-US"/>
-          </a:p>
-        </p:txBody>
-      </p:sp>
-      <p:sp>
-        <p:nvSpPr>
-          <p:cNvPr id="14" name="Shape 12"/>
-          <p:cNvSpPr/>
-          <p:nvPr/>
-        </p:nvSpPr>
-        <p:spPr>
-          <a:xfrm>
-            <a:off x="4681728" y="1005840"/>
-            <a:ext cx="1188720" cy="502920"/>
-          </a:xfrm>
-          <a:prstGeom prst="roundRect">
-            <a:avLst>
-              <a:gd name="adj" fmla="val 10909"/>
-            </a:avLst>
-          </a:prstGeom>
-          <a:solidFill>
-            <a:srgbClr val="12213F"/>
-          </a:solidFill>
-          <a:ln w="12700">
-            <a:solidFill>
-              <a:srgbClr val="22D3EE"/>
-            </a:solidFill>
-            <a:prstDash val="solid"/>
-          </a:ln>
-        </p:spPr>
-        <p:txBody>
-          <a:bodyPr/>
-          <a:lstStyle/>
-          <a:p>
-            <a:endParaRPr lang="en-US"/>
-          </a:p>
-        </p:txBody>
-      </p:sp>
-      <p:sp>
-        <p:nvSpPr>
-          <p:cNvPr id="15" name="Text 13"/>
-          <p:cNvSpPr txBox="1"/>
-          <p:nvPr/>
-        </p:nvSpPr>
-        <p:spPr>
-          <a:xfrm>
-            <a:off x="4718304" y="1005840"/>
-            <a:ext cx="1115568" cy="502920"/>
-          </a:xfrm>
-          <a:prstGeom prst="rect">
-            <a:avLst/>
-          </a:prstGeom>
-          <a:noFill/>
-          <a:ln/>
-        </p:spPr>
-        <p:txBody>
-          <a:bodyPr wrap="square" lIns="0" tIns="0" rIns="0" bIns="0" rtlCol="0" anchor="ctr"/>
-          <a:lstStyle/>
-          <a:p>
-            <a:pPr marL="0" indent="0" algn="ctr">
-              <a:buNone/>
-            </a:pPr>
-            <a:r>
-              <a:rPr lang="en-US" sz="850" b="1" dirty="0">
-                <a:solidFill>
-                  <a:srgbClr val="FFFFFF"/>
-                </a:solidFill>
-                <a:latin typeface="Calibri" pitchFamily="34" charset="0"/>
-                <a:ea typeface="Calibri" pitchFamily="34" charset="-122"/>
-                <a:cs typeface="Calibri" pitchFamily="34" charset="-120"/>
-              </a:rPr>
-              <a:t>Court Filing</a:t>
-            </a:r>
-            <a:endParaRPr lang="en-US" sz="850" dirty="0"/>
-          </a:p>
-        </p:txBody>
-      </p:sp>
-      <p:sp>
-        <p:nvSpPr>
-          <p:cNvPr id="16" name="Shape 14"/>
-          <p:cNvSpPr/>
-          <p:nvPr/>
-        </p:nvSpPr>
-        <p:spPr>
-          <a:xfrm>
-            <a:off x="5870448" y="1257300"/>
-            <a:ext cx="219456" cy="0"/>
-          </a:xfrm>
-          <a:prstGeom prst="line">
-            <a:avLst/>
-          </a:prstGeom>
-          <a:noFill/>
-          <a:ln w="15875">
-            <a:solidFill>
-              <a:srgbClr val="22D3EE"/>
-            </a:solidFill>
-            <a:prstDash val="solid"/>
-            <a:tailEnd type="triangle"/>
-          </a:ln>
-        </p:spPr>
-        <p:txBody>
-          <a:bodyPr/>
-          <a:lstStyle/>
-          <a:p>
-            <a:endParaRPr lang="en-US"/>
-          </a:p>
-        </p:txBody>
-      </p:sp>
-      <p:sp>
-        <p:nvSpPr>
-          <p:cNvPr id="17" name="Shape 15"/>
-          <p:cNvSpPr/>
-          <p:nvPr/>
-        </p:nvSpPr>
-        <p:spPr>
-          <a:xfrm>
-            <a:off x="6089904" y="1005840"/>
-            <a:ext cx="1188720" cy="502920"/>
-          </a:xfrm>
-          <a:prstGeom prst="roundRect">
-            <a:avLst>
-              <a:gd name="adj" fmla="val 10909"/>
-            </a:avLst>
-          </a:prstGeom>
-          <a:solidFill>
-            <a:srgbClr val="12213F"/>
-          </a:solidFill>
-          <a:ln w="12700">
-            <a:solidFill>
-              <a:srgbClr val="22D3EE"/>
-            </a:solidFill>
-            <a:prstDash val="solid"/>
-          </a:ln>
-        </p:spPr>
-        <p:txBody>
-          <a:bodyPr/>
-          <a:lstStyle/>
-          <a:p>
-            <a:endParaRPr lang="en-US"/>
-          </a:p>
-        </p:txBody>
-      </p:sp>
-      <p:sp>
-        <p:nvSpPr>
-          <p:cNvPr id="18" name="Text 16"/>
-          <p:cNvSpPr txBox="1"/>
-          <p:nvPr/>
-        </p:nvSpPr>
-        <p:spPr>
-          <a:xfrm>
-            <a:off x="6126480" y="1005840"/>
-            <a:ext cx="1115568" cy="502920"/>
-          </a:xfrm>
-          <a:prstGeom prst="rect">
-            <a:avLst/>
-          </a:prstGeom>
-          <a:noFill/>
-          <a:ln/>
-        </p:spPr>
-        <p:txBody>
-          <a:bodyPr wrap="square" lIns="0" tIns="0" rIns="0" bIns="0" rtlCol="0" anchor="ctr"/>
-          <a:lstStyle/>
-          <a:p>
-            <a:pPr marL="0" indent="0" algn="ctr">
-              <a:buNone/>
-            </a:pPr>
-            <a:r>
-              <a:rPr lang="en-US" sz="850" b="1" dirty="0">
-                <a:solidFill>
-                  <a:srgbClr val="FFFFFF"/>
-                </a:solidFill>
-                <a:latin typeface="Calibri" pitchFamily="34" charset="0"/>
-                <a:ea typeface="Calibri" pitchFamily="34" charset="-122"/>
-                <a:cs typeface="Calibri" pitchFamily="34" charset="-120"/>
-              </a:rPr>
-              <a:t>Trial</a:t>
-            </a:r>
-            <a:endParaRPr lang="en-US" sz="850" dirty="0"/>
-          </a:p>
-        </p:txBody>
-      </p:sp>
-      <p:sp>
-        <p:nvSpPr>
-          <p:cNvPr id="19" name="Shape 17"/>
-          <p:cNvSpPr/>
-          <p:nvPr/>
-        </p:nvSpPr>
-        <p:spPr>
-          <a:xfrm>
-            <a:off x="7278624" y="1257300"/>
-            <a:ext cx="219456" cy="0"/>
-          </a:xfrm>
-          <a:prstGeom prst="line">
-            <a:avLst/>
-          </a:prstGeom>
-          <a:noFill/>
-          <a:ln w="15875">
-            <a:solidFill>
-              <a:srgbClr val="22D3EE"/>
-            </a:solidFill>
-            <a:prstDash val="solid"/>
-            <a:tailEnd type="triangle"/>
-          </a:ln>
-        </p:spPr>
-        <p:txBody>
-          <a:bodyPr/>
-          <a:lstStyle/>
-          <a:p>
-            <a:endParaRPr lang="en-US"/>
-          </a:p>
-        </p:txBody>
-      </p:sp>
-      <p:sp>
-        <p:nvSpPr>
-          <p:cNvPr id="20" name="Shape 18"/>
-          <p:cNvSpPr/>
-          <p:nvPr/>
-        </p:nvSpPr>
-        <p:spPr>
-          <a:xfrm>
-            <a:off x="7498080" y="1005840"/>
-            <a:ext cx="1188720" cy="502920"/>
-          </a:xfrm>
-          <a:prstGeom prst="roundRect">
-            <a:avLst>
-              <a:gd name="adj" fmla="val 10909"/>
-            </a:avLst>
-          </a:prstGeom>
-          <a:solidFill>
-            <a:srgbClr val="12213F"/>
-          </a:solidFill>
-          <a:ln w="12700">
-            <a:solidFill>
-              <a:srgbClr val="22D3EE"/>
-            </a:solidFill>
-            <a:prstDash val="solid"/>
-          </a:ln>
-        </p:spPr>
-        <p:txBody>
-          <a:bodyPr/>
-          <a:lstStyle/>
-          <a:p>
-            <a:endParaRPr lang="en-US"/>
-          </a:p>
-        </p:txBody>
-      </p:sp>
-      <p:sp>
-        <p:nvSpPr>
-          <p:cNvPr id="21" name="Text 19"/>
-          <p:cNvSpPr txBox="1"/>
-          <p:nvPr/>
-        </p:nvSpPr>
-        <p:spPr>
-          <a:xfrm>
-            <a:off x="7534656" y="1005840"/>
-            <a:ext cx="1115568" cy="502920"/>
-          </a:xfrm>
-          <a:prstGeom prst="rect">
-            <a:avLst/>
-          </a:prstGeom>
-          <a:noFill/>
-          <a:ln/>
-        </p:spPr>
-        <p:txBody>
-          <a:bodyPr wrap="square" lIns="0" tIns="0" rIns="0" bIns="0" rtlCol="0" anchor="ctr"/>
-          <a:lstStyle/>
-          <a:p>
-            <a:pPr marL="0" indent="0" algn="ctr">
-              <a:buNone/>
-            </a:pPr>
-            <a:r>
-              <a:rPr lang="en-US" sz="850" b="1" dirty="0">
-                <a:solidFill>
-                  <a:srgbClr val="FFFFFF"/>
-                </a:solidFill>
-                <a:latin typeface="Calibri" pitchFamily="34" charset="0"/>
-                <a:ea typeface="Calibri" pitchFamily="34" charset="-122"/>
-                <a:cs typeface="Calibri" pitchFamily="34" charset="-120"/>
-              </a:rPr>
-              <a:t>Verdict</a:t>
-            </a:r>
-            <a:endParaRPr lang="en-US" sz="850" dirty="0"/>
-          </a:p>
-        </p:txBody>
-      </p:sp>
-      <p:sp>
-        <p:nvSpPr>
-          <p:cNvPr id="22" name="Shape 20"/>
-          <p:cNvSpPr/>
-          <p:nvPr/>
-        </p:nvSpPr>
-        <p:spPr>
-          <a:xfrm>
-            <a:off x="457200" y="1783080"/>
-            <a:ext cx="2377440" cy="2788920"/>
-          </a:xfrm>
-          <a:prstGeom prst="roundRect">
-            <a:avLst>
-              <a:gd name="adj" fmla="val 2308"/>
-            </a:avLst>
-          </a:prstGeom>
-          <a:solidFill>
-            <a:srgbClr val="12213F"/>
-          </a:solidFill>
-          <a:ln w="9525">
-            <a:solidFill>
-              <a:srgbClr val="1E3A6B"/>
-            </a:solidFill>
-            <a:prstDash val="solid"/>
-          </a:ln>
-        </p:spPr>
-        <p:txBody>
-          <a:bodyPr/>
-          <a:lstStyle/>
-          <a:p>
-            <a:endParaRPr lang="en-US"/>
-          </a:p>
-        </p:txBody>
-      </p:sp>
-      <p:sp>
-        <p:nvSpPr>
-          <p:cNvPr id="23" name="Text 21"/>
-          <p:cNvSpPr txBox="1"/>
-          <p:nvPr/>
-        </p:nvSpPr>
-        <p:spPr>
-          <a:xfrm>
-            <a:off x="566928" y="1847088"/>
-            <a:ext cx="2157984" cy="2660904"/>
-          </a:xfrm>
-          <a:prstGeom prst="rect">
-            <a:avLst/>
-          </a:prstGeom>
-          <a:noFill/>
-          <a:ln/>
-        </p:spPr>
-        <p:txBody>
-          <a:bodyPr wrap="square" lIns="0" tIns="0" rIns="0" bIns="0" rtlCol="0" anchor="t"/>
-          <a:lstStyle/>
-          <a:p>
-            <a:pPr marL="0" indent="0">
-              <a:spcAft>
-                <a:spcPts val="300"/>
-              </a:spcAft>
-              <a:buNone/>
-            </a:pPr>
-            <a:r>
-              <a:rPr lang="en-US" sz="1100" b="1" dirty="0">
-                <a:solidFill>
-                  <a:srgbClr val="22D3EE"/>
-                </a:solidFill>
-                <a:latin typeface="Calibri" pitchFamily="34" charset="0"/>
-                <a:ea typeface="Calibri" pitchFamily="34" charset="-122"/>
-                <a:cs typeface="Calibri" pitchFamily="34" charset="-120"/>
-              </a:rPr>
-              <a:t>Key Metrics</a:t>
-            </a:r>
-            <a:endParaRPr lang="en-US" sz="1100" dirty="0"/>
+                <a:latin typeface="Calibri"/>
+                <a:ea typeface="Calibri"/>
+                <a:cs typeface="Calibri"/>
+              </a:rPr>
+              <a:t>Concepts</a:t>
+            </a:r>
           </a:p>
           <a:p>
             <a:pPr marL="127000" indent="-127000">
               <a:spcAft>
-                <a:spcPts val="200"/>
+                <a:spcPts val="100"/>
               </a:spcAft>
               <a:buSzPct val="100000"/>
               <a:buChar char="•"/>
             </a:pPr>
             <a:r>
-              <a:rPr lang="en-US" sz="950" dirty="0">
-                <a:solidFill>
-                  <a:srgbClr val="FFFFFF"/>
-                </a:solidFill>
-                <a:latin typeface="Calibri" pitchFamily="34" charset="0"/>
-                <a:ea typeface="Calibri" pitchFamily="34" charset="-122"/>
-                <a:cs typeface="Calibri" pitchFamily="34" charset="-120"/>
-              </a:rPr>
-              <a:t>Pending court cases</a:t>
-            </a:r>
-            <a:endParaRPr lang="en-US" sz="1100" dirty="0"/>
+              <a:rPr lang="en-US" sz="800" dirty="0">
+                <a:solidFill>
+                  <a:srgbClr val="FFFFFF"/>
+                </a:solidFill>
+                <a:latin typeface="Calibri"/>
+                <a:ea typeface="Calibri"/>
+                <a:cs typeface="Calibri"/>
+              </a:rPr>
+              <a:t>JOIN • GROUP BY • COUNT</a:t>
+            </a:r>
           </a:p>
           <a:p>
             <a:pPr marL="127000" indent="-127000">
               <a:spcAft>
-                <a:spcPts val="200"/>
+                <a:spcPts val="100"/>
               </a:spcAft>
               <a:buSzPct val="100000"/>
               <a:buChar char="•"/>
             </a:pPr>
             <a:r>
-              <a:rPr lang="en-US" sz="950" dirty="0">
-                <a:solidFill>
-                  <a:srgbClr val="FFFFFF"/>
-                </a:solidFill>
-                <a:latin typeface="Calibri" pitchFamily="34" charset="0"/>
-                <a:ea typeface="Calibri" pitchFamily="34" charset="-122"/>
-                <a:cs typeface="Calibri" pitchFamily="34" charset="-120"/>
-              </a:rPr>
-              <a:t>Completed cases</a:t>
-            </a:r>
-            <a:endParaRPr lang="en-US" sz="1100" dirty="0"/>
+              <a:rPr lang="en-US" sz="800" dirty="0">
+                <a:solidFill>
+                  <a:srgbClr val="FFFFFF"/>
+                </a:solidFill>
+                <a:latin typeface="Calibri"/>
+                <a:ea typeface="Calibri"/>
+                <a:cs typeface="Calibri"/>
+              </a:rPr>
+              <a:t>Conditional aggregation (CASE) • KPI generation</a:t>
+            </a:r>
           </a:p>
           <a:p>
             <a:pPr marL="127000" indent="-127000">
               <a:spcAft>
-                <a:spcPts val="200"/>
+                <a:spcPts val="100"/>
               </a:spcAft>
               <a:buSzPct val="100000"/>
               <a:buChar char="•"/>
             </a:pPr>
             <a:r>
-              <a:rPr lang="en-US" sz="950" dirty="0">
-                <a:solidFill>
-                  <a:srgbClr val="FFFFFF"/>
-                </a:solidFill>
-                <a:latin typeface="Calibri" pitchFamily="34" charset="0"/>
-                <a:ea typeface="Calibri" pitchFamily="34" charset="-122"/>
-                <a:cs typeface="Calibri" pitchFamily="34" charset="-120"/>
-              </a:rPr>
-              <a:t>Litigation duration</a:t>
-            </a:r>
-            <a:endParaRPr lang="en-US" sz="1100" dirty="0"/>
+              <a:rPr lang="en-US" sz="800" dirty="0">
+                <a:solidFill>
+                  <a:srgbClr val="FFFFFF"/>
+                </a:solidFill>
+                <a:latin typeface="Calibri"/>
+                <a:ea typeface="Calibri"/>
+                <a:cs typeface="Calibri"/>
+              </a:rPr>
+              <a:t>DATEDIFF(): days between two dates</a:t>
+            </a:r>
           </a:p>
           <a:p>
             <a:pPr marL="127000" indent="-127000">
               <a:spcAft>
-                <a:spcPts val="200"/>
+                <a:spcPts val="100"/>
               </a:spcAft>
               <a:buSzPct val="100000"/>
               <a:buChar char="•"/>
             </a:pPr>
             <a:r>
-              <a:rPr lang="en-US" sz="950" dirty="0">
-                <a:solidFill>
-                  <a:srgbClr val="FFFFFF"/>
-                </a:solidFill>
-                <a:latin typeface="Calibri" pitchFamily="34" charset="0"/>
-                <a:ea typeface="Calibri" pitchFamily="34" charset="-122"/>
-                <a:cs typeface="Calibri" pitchFamily="34" charset="-120"/>
-              </a:rPr>
-              <a:t>Arrest-to-filing duration</a:t>
-            </a:r>
-            <a:endParaRPr lang="en-US" sz="1100" dirty="0"/>
+              <a:rPr lang="en-US" sz="800" dirty="0">
+                <a:solidFill>
+                  <a:srgbClr val="FFFFFF"/>
+                </a:solidFill>
+                <a:latin typeface="Calibri"/>
+                <a:ea typeface="Calibri"/>
+                <a:cs typeface="Calibri"/>
+              </a:rPr>
+              <a:t>COALESCE(): CURDATE() when VerdictDate is NULL</a:t>
+            </a:r>
           </a:p>
           <a:p>
             <a:pPr marL="127000" indent="-127000">
               <a:spcAft>
-                <a:spcPts val="200"/>
+                <a:spcPts val="100"/>
               </a:spcAft>
               <a:buSzPct val="100000"/>
               <a:buChar char="•"/>
             </a:pPr>
             <a:r>
-              <a:rPr lang="en-US" sz="950" dirty="0">
-                <a:solidFill>
-                  <a:srgbClr val="FFFFFF"/>
-                </a:solidFill>
-                <a:latin typeface="Calibri" pitchFamily="34" charset="0"/>
-                <a:ea typeface="Calibri" pitchFamily="34" charset="-122"/>
-                <a:cs typeface="Calibri" pitchFamily="34" charset="-120"/>
-              </a:rPr>
-              <a:t>Case aging</a:t>
-            </a:r>
-            <a:endParaRPr lang="en-US" sz="1100" dirty="0"/>
-          </a:p>
-        </p:txBody>
-      </p:sp>
-      <p:sp>
-        <p:nvSpPr>
-          <p:cNvPr id="24" name="Shape 22"/>
-          <p:cNvSpPr/>
-          <p:nvPr/>
-        </p:nvSpPr>
-        <p:spPr>
-          <a:xfrm>
-            <a:off x="3017520" y="1783080"/>
-            <a:ext cx="3291840" cy="1508760"/>
-          </a:xfrm>
-          <a:prstGeom prst="roundRect">
-            <a:avLst>
-              <a:gd name="adj" fmla="val 3030"/>
-            </a:avLst>
-          </a:prstGeom>
-          <a:solidFill>
-            <a:srgbClr val="050B18"/>
-          </a:solidFill>
-          <a:ln w="9525">
-            <a:solidFill>
-              <a:srgbClr val="22D3EE"/>
-            </a:solidFill>
-            <a:prstDash val="solid"/>
-          </a:ln>
-        </p:spPr>
-        <p:txBody>
-          <a:bodyPr/>
-          <a:lstStyle/>
-          <a:p>
-            <a:endParaRPr lang="en-US"/>
-          </a:p>
-        </p:txBody>
-      </p:sp>
-      <p:sp>
-        <p:nvSpPr>
-          <p:cNvPr id="25" name="Text 23"/>
-          <p:cNvSpPr txBox="1"/>
-          <p:nvPr/>
-        </p:nvSpPr>
-        <p:spPr>
-          <a:xfrm>
-            <a:off x="3108960" y="1828800"/>
-            <a:ext cx="3108960" cy="1417320"/>
-          </a:xfrm>
-          <a:prstGeom prst="rect">
-            <a:avLst/>
-          </a:prstGeom>
-          <a:noFill/>
-          <a:ln/>
-        </p:spPr>
-        <p:txBody>
-          <a:bodyPr wrap="square" lIns="0" tIns="0" rIns="0" bIns="0" rtlCol="0" anchor="t"/>
-          <a:lstStyle/>
-          <a:p>
-            <a:pPr marL="0" indent="0">
-              <a:buNone/>
-            </a:pPr>
-            <a:r>
-              <a:rPr lang="en-US" sz="850" dirty="0">
-                <a:solidFill>
-                  <a:srgbClr val="9FE8FF"/>
-                </a:solidFill>
-                <a:latin typeface="Consolas" pitchFamily="34" charset="0"/>
-                <a:ea typeface="Consolas" pitchFamily="34" charset="-122"/>
-                <a:cs typeface="Consolas" pitchFamily="34" charset="-120"/>
-              </a:rPr>
-              <a:t>SELECT</a:t>
-            </a:r>
-            <a:endParaRPr lang="en-US" sz="850" dirty="0"/>
-          </a:p>
-          <a:p>
-            <a:pPr marL="0" indent="0">
-              <a:buNone/>
-            </a:pPr>
-            <a:r>
-              <a:rPr lang="en-US" sz="850" dirty="0">
-                <a:solidFill>
-                  <a:srgbClr val="9FE8FF"/>
-                </a:solidFill>
-                <a:latin typeface="Consolas" pitchFamily="34" charset="0"/>
-                <a:ea typeface="Consolas" pitchFamily="34" charset="-122"/>
-                <a:cs typeface="Consolas" pitchFamily="34" charset="-120"/>
-              </a:rPr>
-              <a:t>    CaseID,</a:t>
-            </a:r>
-            <a:endParaRPr lang="en-US" sz="850" dirty="0"/>
-          </a:p>
-          <a:p>
-            <a:pPr marL="0" indent="0">
-              <a:buNone/>
-            </a:pPr>
-            <a:r>
-              <a:rPr lang="en-US" sz="850" dirty="0">
-                <a:solidFill>
-                  <a:srgbClr val="9FE8FF"/>
-                </a:solidFill>
-                <a:latin typeface="Consolas" pitchFamily="34" charset="0"/>
-                <a:ea typeface="Consolas" pitchFamily="34" charset="-122"/>
-                <a:cs typeface="Consolas" pitchFamily="34" charset="-120"/>
-              </a:rPr>
-              <a:t>    FilingDate,</a:t>
-            </a:r>
-            <a:endParaRPr lang="en-US" sz="850" dirty="0"/>
-          </a:p>
-          <a:p>
-            <a:pPr marL="0" indent="0">
-              <a:buNone/>
-            </a:pPr>
-            <a:r>
-              <a:rPr lang="en-US" sz="850" dirty="0">
-                <a:solidFill>
-                  <a:srgbClr val="9FE8FF"/>
-                </a:solidFill>
-                <a:latin typeface="Consolas" pitchFamily="34" charset="0"/>
-                <a:ea typeface="Consolas" pitchFamily="34" charset="-122"/>
-                <a:cs typeface="Consolas" pitchFamily="34" charset="-120"/>
-              </a:rPr>
-              <a:t>    VerdictDate,</a:t>
-            </a:r>
-            <a:endParaRPr lang="en-US" sz="850" dirty="0"/>
-          </a:p>
-          <a:p>
-            <a:pPr marL="0" indent="0">
-              <a:buNone/>
-            </a:pPr>
-            <a:r>
-              <a:rPr lang="en-US" sz="850" dirty="0">
-                <a:solidFill>
-                  <a:srgbClr val="9FE8FF"/>
-                </a:solidFill>
-                <a:latin typeface="Consolas" pitchFamily="34" charset="0"/>
-                <a:ea typeface="Consolas" pitchFamily="34" charset="-122"/>
-                <a:cs typeface="Consolas" pitchFamily="34" charset="-120"/>
-              </a:rPr>
-              <a:t>    DATEDIFF(</a:t>
-            </a:r>
-            <a:endParaRPr lang="en-US" sz="850" dirty="0"/>
-          </a:p>
-          <a:p>
-            <a:pPr marL="0" indent="0">
-              <a:buNone/>
-            </a:pPr>
-            <a:r>
-              <a:rPr lang="en-US" sz="850" dirty="0">
-                <a:solidFill>
-                  <a:srgbClr val="9FE8FF"/>
-                </a:solidFill>
-                <a:latin typeface="Consolas" pitchFamily="34" charset="0"/>
-                <a:ea typeface="Consolas" pitchFamily="34" charset="-122"/>
-                <a:cs typeface="Consolas" pitchFamily="34" charset="-120"/>
-              </a:rPr>
-              <a:t>        COALESCE(VerdictDate, CURDATE()),</a:t>
-            </a:r>
-            <a:endParaRPr lang="en-US" sz="850" dirty="0"/>
-          </a:p>
-          <a:p>
-            <a:pPr marL="0" indent="0">
-              <a:buNone/>
-            </a:pPr>
-            <a:r>
-              <a:rPr lang="en-US" sz="850" dirty="0">
-                <a:solidFill>
-                  <a:srgbClr val="9FE8FF"/>
-                </a:solidFill>
-                <a:latin typeface="Consolas" pitchFamily="34" charset="0"/>
-                <a:ea typeface="Consolas" pitchFamily="34" charset="-122"/>
-                <a:cs typeface="Consolas" pitchFamily="34" charset="-120"/>
-              </a:rPr>
-              <a:t>        FilingDate</a:t>
-            </a:r>
-            <a:endParaRPr lang="en-US" sz="850" dirty="0"/>
-          </a:p>
-          <a:p>
-            <a:pPr marL="0" indent="0">
-              <a:buNone/>
-            </a:pPr>
-            <a:r>
-              <a:rPr lang="en-US" sz="850" dirty="0">
-                <a:solidFill>
-                  <a:srgbClr val="9FE8FF"/>
-                </a:solidFill>
-                <a:latin typeface="Consolas" pitchFamily="34" charset="0"/>
-                <a:ea typeface="Consolas" pitchFamily="34" charset="-122"/>
-                <a:cs typeface="Consolas" pitchFamily="34" charset="-120"/>
-              </a:rPr>
-              <a:t>    ) AS Litigation_Days</a:t>
-            </a:r>
-            <a:endParaRPr lang="en-US" sz="850" dirty="0"/>
-          </a:p>
-          <a:p>
-            <a:pPr marL="0" indent="0">
-              <a:buNone/>
-            </a:pPr>
-            <a:r>
-              <a:rPr lang="en-US" sz="850" dirty="0">
-                <a:solidFill>
-                  <a:srgbClr val="9FE8FF"/>
-                </a:solidFill>
-                <a:latin typeface="Consolas" pitchFamily="34" charset="0"/>
-                <a:ea typeface="Consolas" pitchFamily="34" charset="-122"/>
-                <a:cs typeface="Consolas" pitchFamily="34" charset="-120"/>
-              </a:rPr>
-              <a:t>FROM CourtCase;</a:t>
-            </a:r>
-            <a:endParaRPr lang="en-US" sz="850" dirty="0"/>
-          </a:p>
-        </p:txBody>
-      </p:sp>
-      <p:sp>
-        <p:nvSpPr>
-          <p:cNvPr id="26" name="Shape 24"/>
-          <p:cNvSpPr/>
-          <p:nvPr/>
-        </p:nvSpPr>
-        <p:spPr>
-          <a:xfrm>
-            <a:off x="3017520" y="3429000"/>
-            <a:ext cx="3291840" cy="1143000"/>
-          </a:xfrm>
-          <a:prstGeom prst="roundRect">
-            <a:avLst>
-              <a:gd name="adj" fmla="val 4800"/>
-            </a:avLst>
-          </a:prstGeom>
-          <a:solidFill>
-            <a:srgbClr val="12213F"/>
-          </a:solidFill>
-          <a:ln w="9525">
-            <a:solidFill>
-              <a:srgbClr val="1E3A6B"/>
-            </a:solidFill>
-            <a:prstDash val="solid"/>
-          </a:ln>
-        </p:spPr>
-        <p:txBody>
-          <a:bodyPr/>
-          <a:lstStyle/>
-          <a:p>
-            <a:endParaRPr lang="en-US"/>
-          </a:p>
-        </p:txBody>
-      </p:sp>
-      <p:sp>
-        <p:nvSpPr>
-          <p:cNvPr id="27" name="Text 25"/>
-          <p:cNvSpPr txBox="1"/>
-          <p:nvPr/>
-        </p:nvSpPr>
-        <p:spPr>
-          <a:xfrm>
-            <a:off x="3127248" y="3493008"/>
-            <a:ext cx="3072384" cy="1014984"/>
-          </a:xfrm>
-          <a:prstGeom prst="rect">
-            <a:avLst/>
-          </a:prstGeom>
-          <a:noFill/>
-          <a:ln/>
-        </p:spPr>
-        <p:txBody>
-          <a:bodyPr wrap="square" lIns="0" tIns="0" rIns="0" bIns="0" rtlCol="0" anchor="t"/>
-          <a:lstStyle/>
-          <a:p>
-            <a:pPr marL="0" indent="0">
-              <a:spcAft>
-                <a:spcPts val="300"/>
-              </a:spcAft>
-              <a:buNone/>
-            </a:pPr>
-            <a:r>
-              <a:rPr lang="en-US" sz="1100" b="1" dirty="0">
-                <a:solidFill>
-                  <a:srgbClr val="22D3EE"/>
-                </a:solidFill>
-                <a:latin typeface="Calibri" pitchFamily="34" charset="0"/>
-                <a:ea typeface="Calibri" pitchFamily="34" charset="-122"/>
-                <a:cs typeface="Calibri" pitchFamily="34" charset="-120"/>
-              </a:rPr>
-              <a:t>Concepts</a:t>
-            </a:r>
-            <a:endParaRPr lang="en-US" sz="1100" dirty="0"/>
-          </a:p>
-          <a:p>
-            <a:pPr marL="127000" indent="-127000">
-              <a:spcAft>
-                <a:spcPts val="200"/>
-              </a:spcAft>
-              <a:buSzPct val="100000"/>
-              <a:buChar char="•"/>
-            </a:pPr>
-            <a:r>
-              <a:rPr lang="en-US" sz="900" dirty="0">
-                <a:solidFill>
-                  <a:srgbClr val="FFFFFF"/>
-                </a:solidFill>
-                <a:latin typeface="Calibri" pitchFamily="34" charset="0"/>
-                <a:ea typeface="Calibri" pitchFamily="34" charset="-122"/>
-                <a:cs typeface="Calibri" pitchFamily="34" charset="-120"/>
-              </a:rPr>
-              <a:t>DATEDIFF(): days between two dates</a:t>
-            </a:r>
-            <a:endParaRPr lang="en-US" sz="1100" dirty="0"/>
-          </a:p>
-          <a:p>
-            <a:pPr marL="127000" indent="-127000">
-              <a:spcAft>
-                <a:spcPts val="200"/>
-              </a:spcAft>
-              <a:buSzPct val="100000"/>
-              <a:buChar char="•"/>
-            </a:pPr>
-            <a:r>
-              <a:rPr lang="en-US" sz="900" dirty="0">
-                <a:solidFill>
-                  <a:srgbClr val="FFFFFF"/>
-                </a:solidFill>
-                <a:latin typeface="Calibri" pitchFamily="34" charset="0"/>
-                <a:ea typeface="Calibri" pitchFamily="34" charset="-122"/>
-                <a:cs typeface="Calibri" pitchFamily="34" charset="-120"/>
-              </a:rPr>
-              <a:t>COALESCE(): uses CURDATE() when VerdictDate is NULL</a:t>
-            </a:r>
-            <a:endParaRPr lang="en-US" sz="1100" dirty="0"/>
-          </a:p>
-          <a:p>
-            <a:pPr marL="127000" indent="-127000">
-              <a:spcAft>
-                <a:spcPts val="200"/>
-              </a:spcAft>
-              <a:buSzPct val="100000"/>
-              <a:buChar char="•"/>
-            </a:pPr>
-            <a:r>
-              <a:rPr lang="en-US" sz="900" dirty="0">
-                <a:solidFill>
-                  <a:srgbClr val="FFFFFF"/>
-                </a:solidFill>
-                <a:latin typeface="Calibri" pitchFamily="34" charset="0"/>
-                <a:ea typeface="Calibri" pitchFamily="34" charset="-122"/>
-                <a:cs typeface="Calibri" pitchFamily="34" charset="-120"/>
+              <a:rPr lang="en-US" sz="800" dirty="0">
+                <a:solidFill>
+                  <a:srgbClr val="FFFFFF"/>
+                </a:solidFill>
+                <a:latin typeface="Calibri"/>
+                <a:ea typeface="Calibri"/>
+                <a:cs typeface="Calibri"/>
               </a:rPr>
               <a:t>Dynamic aging of pending cases</a:t>
             </a:r>
-            <a:endParaRPr lang="en-US" sz="1100" dirty="0"/>
-          </a:p>
-        </p:txBody>
-      </p:sp>
-      <p:sp>
-        <p:nvSpPr>
-          <p:cNvPr id="28" name="Text 26"/>
-          <p:cNvSpPr txBox="1"/>
-          <p:nvPr/>
-        </p:nvSpPr>
-        <p:spPr>
-          <a:xfrm>
-            <a:off x="6492240" y="1783080"/>
-            <a:ext cx="2194560" cy="201168"/>
-          </a:xfrm>
-          <a:prstGeom prst="rect">
-            <a:avLst/>
-          </a:prstGeom>
-          <a:noFill/>
-          <a:ln/>
-        </p:spPr>
-        <p:txBody>
-          <a:bodyPr wrap="square" lIns="0" tIns="0" rIns="0" bIns="0" rtlCol="0" anchor="ctr"/>
-          <a:lstStyle/>
-          <a:p>
-            <a:pPr marL="0" indent="0">
-              <a:buNone/>
-            </a:pPr>
-            <a:r>
-              <a:rPr lang="en-US" sz="850" b="1" dirty="0">
-                <a:solidFill>
-                  <a:srgbClr val="22D3EE"/>
-                </a:solidFill>
-                <a:latin typeface="Calibri" pitchFamily="34" charset="0"/>
-                <a:ea typeface="Calibri" pitchFamily="34" charset="-122"/>
-                <a:cs typeface="Calibri" pitchFamily="34" charset="-120"/>
-              </a:rPr>
-              <a:t>COMPLETED CASE</a:t>
-            </a:r>
-            <a:endParaRPr lang="en-US" sz="850" dirty="0"/>
-          </a:p>
-        </p:txBody>
-      </p:sp>
-      <p:sp>
-        <p:nvSpPr>
-          <p:cNvPr id="29" name="Shape 27"/>
-          <p:cNvSpPr/>
-          <p:nvPr/>
-        </p:nvSpPr>
-        <p:spPr>
-          <a:xfrm>
-            <a:off x="6492240" y="2011680"/>
-            <a:ext cx="640080" cy="548640"/>
-          </a:xfrm>
-          <a:prstGeom prst="roundRect">
-            <a:avLst>
-              <a:gd name="adj" fmla="val 10000"/>
-            </a:avLst>
-          </a:prstGeom>
-          <a:solidFill>
-            <a:srgbClr val="12213F"/>
-          </a:solidFill>
-          <a:ln w="12700">
-            <a:solidFill>
-              <a:srgbClr val="22D3EE"/>
-            </a:solidFill>
-            <a:prstDash val="solid"/>
-          </a:ln>
-        </p:spPr>
-        <p:txBody>
-          <a:bodyPr/>
-          <a:lstStyle/>
-          <a:p>
-            <a:endParaRPr lang="en-US"/>
-          </a:p>
-        </p:txBody>
-      </p:sp>
-      <p:sp>
-        <p:nvSpPr>
-          <p:cNvPr id="30" name="Text 28"/>
-          <p:cNvSpPr txBox="1"/>
-          <p:nvPr/>
-        </p:nvSpPr>
-        <p:spPr>
-          <a:xfrm>
-            <a:off x="6528816" y="2011680"/>
-            <a:ext cx="566928" cy="548640"/>
-          </a:xfrm>
-          <a:prstGeom prst="rect">
-            <a:avLst/>
-          </a:prstGeom>
-          <a:noFill/>
-          <a:ln/>
-        </p:spPr>
-        <p:txBody>
-          <a:bodyPr wrap="square" lIns="0" tIns="0" rIns="0" bIns="0" rtlCol="0" anchor="ctr"/>
-          <a:lstStyle/>
-          <a:p>
-            <a:pPr marL="0" indent="0" algn="ctr">
-              <a:buNone/>
-            </a:pPr>
-            <a:r>
-              <a:rPr lang="en-US" sz="850" b="1" dirty="0">
-                <a:solidFill>
-                  <a:srgbClr val="FFFFFF"/>
-                </a:solidFill>
-                <a:latin typeface="Calibri" pitchFamily="34" charset="0"/>
-                <a:ea typeface="Calibri" pitchFamily="34" charset="-122"/>
-                <a:cs typeface="Calibri" pitchFamily="34" charset="-120"/>
-              </a:rPr>
-              <a:t>FILING DATE</a:t>
-            </a:r>
-            <a:endParaRPr lang="en-US" sz="850" dirty="0"/>
-          </a:p>
-        </p:txBody>
-      </p:sp>
-      <p:sp>
-        <p:nvSpPr>
-          <p:cNvPr id="31" name="Shape 29"/>
-          <p:cNvSpPr/>
-          <p:nvPr/>
-        </p:nvSpPr>
-        <p:spPr>
-          <a:xfrm>
-            <a:off x="7132320" y="2286000"/>
-            <a:ext cx="137160" cy="0"/>
-          </a:xfrm>
-          <a:prstGeom prst="line">
-            <a:avLst/>
-          </a:prstGeom>
-          <a:noFill/>
-          <a:ln w="15875">
-            <a:solidFill>
-              <a:srgbClr val="22D3EE"/>
-            </a:solidFill>
-            <a:prstDash val="solid"/>
-            <a:tailEnd type="triangle"/>
-          </a:ln>
-        </p:spPr>
-        <p:txBody>
-          <a:bodyPr/>
-          <a:lstStyle/>
-          <a:p>
-            <a:endParaRPr lang="en-US"/>
-          </a:p>
-        </p:txBody>
-      </p:sp>
-      <p:sp>
-        <p:nvSpPr>
-          <p:cNvPr id="32" name="Shape 30"/>
-          <p:cNvSpPr/>
-          <p:nvPr/>
-        </p:nvSpPr>
-        <p:spPr>
-          <a:xfrm>
-            <a:off x="7269480" y="2011680"/>
-            <a:ext cx="640080" cy="548640"/>
-          </a:xfrm>
-          <a:prstGeom prst="roundRect">
-            <a:avLst>
-              <a:gd name="adj" fmla="val 10000"/>
-            </a:avLst>
-          </a:prstGeom>
-          <a:solidFill>
-            <a:srgbClr val="12213F"/>
-          </a:solidFill>
-          <a:ln w="12700">
-            <a:solidFill>
-              <a:srgbClr val="22D3EE"/>
-            </a:solidFill>
-            <a:prstDash val="solid"/>
-          </a:ln>
-        </p:spPr>
-        <p:txBody>
-          <a:bodyPr/>
-          <a:lstStyle/>
-          <a:p>
-            <a:endParaRPr lang="en-US"/>
-          </a:p>
-        </p:txBody>
-      </p:sp>
-      <p:sp>
-        <p:nvSpPr>
-          <p:cNvPr id="33" name="Text 31"/>
-          <p:cNvSpPr txBox="1"/>
-          <p:nvPr/>
-        </p:nvSpPr>
-        <p:spPr>
-          <a:xfrm>
-            <a:off x="7306056" y="2011680"/>
-            <a:ext cx="566928" cy="548640"/>
-          </a:xfrm>
-          <a:prstGeom prst="rect">
-            <a:avLst/>
-          </a:prstGeom>
-          <a:noFill/>
-          <a:ln/>
-        </p:spPr>
-        <p:txBody>
-          <a:bodyPr wrap="square" lIns="0" tIns="0" rIns="0" bIns="0" rtlCol="0" anchor="ctr"/>
-          <a:lstStyle/>
-          <a:p>
-            <a:pPr marL="0" indent="0" algn="ctr">
-              <a:buNone/>
-            </a:pPr>
-            <a:r>
-              <a:rPr lang="en-US" sz="850" b="1" dirty="0">
-                <a:solidFill>
-                  <a:srgbClr val="FFFFFF"/>
-                </a:solidFill>
-                <a:latin typeface="Calibri" pitchFamily="34" charset="0"/>
-                <a:ea typeface="Calibri" pitchFamily="34" charset="-122"/>
-                <a:cs typeface="Calibri" pitchFamily="34" charset="-120"/>
-              </a:rPr>
-              <a:t>HEARINGS</a:t>
-            </a:r>
-            <a:endParaRPr lang="en-US" sz="850" dirty="0"/>
-          </a:p>
-        </p:txBody>
-      </p:sp>
-      <p:sp>
-        <p:nvSpPr>
-          <p:cNvPr id="34" name="Shape 32"/>
-          <p:cNvSpPr/>
-          <p:nvPr/>
-        </p:nvSpPr>
-        <p:spPr>
-          <a:xfrm>
-            <a:off x="7909560" y="2286000"/>
-            <a:ext cx="137160" cy="0"/>
-          </a:xfrm>
-          <a:prstGeom prst="line">
-            <a:avLst/>
-          </a:prstGeom>
-          <a:noFill/>
-          <a:ln w="15875">
-            <a:solidFill>
-              <a:srgbClr val="22D3EE"/>
-            </a:solidFill>
-            <a:prstDash val="solid"/>
-            <a:tailEnd type="triangle"/>
-          </a:ln>
-        </p:spPr>
-        <p:txBody>
-          <a:bodyPr/>
-          <a:lstStyle/>
-          <a:p>
-            <a:endParaRPr lang="en-US"/>
-          </a:p>
-        </p:txBody>
-      </p:sp>
-      <p:sp>
-        <p:nvSpPr>
-          <p:cNvPr id="35" name="Shape 33"/>
-          <p:cNvSpPr/>
-          <p:nvPr/>
-        </p:nvSpPr>
-        <p:spPr>
-          <a:xfrm>
-            <a:off x="8046720" y="2011680"/>
-            <a:ext cx="640080" cy="548640"/>
-          </a:xfrm>
-          <a:prstGeom prst="roundRect">
-            <a:avLst>
-              <a:gd name="adj" fmla="val 10000"/>
-            </a:avLst>
-          </a:prstGeom>
-          <a:solidFill>
-            <a:srgbClr val="12213F"/>
-          </a:solidFill>
-          <a:ln w="12700">
-            <a:solidFill>
-              <a:srgbClr val="22D3EE"/>
-            </a:solidFill>
-            <a:prstDash val="solid"/>
-          </a:ln>
-        </p:spPr>
-        <p:txBody>
-          <a:bodyPr/>
-          <a:lstStyle/>
-          <a:p>
-            <a:endParaRPr lang="en-US"/>
-          </a:p>
-        </p:txBody>
-      </p:sp>
-      <p:sp>
-        <p:nvSpPr>
-          <p:cNvPr id="36" name="Text 34"/>
-          <p:cNvSpPr txBox="1"/>
-          <p:nvPr/>
-        </p:nvSpPr>
-        <p:spPr>
-          <a:xfrm>
-            <a:off x="8083296" y="2011680"/>
-            <a:ext cx="566928" cy="548640"/>
-          </a:xfrm>
-          <a:prstGeom prst="rect">
-            <a:avLst/>
-          </a:prstGeom>
-          <a:noFill/>
-          <a:ln/>
-        </p:spPr>
-        <p:txBody>
-          <a:bodyPr wrap="square" lIns="0" tIns="0" rIns="0" bIns="0" rtlCol="0" anchor="ctr"/>
-          <a:lstStyle/>
-          <a:p>
-            <a:pPr marL="0" indent="0" algn="ctr">
-              <a:buNone/>
-            </a:pPr>
-            <a:r>
-              <a:rPr lang="en-US" sz="850" b="1" dirty="0">
-                <a:solidFill>
-                  <a:srgbClr val="FFFFFF"/>
-                </a:solidFill>
-                <a:latin typeface="Calibri" pitchFamily="34" charset="0"/>
-                <a:ea typeface="Calibri" pitchFamily="34" charset="-122"/>
-                <a:cs typeface="Calibri" pitchFamily="34" charset="-120"/>
-              </a:rPr>
-              <a:t>VERDICT</a:t>
-            </a:r>
-            <a:endParaRPr lang="en-US" sz="850" dirty="0"/>
-          </a:p>
-        </p:txBody>
-      </p:sp>
-      <p:sp>
-        <p:nvSpPr>
-          <p:cNvPr id="37" name="Text 35"/>
-          <p:cNvSpPr txBox="1"/>
-          <p:nvPr/>
-        </p:nvSpPr>
-        <p:spPr>
-          <a:xfrm>
-            <a:off x="6492240" y="2788920"/>
-            <a:ext cx="2194560" cy="201168"/>
-          </a:xfrm>
-          <a:prstGeom prst="rect">
-            <a:avLst/>
-          </a:prstGeom>
-          <a:noFill/>
-          <a:ln/>
-        </p:spPr>
-        <p:txBody>
-          <a:bodyPr wrap="square" lIns="0" tIns="0" rIns="0" bIns="0" rtlCol="0" anchor="ctr"/>
-          <a:lstStyle/>
-          <a:p>
-            <a:pPr marL="0" indent="0">
-              <a:buNone/>
-            </a:pPr>
-            <a:r>
-              <a:rPr lang="en-US" sz="850" b="1" dirty="0">
-                <a:solidFill>
-                  <a:srgbClr val="22D3EE"/>
-                </a:solidFill>
-                <a:latin typeface="Calibri" pitchFamily="34" charset="0"/>
-                <a:ea typeface="Calibri" pitchFamily="34" charset="-122"/>
-                <a:cs typeface="Calibri" pitchFamily="34" charset="-120"/>
-              </a:rPr>
-              <a:t>PENDING CASE</a:t>
-            </a:r>
-            <a:endParaRPr lang="en-US" sz="850" dirty="0"/>
-          </a:p>
-        </p:txBody>
-      </p:sp>
-      <p:sp>
-        <p:nvSpPr>
-          <p:cNvPr id="38" name="Shape 36"/>
-          <p:cNvSpPr/>
-          <p:nvPr/>
-        </p:nvSpPr>
-        <p:spPr>
-          <a:xfrm>
-            <a:off x="6492240" y="3017520"/>
-            <a:ext cx="914400" cy="548640"/>
-          </a:xfrm>
-          <a:prstGeom prst="roundRect">
-            <a:avLst>
-              <a:gd name="adj" fmla="val 10000"/>
-            </a:avLst>
-          </a:prstGeom>
-          <a:solidFill>
-            <a:srgbClr val="12213F"/>
-          </a:solidFill>
-          <a:ln w="12700">
-            <a:solidFill>
-              <a:srgbClr val="22D3EE"/>
-            </a:solidFill>
-            <a:prstDash val="solid"/>
-          </a:ln>
-        </p:spPr>
-        <p:txBody>
-          <a:bodyPr/>
-          <a:lstStyle/>
-          <a:p>
-            <a:endParaRPr lang="en-US"/>
-          </a:p>
-        </p:txBody>
-      </p:sp>
-      <p:sp>
-        <p:nvSpPr>
-          <p:cNvPr id="39" name="Text 37"/>
-          <p:cNvSpPr txBox="1"/>
-          <p:nvPr/>
-        </p:nvSpPr>
-        <p:spPr>
-          <a:xfrm>
-            <a:off x="6528816" y="3017520"/>
-            <a:ext cx="841248" cy="548640"/>
-          </a:xfrm>
-          <a:prstGeom prst="rect">
-            <a:avLst/>
-          </a:prstGeom>
-          <a:noFill/>
-          <a:ln/>
-        </p:spPr>
-        <p:txBody>
-          <a:bodyPr wrap="square" lIns="0" tIns="0" rIns="0" bIns="0" rtlCol="0" anchor="ctr"/>
-          <a:lstStyle/>
-          <a:p>
-            <a:pPr marL="0" indent="0" algn="ctr">
-              <a:buNone/>
-            </a:pPr>
-            <a:r>
-              <a:rPr lang="en-US" sz="850" b="1" dirty="0">
-                <a:solidFill>
-                  <a:srgbClr val="FFFFFF"/>
-                </a:solidFill>
-                <a:latin typeface="Calibri" pitchFamily="34" charset="0"/>
-                <a:ea typeface="Calibri" pitchFamily="34" charset="-122"/>
-                <a:cs typeface="Calibri" pitchFamily="34" charset="-120"/>
-              </a:rPr>
-              <a:t>FILING DATE</a:t>
-            </a:r>
-            <a:endParaRPr lang="en-US" sz="850" dirty="0"/>
-          </a:p>
-        </p:txBody>
-      </p:sp>
-      <p:sp>
-        <p:nvSpPr>
-          <p:cNvPr id="40" name="Shape 38"/>
-          <p:cNvSpPr/>
-          <p:nvPr/>
-        </p:nvSpPr>
-        <p:spPr>
-          <a:xfrm>
-            <a:off x="7406640" y="3291840"/>
-            <a:ext cx="365760" cy="0"/>
-          </a:xfrm>
-          <a:prstGeom prst="line">
-            <a:avLst/>
-          </a:prstGeom>
-          <a:noFill/>
-          <a:ln w="15875">
-            <a:solidFill>
-              <a:srgbClr val="22D3EE"/>
-            </a:solidFill>
-            <a:prstDash val="solid"/>
-            <a:tailEnd type="triangle"/>
-          </a:ln>
-        </p:spPr>
-        <p:txBody>
-          <a:bodyPr/>
-          <a:lstStyle/>
-          <a:p>
-            <a:endParaRPr lang="en-US"/>
-          </a:p>
-        </p:txBody>
-      </p:sp>
-      <p:sp>
-        <p:nvSpPr>
-          <p:cNvPr id="41" name="Shape 39"/>
-          <p:cNvSpPr/>
-          <p:nvPr/>
-        </p:nvSpPr>
-        <p:spPr>
-          <a:xfrm>
-            <a:off x="7772400" y="3017520"/>
-            <a:ext cx="914400" cy="548640"/>
-          </a:xfrm>
-          <a:prstGeom prst="roundRect">
-            <a:avLst>
-              <a:gd name="adj" fmla="val 10000"/>
-            </a:avLst>
-          </a:prstGeom>
-          <a:solidFill>
-            <a:srgbClr val="163A78"/>
-          </a:solidFill>
-          <a:ln w="12700">
-            <a:solidFill>
-              <a:srgbClr val="22D3EE"/>
-            </a:solidFill>
-            <a:prstDash val="solid"/>
-          </a:ln>
-        </p:spPr>
-        <p:txBody>
-          <a:bodyPr/>
-          <a:lstStyle/>
-          <a:p>
-            <a:endParaRPr lang="en-US"/>
-          </a:p>
-        </p:txBody>
-      </p:sp>
-      <p:sp>
-        <p:nvSpPr>
-          <p:cNvPr id="42" name="Text 40"/>
-          <p:cNvSpPr txBox="1"/>
-          <p:nvPr/>
-        </p:nvSpPr>
-        <p:spPr>
-          <a:xfrm>
-            <a:off x="7808976" y="3017520"/>
-            <a:ext cx="841248" cy="548640"/>
-          </a:xfrm>
-          <a:prstGeom prst="rect">
-            <a:avLst/>
-          </a:prstGeom>
-          <a:noFill/>
-          <a:ln/>
-        </p:spPr>
-        <p:txBody>
-          <a:bodyPr wrap="square" lIns="0" tIns="0" rIns="0" bIns="0" rtlCol="0" anchor="ctr"/>
-          <a:lstStyle/>
-          <a:p>
-            <a:pPr marL="0" indent="0" algn="ctr">
-              <a:buNone/>
-            </a:pPr>
-            <a:r>
-              <a:rPr lang="en-US" sz="850" b="1" dirty="0">
-                <a:solidFill>
-                  <a:srgbClr val="FFFFFF"/>
-                </a:solidFill>
-                <a:latin typeface="Calibri" pitchFamily="34" charset="0"/>
-                <a:ea typeface="Calibri" pitchFamily="34" charset="-122"/>
-                <a:cs typeface="Calibri" pitchFamily="34" charset="-120"/>
-              </a:rPr>
-              <a:t>CURRENT DATE</a:t>
-            </a:r>
-            <a:endParaRPr lang="en-US" sz="850" dirty="0"/>
-          </a:p>
-        </p:txBody>
-      </p:sp>
-      <p:sp>
-        <p:nvSpPr>
-          <p:cNvPr id="43" name="Text 41"/>
-          <p:cNvSpPr txBox="1"/>
-          <p:nvPr/>
-        </p:nvSpPr>
-        <p:spPr>
-          <a:xfrm>
-            <a:off x="6492240" y="3749040"/>
-            <a:ext cx="2194560" cy="548640"/>
-          </a:xfrm>
-          <a:prstGeom prst="rect">
-            <a:avLst/>
-          </a:prstGeom>
-          <a:noFill/>
-          <a:ln/>
-        </p:spPr>
-        <p:txBody>
-          <a:bodyPr wrap="square" lIns="0" tIns="0" rIns="0" bIns="0" rtlCol="0" anchor="ctr"/>
-          <a:lstStyle/>
-          <a:p>
-            <a:pPr marL="0" indent="0">
-              <a:buNone/>
-            </a:pPr>
-            <a:r>
-              <a:rPr lang="en-US" sz="900" i="1" dirty="0">
-                <a:solidFill>
-                  <a:srgbClr val="A8B8D8"/>
-                </a:solidFill>
-                <a:latin typeface="Calibri" pitchFamily="34" charset="0"/>
-                <a:ea typeface="Calibri" pitchFamily="34" charset="-122"/>
-                <a:cs typeface="Calibri" pitchFamily="34" charset="-120"/>
-              </a:rPr>
-              <a:t>SQL for operational monitoring and case-management analytics.</a:t>
-            </a:r>
-            <a:endParaRPr lang="en-US" sz="900" dirty="0"/>
           </a:p>
         </p:txBody>
       </p:sp>
@@ -13298,7 +10112,7 @@
                 <a:ea typeface="Calibri" pitchFamily="34" charset="-122"/>
                 <a:cs typeface="Calibri" pitchFamily="34" charset="-120"/>
               </a:rPr>
-              <a:t>08  </a:t>
+              <a:t>06  </a:t>
             </a:r>
             <a:r>
               <a:rPr lang="en-US" sz="2100" b="1" dirty="0">
@@ -13387,7 +10201,7 @@
                 <a:ea typeface="Calibri" pitchFamily="34" charset="-122"/>
                 <a:cs typeface="Calibri" pitchFamily="34" charset="-120"/>
               </a:rPr>
-              <a:t>8 / 10</a:t>
+              <a:t>6 / 8</a:t>
             </a:r>
             <a:endParaRPr lang="en-US" sz="800" dirty="0"/>
           </a:p>
@@ -14493,7 +11307,7 @@
                 <a:ea typeface="Calibri" pitchFamily="34" charset="-122"/>
                 <a:cs typeface="Calibri" pitchFamily="34" charset="-120"/>
               </a:rPr>
-              <a:t>09  </a:t>
+              <a:t>07  </a:t>
             </a:r>
             <a:r>
               <a:rPr lang="en-US" sz="2100" b="1" dirty="0">
@@ -14582,7 +11396,7 @@
                 <a:ea typeface="Calibri" pitchFamily="34" charset="-122"/>
                 <a:cs typeface="Calibri" pitchFamily="34" charset="-120"/>
               </a:rPr>
-              <a:t>9 / 10</a:t>
+              <a:t>7 / 8</a:t>
             </a:r>
             <a:endParaRPr lang="en-US" sz="800" dirty="0"/>
           </a:p>
